--- a/dist/초4/수학/도형/초4_수학_도형_07_평면도형의이동.pptx
+++ b/dist/초4/수학/도형/초4_수학_도형_07_평면도형의이동.pptx
@@ -121,13 +121,13 @@
   <p:extLst>
     <p:ext uri="{521415D9-36F7-43E2-AB2F-B90AF26B5E84}">
       <p14:sectionLst xmlns:p14="http://schemas.microsoft.com/office/powerpoint/2010/main">
-        <p14:section name="도입" id="{7fd3c26f-c13b-b3c8-5b99-fa1e3e1b0d7b}">
+        <p14:section name="도입" id="{3261e0a0-dad6-938c-44ea-4e7942db6be3}">
           <p14:sldIdLst>
             <p14:sldId id="256"/>
             <p14:sldId id="257"/>
           </p14:sldIdLst>
         </p14:section>
-        <p14:section name="개념" id="{982c3849-0d09-1a57-48b7-6aa5a404bb1b}">
+        <p14:section name="개념" id="{e5fa6c04-a812-7aa5-9cc2-e0c30b88c597}">
           <p14:sldIdLst>
             <p14:sldId id="258"/>
             <p14:sldId id="259"/>
@@ -135,7 +135,7 @@
             <p14:sldId id="263"/>
           </p14:sldIdLst>
         </p14:section>
-        <p14:section name="연습" id="{38aabb65-2e1d-54b3-3887-22ef86d5b282}">
+        <p14:section name="연습" id="{0f46d67e-8d55-cc06-5f85-0fbb59f31273}">
           <p14:sldIdLst>
             <p14:sldId id="260"/>
             <p14:sldId id="261"/>
@@ -143,25 +143,25 @@
             <p14:sldId id="265"/>
           </p14:sldIdLst>
         </p14:section>
-        <p14:section name="개념" id="{1cc0a22d-8f36-5392-c421-dfeb793c3a21}">
+        <p14:section name="개념" id="{7cb029aa-f238-e445-47f3-07c8b6af1497}">
           <p14:sldIdLst/>
         </p14:section>
-        <p14:section name="연습" id="{ea306472-3048-d024-70ba-9a00c0eb4644}">
+        <p14:section name="연습" id="{09cd9c7d-f98a-a094-202b-5bbc3baf9083}">
           <p14:sldIdLst/>
         </p14:section>
-        <p14:section name="확인" id="{8bdd83b3-502f-472e-7f9f-1a08177016ff}">
+        <p14:section name="확인" id="{e348288d-9d87-4c3d-f21e-c9e57b6899cd}">
           <p14:sldIdLst>
             <p14:sldId id="266"/>
             <p14:sldId id="267"/>
             <p14:sldId id="268"/>
           </p14:sldIdLst>
         </p14:section>
-        <p14:section name="정리" id="{9a4799dd-88ce-0493-f2a6-9d86ce1120f6}">
+        <p14:section name="정리" id="{5e0a6473-a178-e066-20cd-ecf41ba0545a}">
           <p14:sldIdLst>
             <p14:sldId id="269"/>
           </p14:sldIdLst>
         </p14:section>
-        <p14:section name="보충" id="{090448e6-35c7-b15c-867a-933305e2988c}">
+        <p14:section name="보충" id="{03fb2ffe-6508-699b-7c9d-5c6080e4c699}">
           <p14:sldIdLst>
             <p14:sldId id="270"/>
           </p14:sldIdLst>

--- a/dist/초4/수학/도형/초4_수학_도형_07_평면도형의이동.pptx
+++ b/dist/초4/수학/도형/초4_수학_도형_07_평면도형의이동.pptx
@@ -121,13 +121,13 @@
   <p:extLst>
     <p:ext uri="{521415D9-36F7-43E2-AB2F-B90AF26B5E84}">
       <p14:sectionLst xmlns:p14="http://schemas.microsoft.com/office/powerpoint/2010/main">
-        <p14:section name="도입" id="{3261e0a0-dad6-938c-44ea-4e7942db6be3}">
+        <p14:section name="도입" id="{02e5cc71-63de-5166-74af-a2e82574cdda}">
           <p14:sldIdLst>
             <p14:sldId id="256"/>
             <p14:sldId id="257"/>
           </p14:sldIdLst>
         </p14:section>
-        <p14:section name="개념" id="{e5fa6c04-a812-7aa5-9cc2-e0c30b88c597}">
+        <p14:section name="개념" id="{ac0ac72d-e659-7e72-fa4d-65d5be18b8d2}">
           <p14:sldIdLst>
             <p14:sldId id="258"/>
             <p14:sldId id="259"/>
@@ -135,7 +135,7 @@
             <p14:sldId id="263"/>
           </p14:sldIdLst>
         </p14:section>
-        <p14:section name="연습" id="{0f46d67e-8d55-cc06-5f85-0fbb59f31273}">
+        <p14:section name="연습" id="{e4b5556f-be26-b54e-c8d6-ba6425aa6540}">
           <p14:sldIdLst>
             <p14:sldId id="260"/>
             <p14:sldId id="261"/>
@@ -143,25 +143,25 @@
             <p14:sldId id="265"/>
           </p14:sldIdLst>
         </p14:section>
-        <p14:section name="개념" id="{7cb029aa-f238-e445-47f3-07c8b6af1497}">
+        <p14:section name="개념" id="{4f205265-c9f5-c573-267d-d9b96468973d}">
           <p14:sldIdLst/>
         </p14:section>
-        <p14:section name="연습" id="{09cd9c7d-f98a-a094-202b-5bbc3baf9083}">
+        <p14:section name="연습" id="{1c268047-875d-1fb2-db40-0a2c34d0d9d9}">
           <p14:sldIdLst/>
         </p14:section>
-        <p14:section name="확인" id="{e348288d-9d87-4c3d-f21e-c9e57b6899cd}">
+        <p14:section name="확인" id="{9bf848fe-6609-460b-3ae5-6ca3f9324051}">
           <p14:sldIdLst>
             <p14:sldId id="266"/>
             <p14:sldId id="267"/>
             <p14:sldId id="268"/>
           </p14:sldIdLst>
         </p14:section>
-        <p14:section name="정리" id="{5e0a6473-a178-e066-20cd-ecf41ba0545a}">
+        <p14:section name="정리" id="{e986359b-47cd-5ef2-05f4-d95537906007}">
           <p14:sldIdLst>
             <p14:sldId id="269"/>
           </p14:sldIdLst>
         </p14:section>
-        <p14:section name="보충" id="{03fb2ffe-6508-699b-7c9d-5c6080e4c699}">
+        <p14:section name="보충" id="{0dba30b8-eb30-31b7-807e-d3004231b2a3}">
           <p14:sldIdLst>
             <p14:sldId id="270"/>
           </p14:sldIdLst>
@@ -3986,7 +3986,7 @@
       </p:sp>
       <p:sp>
         <p:nvSpPr>
-          <p:cNvPr id="3" name="S10-card339"/>
+          <p:cNvPr id="3" name="S10-card335"/>
           <p:cNvSpPr/>
           <p:nvPr/>
         </p:nvSpPr>
@@ -4013,7 +4013,7 @@
       </p:sp>
       <p:sp>
         <p:nvSpPr>
-          <p:cNvPr id="4" name="S10-cardtext340"/>
+          <p:cNvPr id="4" name="S10-cardtext336"/>
           <p:cNvSpPr txBox="1"/>
           <p:nvPr/>
         </p:nvSpPr>
@@ -4055,7 +4055,7 @@
       </p:sp>
       <p:sp>
         <p:nvSpPr>
-          <p:cNvPr id="5" name="S10-chip341"/>
+          <p:cNvPr id="5" name="S10-chip337"/>
           <p:cNvSpPr txBox="1"/>
           <p:nvPr/>
         </p:nvSpPr>
@@ -4102,7 +4102,7 @@
       </p:sp>
       <p:sp>
         <p:nvSpPr>
-          <p:cNvPr id="6" name="S10-mark342"/>
+          <p:cNvPr id="6" name="S10-mark338"/>
           <p:cNvSpPr/>
           <p:nvPr/>
         </p:nvSpPr>
@@ -4149,7 +4149,7 @@
       </p:sp>
       <p:sp>
         <p:nvSpPr>
-          <p:cNvPr id="7" name="S10-mark343"/>
+          <p:cNvPr id="7" name="S10-mark339"/>
           <p:cNvSpPr/>
           <p:nvPr/>
         </p:nvSpPr>
@@ -4172,7 +4172,7 @@
       </p:sp>
       <p:sp>
         <p:nvSpPr>
-          <p:cNvPr id="8" name="S10-mark344"/>
+          <p:cNvPr id="8" name="S10-mark340"/>
           <p:cNvSpPr/>
           <p:nvPr/>
         </p:nvSpPr>
@@ -4195,7 +4195,7 @@
       </p:sp>
       <p:sp>
         <p:nvSpPr>
-          <p:cNvPr id="9" name="S10-mark345"/>
+          <p:cNvPr id="9" name="S10-mark341"/>
           <p:cNvSpPr/>
           <p:nvPr/>
         </p:nvSpPr>
@@ -4218,7 +4218,7 @@
       </p:sp>
       <p:sp>
         <p:nvSpPr>
-          <p:cNvPr id="10" name="S10-mark346"/>
+          <p:cNvPr id="10" name="S10-mark342"/>
           <p:cNvSpPr/>
           <p:nvPr/>
         </p:nvSpPr>
@@ -4241,7 +4241,7 @@
       </p:sp>
       <p:sp>
         <p:nvSpPr>
-          <p:cNvPr id="11" name="S10-mark347"/>
+          <p:cNvPr id="11" name="S10-mark343"/>
           <p:cNvSpPr/>
           <p:nvPr/>
         </p:nvSpPr>
@@ -4264,7 +4264,7 @@
       </p:sp>
       <p:sp>
         <p:nvSpPr>
-          <p:cNvPr id="12" name="S10-mark348"/>
+          <p:cNvPr id="12" name="S10-mark344"/>
           <p:cNvSpPr/>
           <p:nvPr/>
         </p:nvSpPr>
@@ -4287,7 +4287,7 @@
       </p:sp>
       <p:sp>
         <p:nvSpPr>
-          <p:cNvPr id="13" name="S10-mark349"/>
+          <p:cNvPr id="13" name="S10-mark345"/>
           <p:cNvSpPr/>
           <p:nvPr/>
         </p:nvSpPr>
@@ -4310,7 +4310,7 @@
       </p:sp>
       <p:sp>
         <p:nvSpPr>
-          <p:cNvPr id="14" name="S10-mark350"/>
+          <p:cNvPr id="14" name="S10-mark346"/>
           <p:cNvSpPr/>
           <p:nvPr/>
         </p:nvSpPr>
@@ -4333,7 +4333,7 @@
       </p:sp>
       <p:sp>
         <p:nvSpPr>
-          <p:cNvPr id="15" name="S10-figure351" descr="처음 깃발: 깃대는 위를 향하고 깃발은 오른쪽을 가리킴"/>
+          <p:cNvPr id="15" name="S10-figure347" descr="처음 깃발: 깃대는 위를 향하고 깃발은 오른쪽을 가리킴"/>
           <p:cNvSpPr/>
           <p:nvPr/>
         </p:nvSpPr>
@@ -4383,7 +4383,7 @@
       </p:sp>
       <p:sp>
         <p:nvSpPr>
-          <p:cNvPr id="16" name="S10-label352"/>
+          <p:cNvPr id="16" name="S10-label348"/>
           <p:cNvSpPr txBox="1"/>
           <p:nvPr/>
         </p:nvSpPr>
@@ -4422,7 +4422,7 @@
       </p:sp>
       <p:sp>
         <p:nvSpPr>
-          <p:cNvPr id="17" name="S10-chip353"/>
+          <p:cNvPr id="17" name="S10-chip349"/>
           <p:cNvSpPr txBox="1"/>
           <p:nvPr/>
         </p:nvSpPr>
@@ -4469,7 +4469,7 @@
       </p:sp>
       <p:sp>
         <p:nvSpPr>
-          <p:cNvPr id="18" name="S10-mark354"/>
+          <p:cNvPr id="18" name="S10-mark350"/>
           <p:cNvSpPr/>
           <p:nvPr/>
         </p:nvSpPr>
@@ -4516,7 +4516,7 @@
       </p:sp>
       <p:sp>
         <p:nvSpPr>
-          <p:cNvPr id="19" name="S10-mark355"/>
+          <p:cNvPr id="19" name="S10-mark351"/>
           <p:cNvSpPr/>
           <p:nvPr/>
         </p:nvSpPr>
@@ -4539,7 +4539,7 @@
       </p:sp>
       <p:sp>
         <p:nvSpPr>
-          <p:cNvPr id="20" name="S10-mark356"/>
+          <p:cNvPr id="20" name="S10-mark352"/>
           <p:cNvSpPr/>
           <p:nvPr/>
         </p:nvSpPr>
@@ -4562,7 +4562,7 @@
       </p:sp>
       <p:sp>
         <p:nvSpPr>
-          <p:cNvPr id="21" name="S10-mark357"/>
+          <p:cNvPr id="21" name="S10-mark353"/>
           <p:cNvSpPr/>
           <p:nvPr/>
         </p:nvSpPr>
@@ -4585,7 +4585,7 @@
       </p:sp>
       <p:sp>
         <p:nvSpPr>
-          <p:cNvPr id="22" name="S10-mark358"/>
+          <p:cNvPr id="22" name="S10-mark354"/>
           <p:cNvSpPr/>
           <p:nvPr/>
         </p:nvSpPr>
@@ -4608,7 +4608,7 @@
       </p:sp>
       <p:sp>
         <p:nvSpPr>
-          <p:cNvPr id="23" name="S10-mark359"/>
+          <p:cNvPr id="23" name="S10-mark355"/>
           <p:cNvSpPr/>
           <p:nvPr/>
         </p:nvSpPr>
@@ -4631,7 +4631,7 @@
       </p:sp>
       <p:sp>
         <p:nvSpPr>
-          <p:cNvPr id="24" name="S10-mark360"/>
+          <p:cNvPr id="24" name="S10-mark356"/>
           <p:cNvSpPr/>
           <p:nvPr/>
         </p:nvSpPr>
@@ -4654,7 +4654,7 @@
       </p:sp>
       <p:sp>
         <p:nvSpPr>
-          <p:cNvPr id="25" name="S10-mark361"/>
+          <p:cNvPr id="25" name="S10-mark357"/>
           <p:cNvSpPr/>
           <p:nvPr/>
         </p:nvSpPr>
@@ -4677,7 +4677,7 @@
       </p:sp>
       <p:sp>
         <p:nvSpPr>
-          <p:cNvPr id="26" name="S10-mark362"/>
+          <p:cNvPr id="26" name="S10-mark358"/>
           <p:cNvSpPr/>
           <p:nvPr/>
         </p:nvSpPr>
@@ -4700,7 +4700,7 @@
       </p:sp>
       <p:sp>
         <p:nvSpPr>
-          <p:cNvPr id="27" name="S10-figure363" descr="가: 깃대가 왼쪽을 향하고 깃발이 위쪽을 가리킴"/>
+          <p:cNvPr id="27" name="S10-figure359" descr="가: 깃대가 왼쪽을 향하고 깃발이 위쪽을 가리킴"/>
           <p:cNvSpPr/>
           <p:nvPr/>
         </p:nvSpPr>
@@ -4750,7 +4750,7 @@
       </p:sp>
       <p:sp>
         <p:nvSpPr>
-          <p:cNvPr id="28" name="S10-label364"/>
+          <p:cNvPr id="28" name="S10-label360"/>
           <p:cNvSpPr txBox="1"/>
           <p:nvPr/>
         </p:nvSpPr>
@@ -4789,7 +4789,7 @@
       </p:sp>
       <p:sp>
         <p:nvSpPr>
-          <p:cNvPr id="29" name="S10-chip365"/>
+          <p:cNvPr id="29" name="S10-chip361"/>
           <p:cNvSpPr txBox="1"/>
           <p:nvPr/>
         </p:nvSpPr>
@@ -4836,7 +4836,7 @@
       </p:sp>
       <p:sp>
         <p:nvSpPr>
-          <p:cNvPr id="30" name="S10-mark366"/>
+          <p:cNvPr id="30" name="S10-mark362"/>
           <p:cNvSpPr/>
           <p:nvPr/>
         </p:nvSpPr>
@@ -4883,7 +4883,7 @@
       </p:sp>
       <p:sp>
         <p:nvSpPr>
-          <p:cNvPr id="31" name="S10-mark367"/>
+          <p:cNvPr id="31" name="S10-mark363"/>
           <p:cNvSpPr/>
           <p:nvPr/>
         </p:nvSpPr>
@@ -4906,7 +4906,7 @@
       </p:sp>
       <p:sp>
         <p:nvSpPr>
-          <p:cNvPr id="32" name="S10-mark368"/>
+          <p:cNvPr id="32" name="S10-mark364"/>
           <p:cNvSpPr/>
           <p:nvPr/>
         </p:nvSpPr>
@@ -4929,7 +4929,7 @@
       </p:sp>
       <p:sp>
         <p:nvSpPr>
-          <p:cNvPr id="33" name="S10-mark369"/>
+          <p:cNvPr id="33" name="S10-mark365"/>
           <p:cNvSpPr/>
           <p:nvPr/>
         </p:nvSpPr>
@@ -4952,7 +4952,7 @@
       </p:sp>
       <p:sp>
         <p:nvSpPr>
-          <p:cNvPr id="34" name="S10-mark370"/>
+          <p:cNvPr id="34" name="S10-mark366"/>
           <p:cNvSpPr/>
           <p:nvPr/>
         </p:nvSpPr>
@@ -4975,7 +4975,7 @@
       </p:sp>
       <p:sp>
         <p:nvSpPr>
-          <p:cNvPr id="35" name="S10-mark371"/>
+          <p:cNvPr id="35" name="S10-mark367"/>
           <p:cNvSpPr/>
           <p:nvPr/>
         </p:nvSpPr>
@@ -4998,7 +4998,7 @@
       </p:sp>
       <p:sp>
         <p:nvSpPr>
-          <p:cNvPr id="36" name="S10-mark372"/>
+          <p:cNvPr id="36" name="S10-mark368"/>
           <p:cNvSpPr/>
           <p:nvPr/>
         </p:nvSpPr>
@@ -5021,7 +5021,7 @@
       </p:sp>
       <p:sp>
         <p:nvSpPr>
-          <p:cNvPr id="37" name="S10-mark373"/>
+          <p:cNvPr id="37" name="S10-mark369"/>
           <p:cNvSpPr/>
           <p:nvPr/>
         </p:nvSpPr>
@@ -5044,7 +5044,7 @@
       </p:sp>
       <p:sp>
         <p:nvSpPr>
-          <p:cNvPr id="38" name="S10-mark374"/>
+          <p:cNvPr id="38" name="S10-mark370"/>
           <p:cNvSpPr/>
           <p:nvPr/>
         </p:nvSpPr>
@@ -5067,7 +5067,7 @@
       </p:sp>
       <p:sp>
         <p:nvSpPr>
-          <p:cNvPr id="39" name="S10-figure375" descr="나: 깃대가 오른쪽을 향하고 깃발이 아래쪽을 가리킴"/>
+          <p:cNvPr id="39" name="S10-figure371" descr="나: 깃대가 오른쪽을 향하고 깃발이 아래쪽을 가리킴"/>
           <p:cNvSpPr/>
           <p:nvPr/>
         </p:nvSpPr>
@@ -5117,7 +5117,7 @@
       </p:sp>
       <p:sp>
         <p:nvSpPr>
-          <p:cNvPr id="40" name="S10-label376"/>
+          <p:cNvPr id="40" name="S10-label372"/>
           <p:cNvSpPr txBox="1"/>
           <p:nvPr/>
         </p:nvSpPr>
@@ -5156,7 +5156,7 @@
       </p:sp>
       <p:sp>
         <p:nvSpPr>
-          <p:cNvPr id="41" name="S10-chip377"/>
+          <p:cNvPr id="41" name="S10-chip373"/>
           <p:cNvSpPr txBox="1"/>
           <p:nvPr/>
         </p:nvSpPr>
@@ -5203,7 +5203,7 @@
       </p:sp>
       <p:sp>
         <p:nvSpPr>
-          <p:cNvPr id="42" name="S10-mark378"/>
+          <p:cNvPr id="42" name="S10-mark374"/>
           <p:cNvSpPr/>
           <p:nvPr/>
         </p:nvSpPr>
@@ -5250,7 +5250,7 @@
       </p:sp>
       <p:sp>
         <p:nvSpPr>
-          <p:cNvPr id="43" name="S10-mark379"/>
+          <p:cNvPr id="43" name="S10-mark375"/>
           <p:cNvSpPr/>
           <p:nvPr/>
         </p:nvSpPr>
@@ -5273,7 +5273,7 @@
       </p:sp>
       <p:sp>
         <p:nvSpPr>
-          <p:cNvPr id="44" name="S10-mark380"/>
+          <p:cNvPr id="44" name="S10-mark376"/>
           <p:cNvSpPr/>
           <p:nvPr/>
         </p:nvSpPr>
@@ -5296,7 +5296,7 @@
       </p:sp>
       <p:sp>
         <p:nvSpPr>
-          <p:cNvPr id="45" name="S10-mark381"/>
+          <p:cNvPr id="45" name="S10-mark377"/>
           <p:cNvSpPr/>
           <p:nvPr/>
         </p:nvSpPr>
@@ -5319,7 +5319,7 @@
       </p:sp>
       <p:sp>
         <p:nvSpPr>
-          <p:cNvPr id="46" name="S10-mark382"/>
+          <p:cNvPr id="46" name="S10-mark378"/>
           <p:cNvSpPr/>
           <p:nvPr/>
         </p:nvSpPr>
@@ -5342,7 +5342,7 @@
       </p:sp>
       <p:sp>
         <p:nvSpPr>
-          <p:cNvPr id="47" name="S10-mark383"/>
+          <p:cNvPr id="47" name="S10-mark379"/>
           <p:cNvSpPr/>
           <p:nvPr/>
         </p:nvSpPr>
@@ -5365,7 +5365,7 @@
       </p:sp>
       <p:sp>
         <p:nvSpPr>
-          <p:cNvPr id="48" name="S10-mark384"/>
+          <p:cNvPr id="48" name="S10-mark380"/>
           <p:cNvSpPr/>
           <p:nvPr/>
         </p:nvSpPr>
@@ -5388,7 +5388,7 @@
       </p:sp>
       <p:sp>
         <p:nvSpPr>
-          <p:cNvPr id="49" name="S10-mark385"/>
+          <p:cNvPr id="49" name="S10-mark381"/>
           <p:cNvSpPr/>
           <p:nvPr/>
         </p:nvSpPr>
@@ -5411,7 +5411,7 @@
       </p:sp>
       <p:sp>
         <p:nvSpPr>
-          <p:cNvPr id="50" name="S10-mark386"/>
+          <p:cNvPr id="50" name="S10-mark382"/>
           <p:cNvSpPr/>
           <p:nvPr/>
         </p:nvSpPr>
@@ -5434,7 +5434,7 @@
       </p:sp>
       <p:sp>
         <p:nvSpPr>
-          <p:cNvPr id="51" name="S10-figure387" descr="다: 깃대가 아래를 향하고 깃발이 왼쪽을 가리킴"/>
+          <p:cNvPr id="51" name="S10-figure383" descr="다: 깃대가 아래를 향하고 깃발이 왼쪽을 가리킴"/>
           <p:cNvSpPr/>
           <p:nvPr/>
         </p:nvSpPr>
@@ -5484,7 +5484,7 @@
       </p:sp>
       <p:sp>
         <p:nvSpPr>
-          <p:cNvPr id="52" name="S10-label388"/>
+          <p:cNvPr id="52" name="S10-label384"/>
           <p:cNvSpPr txBox="1"/>
           <p:nvPr/>
         </p:nvSpPr>
@@ -5637,7 +5637,7 @@
       </p:sp>
       <p:sp>
         <p:nvSpPr>
-          <p:cNvPr id="3" name="S11-text389"/>
+          <p:cNvPr id="3" name="S11-text385"/>
           <p:cNvSpPr txBox="1"/>
           <p:nvPr/>
         </p:nvSpPr>
@@ -5676,13 +5676,13 @@
       </p:sp>
       <p:sp>
         <p:nvSpPr>
-          <p:cNvPr id="4" name="S11-mark390"/>
-          <p:cNvSpPr/>
-          <p:nvPr/>
-        </p:nvSpPr>
-        <p:spPr>
-          <a:xfrm>
-            <a:off x="6738801" y="3004784"/>
+          <p:cNvPr id="4" name="S11-mark386"/>
+          <p:cNvSpPr/>
+          <p:nvPr/>
+        </p:nvSpPr>
+        <p:spPr>
+          <a:xfrm>
+            <a:off x="6738801" y="2819781"/>
             <a:ext cx="1110016" cy="740011"/>
           </a:xfrm>
           <a:custGeom>
@@ -5723,13 +5723,13 @@
       </p:sp>
       <p:sp>
         <p:nvSpPr>
-          <p:cNvPr id="5" name="S11-mark391"/>
-          <p:cNvSpPr/>
-          <p:nvPr/>
-        </p:nvSpPr>
-        <p:spPr>
-          <a:xfrm>
-            <a:off x="8588829" y="3004784"/>
+          <p:cNvPr id="5" name="S11-mark387"/>
+          <p:cNvSpPr/>
+          <p:nvPr/>
+        </p:nvSpPr>
+        <p:spPr>
+          <a:xfrm>
+            <a:off x="8588829" y="2819781"/>
             <a:ext cx="1110016" cy="740011"/>
           </a:xfrm>
           <a:custGeom>
@@ -5770,13 +5770,13 @@
       </p:sp>
       <p:sp>
         <p:nvSpPr>
-          <p:cNvPr id="6" name="S11-mark392"/>
-          <p:cNvSpPr/>
-          <p:nvPr/>
-        </p:nvSpPr>
-        <p:spPr>
-          <a:xfrm>
-            <a:off x="10068850" y="3004784"/>
+          <p:cNvPr id="6" name="S11-mark388"/>
+          <p:cNvSpPr/>
+          <p:nvPr/>
+        </p:nvSpPr>
+        <p:spPr>
+          <a:xfrm>
+            <a:off x="10068850" y="2819781"/>
             <a:ext cx="1110016" cy="740011"/>
           </a:xfrm>
           <a:custGeom>
@@ -5817,13 +5817,13 @@
       </p:sp>
       <p:sp>
         <p:nvSpPr>
-          <p:cNvPr id="7" name="S11-mark393"/>
-          <p:cNvSpPr/>
-          <p:nvPr/>
-        </p:nvSpPr>
-        <p:spPr>
-          <a:xfrm>
-            <a:off x="7108807" y="4484805"/>
+          <p:cNvPr id="7" name="S11-mark389"/>
+          <p:cNvSpPr/>
+          <p:nvPr/>
+        </p:nvSpPr>
+        <p:spPr>
+          <a:xfrm>
+            <a:off x="7108807" y="4299803"/>
             <a:ext cx="740011" cy="1110016"/>
           </a:xfrm>
           <a:custGeom>
@@ -5864,13 +5864,13 @@
       </p:sp>
       <p:sp>
         <p:nvSpPr>
-          <p:cNvPr id="8" name="S11-mark394"/>
-          <p:cNvSpPr/>
-          <p:nvPr/>
-        </p:nvSpPr>
-        <p:spPr>
-          <a:xfrm>
-            <a:off x="8958834" y="4484805"/>
+          <p:cNvPr id="8" name="S11-mark390"/>
+          <p:cNvSpPr/>
+          <p:nvPr/>
+        </p:nvSpPr>
+        <p:spPr>
+          <a:xfrm>
+            <a:off x="8958834" y="4299803"/>
             <a:ext cx="1110016" cy="740011"/>
           </a:xfrm>
           <a:custGeom>
@@ -5911,358 +5911,358 @@
       </p:sp>
       <p:sp>
         <p:nvSpPr>
-          <p:cNvPr id="9" name="S11-mark395"/>
+          <p:cNvPr id="9" name="S11-mark391"/>
           <p:cNvSpPr/>
           <p:nvPr/>
         </p:nvSpPr>
         <p:spPr>
           <a:xfrm flipV="1">
-            <a:off x="6368796" y="2264773"/>
-            <a:ext cx="0" cy="3700054"/>
-          </a:xfrm>
-          <a:prstGeom prst="line">
-            <a:avLst/>
-          </a:prstGeom>
-          <a:noFill/>
-          <a:ln w="9525">
-            <a:solidFill>
-              <a:srgbClr val="B8C2CC"/>
-            </a:solidFill>
-            <a:prstDash val="solid"/>
-          </a:ln>
-        </p:spPr>
-      </p:sp>
-      <p:sp>
-        <p:nvSpPr>
-          <p:cNvPr id="10" name="S11-mark396"/>
+            <a:off x="6368796" y="2449776"/>
+            <a:ext cx="0" cy="3330049"/>
+          </a:xfrm>
+          <a:prstGeom prst="line">
+            <a:avLst/>
+          </a:prstGeom>
+          <a:noFill/>
+          <a:ln w="9525">
+            <a:solidFill>
+              <a:srgbClr val="B8C2CC"/>
+            </a:solidFill>
+            <a:prstDash val="solid"/>
+          </a:ln>
+        </p:spPr>
+      </p:sp>
+      <p:sp>
+        <p:nvSpPr>
+          <p:cNvPr id="10" name="S11-mark392"/>
           <p:cNvSpPr/>
           <p:nvPr/>
         </p:nvSpPr>
         <p:spPr>
           <a:xfrm flipV="1">
-            <a:off x="6738801" y="2264773"/>
-            <a:ext cx="0" cy="3700054"/>
-          </a:xfrm>
-          <a:prstGeom prst="line">
-            <a:avLst/>
-          </a:prstGeom>
-          <a:noFill/>
-          <a:ln w="9525">
-            <a:solidFill>
-              <a:srgbClr val="B8C2CC"/>
-            </a:solidFill>
-            <a:prstDash val="solid"/>
-          </a:ln>
-        </p:spPr>
-      </p:sp>
-      <p:sp>
-        <p:nvSpPr>
-          <p:cNvPr id="11" name="S11-mark397"/>
+            <a:off x="6738801" y="2449776"/>
+            <a:ext cx="0" cy="3330049"/>
+          </a:xfrm>
+          <a:prstGeom prst="line">
+            <a:avLst/>
+          </a:prstGeom>
+          <a:noFill/>
+          <a:ln w="9525">
+            <a:solidFill>
+              <a:srgbClr val="B8C2CC"/>
+            </a:solidFill>
+            <a:prstDash val="solid"/>
+          </a:ln>
+        </p:spPr>
+      </p:sp>
+      <p:sp>
+        <p:nvSpPr>
+          <p:cNvPr id="11" name="S11-mark393"/>
           <p:cNvSpPr/>
           <p:nvPr/>
         </p:nvSpPr>
         <p:spPr>
           <a:xfrm flipV="1">
-            <a:off x="7108807" y="2264773"/>
-            <a:ext cx="0" cy="3700054"/>
-          </a:xfrm>
-          <a:prstGeom prst="line">
-            <a:avLst/>
-          </a:prstGeom>
-          <a:noFill/>
-          <a:ln w="9525">
-            <a:solidFill>
-              <a:srgbClr val="B8C2CC"/>
-            </a:solidFill>
-            <a:prstDash val="solid"/>
-          </a:ln>
-        </p:spPr>
-      </p:sp>
-      <p:sp>
-        <p:nvSpPr>
-          <p:cNvPr id="12" name="S11-mark398"/>
+            <a:off x="7108807" y="2449776"/>
+            <a:ext cx="0" cy="3330049"/>
+          </a:xfrm>
+          <a:prstGeom prst="line">
+            <a:avLst/>
+          </a:prstGeom>
+          <a:noFill/>
+          <a:ln w="9525">
+            <a:solidFill>
+              <a:srgbClr val="B8C2CC"/>
+            </a:solidFill>
+            <a:prstDash val="solid"/>
+          </a:ln>
+        </p:spPr>
+      </p:sp>
+      <p:sp>
+        <p:nvSpPr>
+          <p:cNvPr id="12" name="S11-mark394"/>
           <p:cNvSpPr/>
           <p:nvPr/>
         </p:nvSpPr>
         <p:spPr>
           <a:xfrm flipV="1">
-            <a:off x="7478812" y="2264773"/>
-            <a:ext cx="0" cy="3700054"/>
-          </a:xfrm>
-          <a:prstGeom prst="line">
-            <a:avLst/>
-          </a:prstGeom>
-          <a:noFill/>
-          <a:ln w="9525">
-            <a:solidFill>
-              <a:srgbClr val="B8C2CC"/>
-            </a:solidFill>
-            <a:prstDash val="solid"/>
-          </a:ln>
-        </p:spPr>
-      </p:sp>
-      <p:sp>
-        <p:nvSpPr>
-          <p:cNvPr id="13" name="S11-mark399"/>
+            <a:off x="7478812" y="2449776"/>
+            <a:ext cx="0" cy="3330049"/>
+          </a:xfrm>
+          <a:prstGeom prst="line">
+            <a:avLst/>
+          </a:prstGeom>
+          <a:noFill/>
+          <a:ln w="9525">
+            <a:solidFill>
+              <a:srgbClr val="B8C2CC"/>
+            </a:solidFill>
+            <a:prstDash val="solid"/>
+          </a:ln>
+        </p:spPr>
+      </p:sp>
+      <p:sp>
+        <p:nvSpPr>
+          <p:cNvPr id="13" name="S11-mark395"/>
           <p:cNvSpPr/>
           <p:nvPr/>
         </p:nvSpPr>
         <p:spPr>
           <a:xfrm flipV="1">
-            <a:off x="7848818" y="2264773"/>
-            <a:ext cx="0" cy="3700054"/>
-          </a:xfrm>
-          <a:prstGeom prst="line">
-            <a:avLst/>
-          </a:prstGeom>
-          <a:noFill/>
-          <a:ln w="9525">
-            <a:solidFill>
-              <a:srgbClr val="B8C2CC"/>
-            </a:solidFill>
-            <a:prstDash val="solid"/>
-          </a:ln>
-        </p:spPr>
-      </p:sp>
-      <p:sp>
-        <p:nvSpPr>
-          <p:cNvPr id="14" name="S11-mark400"/>
+            <a:off x="7848818" y="2449776"/>
+            <a:ext cx="0" cy="3330049"/>
+          </a:xfrm>
+          <a:prstGeom prst="line">
+            <a:avLst/>
+          </a:prstGeom>
+          <a:noFill/>
+          <a:ln w="9525">
+            <a:solidFill>
+              <a:srgbClr val="B8C2CC"/>
+            </a:solidFill>
+            <a:prstDash val="solid"/>
+          </a:ln>
+        </p:spPr>
+      </p:sp>
+      <p:sp>
+        <p:nvSpPr>
+          <p:cNvPr id="14" name="S11-mark396"/>
           <p:cNvSpPr/>
           <p:nvPr/>
         </p:nvSpPr>
         <p:spPr>
           <a:xfrm flipV="1">
-            <a:off x="8218823" y="2264773"/>
-            <a:ext cx="0" cy="3700054"/>
-          </a:xfrm>
-          <a:prstGeom prst="line">
-            <a:avLst/>
-          </a:prstGeom>
-          <a:noFill/>
-          <a:ln w="9525">
-            <a:solidFill>
-              <a:srgbClr val="B8C2CC"/>
-            </a:solidFill>
-            <a:prstDash val="solid"/>
-          </a:ln>
-        </p:spPr>
-      </p:sp>
-      <p:sp>
-        <p:nvSpPr>
-          <p:cNvPr id="15" name="S11-mark401"/>
+            <a:off x="8218823" y="2449776"/>
+            <a:ext cx="0" cy="3330049"/>
+          </a:xfrm>
+          <a:prstGeom prst="line">
+            <a:avLst/>
+          </a:prstGeom>
+          <a:noFill/>
+          <a:ln w="9525">
+            <a:solidFill>
+              <a:srgbClr val="B8C2CC"/>
+            </a:solidFill>
+            <a:prstDash val="solid"/>
+          </a:ln>
+        </p:spPr>
+      </p:sp>
+      <p:sp>
+        <p:nvSpPr>
+          <p:cNvPr id="15" name="S11-mark397"/>
           <p:cNvSpPr/>
           <p:nvPr/>
         </p:nvSpPr>
         <p:spPr>
           <a:xfrm flipV="1">
-            <a:off x="8588829" y="2264773"/>
-            <a:ext cx="0" cy="3700054"/>
-          </a:xfrm>
-          <a:prstGeom prst="line">
-            <a:avLst/>
-          </a:prstGeom>
-          <a:noFill/>
-          <a:ln w="9525">
-            <a:solidFill>
-              <a:srgbClr val="B8C2CC"/>
-            </a:solidFill>
-            <a:prstDash val="solid"/>
-          </a:ln>
-        </p:spPr>
-      </p:sp>
-      <p:sp>
-        <p:nvSpPr>
-          <p:cNvPr id="16" name="S11-mark402"/>
+            <a:off x="8588829" y="2449776"/>
+            <a:ext cx="0" cy="3330049"/>
+          </a:xfrm>
+          <a:prstGeom prst="line">
+            <a:avLst/>
+          </a:prstGeom>
+          <a:noFill/>
+          <a:ln w="9525">
+            <a:solidFill>
+              <a:srgbClr val="B8C2CC"/>
+            </a:solidFill>
+            <a:prstDash val="solid"/>
+          </a:ln>
+        </p:spPr>
+      </p:sp>
+      <p:sp>
+        <p:nvSpPr>
+          <p:cNvPr id="16" name="S11-mark398"/>
           <p:cNvSpPr/>
           <p:nvPr/>
         </p:nvSpPr>
         <p:spPr>
           <a:xfrm flipV="1">
-            <a:off x="8958834" y="2264773"/>
-            <a:ext cx="0" cy="3700054"/>
-          </a:xfrm>
-          <a:prstGeom prst="line">
-            <a:avLst/>
-          </a:prstGeom>
-          <a:noFill/>
-          <a:ln w="9525">
-            <a:solidFill>
-              <a:srgbClr val="B8C2CC"/>
-            </a:solidFill>
-            <a:prstDash val="solid"/>
-          </a:ln>
-        </p:spPr>
-      </p:sp>
-      <p:sp>
-        <p:nvSpPr>
-          <p:cNvPr id="17" name="S11-mark403"/>
+            <a:off x="8958834" y="2449776"/>
+            <a:ext cx="0" cy="3330049"/>
+          </a:xfrm>
+          <a:prstGeom prst="line">
+            <a:avLst/>
+          </a:prstGeom>
+          <a:noFill/>
+          <a:ln w="9525">
+            <a:solidFill>
+              <a:srgbClr val="B8C2CC"/>
+            </a:solidFill>
+            <a:prstDash val="solid"/>
+          </a:ln>
+        </p:spPr>
+      </p:sp>
+      <p:sp>
+        <p:nvSpPr>
+          <p:cNvPr id="17" name="S11-mark399"/>
           <p:cNvSpPr/>
           <p:nvPr/>
         </p:nvSpPr>
         <p:spPr>
           <a:xfrm flipV="1">
-            <a:off x="9328839" y="2264773"/>
-            <a:ext cx="0" cy="3700054"/>
-          </a:xfrm>
-          <a:prstGeom prst="line">
-            <a:avLst/>
-          </a:prstGeom>
-          <a:noFill/>
-          <a:ln w="9525">
-            <a:solidFill>
-              <a:srgbClr val="B8C2CC"/>
-            </a:solidFill>
-            <a:prstDash val="solid"/>
-          </a:ln>
-        </p:spPr>
-      </p:sp>
-      <p:sp>
-        <p:nvSpPr>
-          <p:cNvPr id="18" name="S11-mark404"/>
+            <a:off x="9328839" y="2449776"/>
+            <a:ext cx="0" cy="3330049"/>
+          </a:xfrm>
+          <a:prstGeom prst="line">
+            <a:avLst/>
+          </a:prstGeom>
+          <a:noFill/>
+          <a:ln w="9525">
+            <a:solidFill>
+              <a:srgbClr val="B8C2CC"/>
+            </a:solidFill>
+            <a:prstDash val="solid"/>
+          </a:ln>
+        </p:spPr>
+      </p:sp>
+      <p:sp>
+        <p:nvSpPr>
+          <p:cNvPr id="18" name="S11-mark400"/>
           <p:cNvSpPr/>
           <p:nvPr/>
         </p:nvSpPr>
         <p:spPr>
           <a:xfrm flipV="1">
-            <a:off x="9698845" y="2264773"/>
-            <a:ext cx="0" cy="3700054"/>
-          </a:xfrm>
-          <a:prstGeom prst="line">
-            <a:avLst/>
-          </a:prstGeom>
-          <a:noFill/>
-          <a:ln w="9525">
-            <a:solidFill>
-              <a:srgbClr val="B8C2CC"/>
-            </a:solidFill>
-            <a:prstDash val="solid"/>
-          </a:ln>
-        </p:spPr>
-      </p:sp>
-      <p:sp>
-        <p:nvSpPr>
-          <p:cNvPr id="19" name="S11-mark405"/>
+            <a:off x="9698845" y="2449776"/>
+            <a:ext cx="0" cy="3330049"/>
+          </a:xfrm>
+          <a:prstGeom prst="line">
+            <a:avLst/>
+          </a:prstGeom>
+          <a:noFill/>
+          <a:ln w="9525">
+            <a:solidFill>
+              <a:srgbClr val="B8C2CC"/>
+            </a:solidFill>
+            <a:prstDash val="solid"/>
+          </a:ln>
+        </p:spPr>
+      </p:sp>
+      <p:sp>
+        <p:nvSpPr>
+          <p:cNvPr id="19" name="S11-mark401"/>
           <p:cNvSpPr/>
           <p:nvPr/>
         </p:nvSpPr>
         <p:spPr>
           <a:xfrm flipV="1">
-            <a:off x="10068850" y="2264773"/>
-            <a:ext cx="0" cy="3700054"/>
-          </a:xfrm>
-          <a:prstGeom prst="line">
-            <a:avLst/>
-          </a:prstGeom>
-          <a:noFill/>
-          <a:ln w="9525">
-            <a:solidFill>
-              <a:srgbClr val="B8C2CC"/>
-            </a:solidFill>
-            <a:prstDash val="solid"/>
-          </a:ln>
-        </p:spPr>
-      </p:sp>
-      <p:sp>
-        <p:nvSpPr>
-          <p:cNvPr id="20" name="S11-mark406"/>
+            <a:off x="10068850" y="2449776"/>
+            <a:ext cx="0" cy="3330049"/>
+          </a:xfrm>
+          <a:prstGeom prst="line">
+            <a:avLst/>
+          </a:prstGeom>
+          <a:noFill/>
+          <a:ln w="9525">
+            <a:solidFill>
+              <a:srgbClr val="B8C2CC"/>
+            </a:solidFill>
+            <a:prstDash val="solid"/>
+          </a:ln>
+        </p:spPr>
+      </p:sp>
+      <p:sp>
+        <p:nvSpPr>
+          <p:cNvPr id="20" name="S11-mark402"/>
           <p:cNvSpPr/>
           <p:nvPr/>
         </p:nvSpPr>
         <p:spPr>
           <a:xfrm flipV="1">
-            <a:off x="10438856" y="2264773"/>
-            <a:ext cx="0" cy="3700054"/>
-          </a:xfrm>
-          <a:prstGeom prst="line">
-            <a:avLst/>
-          </a:prstGeom>
-          <a:noFill/>
-          <a:ln w="9525">
-            <a:solidFill>
-              <a:srgbClr val="B8C2CC"/>
-            </a:solidFill>
-            <a:prstDash val="solid"/>
-          </a:ln>
-        </p:spPr>
-      </p:sp>
-      <p:sp>
-        <p:nvSpPr>
-          <p:cNvPr id="21" name="S11-mark407"/>
+            <a:off x="10438856" y="2449776"/>
+            <a:ext cx="0" cy="3330049"/>
+          </a:xfrm>
+          <a:prstGeom prst="line">
+            <a:avLst/>
+          </a:prstGeom>
+          <a:noFill/>
+          <a:ln w="9525">
+            <a:solidFill>
+              <a:srgbClr val="B8C2CC"/>
+            </a:solidFill>
+            <a:prstDash val="solid"/>
+          </a:ln>
+        </p:spPr>
+      </p:sp>
+      <p:sp>
+        <p:nvSpPr>
+          <p:cNvPr id="21" name="S11-mark403"/>
           <p:cNvSpPr/>
           <p:nvPr/>
         </p:nvSpPr>
         <p:spPr>
           <a:xfrm flipV="1">
-            <a:off x="10808861" y="2264773"/>
-            <a:ext cx="0" cy="3700054"/>
-          </a:xfrm>
-          <a:prstGeom prst="line">
-            <a:avLst/>
-          </a:prstGeom>
-          <a:noFill/>
-          <a:ln w="9525">
-            <a:solidFill>
-              <a:srgbClr val="B8C2CC"/>
-            </a:solidFill>
-            <a:prstDash val="solid"/>
-          </a:ln>
-        </p:spPr>
-      </p:sp>
-      <p:sp>
-        <p:nvSpPr>
-          <p:cNvPr id="22" name="S11-mark408"/>
+            <a:off x="10808861" y="2449776"/>
+            <a:ext cx="0" cy="3330049"/>
+          </a:xfrm>
+          <a:prstGeom prst="line">
+            <a:avLst/>
+          </a:prstGeom>
+          <a:noFill/>
+          <a:ln w="9525">
+            <a:solidFill>
+              <a:srgbClr val="B8C2CC"/>
+            </a:solidFill>
+            <a:prstDash val="solid"/>
+          </a:ln>
+        </p:spPr>
+      </p:sp>
+      <p:sp>
+        <p:nvSpPr>
+          <p:cNvPr id="22" name="S11-mark404"/>
           <p:cNvSpPr/>
           <p:nvPr/>
         </p:nvSpPr>
         <p:spPr>
           <a:xfrm flipV="1">
-            <a:off x="11178867" y="2264773"/>
-            <a:ext cx="0" cy="3700054"/>
-          </a:xfrm>
-          <a:prstGeom prst="line">
-            <a:avLst/>
-          </a:prstGeom>
-          <a:noFill/>
-          <a:ln w="9525">
-            <a:solidFill>
-              <a:srgbClr val="B8C2CC"/>
-            </a:solidFill>
-            <a:prstDash val="solid"/>
-          </a:ln>
-        </p:spPr>
-      </p:sp>
-      <p:sp>
-        <p:nvSpPr>
-          <p:cNvPr id="23" name="S11-mark409"/>
+            <a:off x="11178867" y="2449776"/>
+            <a:ext cx="0" cy="3330049"/>
+          </a:xfrm>
+          <a:prstGeom prst="line">
+            <a:avLst/>
+          </a:prstGeom>
+          <a:noFill/>
+          <a:ln w="9525">
+            <a:solidFill>
+              <a:srgbClr val="B8C2CC"/>
+            </a:solidFill>
+            <a:prstDash val="solid"/>
+          </a:ln>
+        </p:spPr>
+      </p:sp>
+      <p:sp>
+        <p:nvSpPr>
+          <p:cNvPr id="23" name="S11-mark405"/>
           <p:cNvSpPr/>
           <p:nvPr/>
         </p:nvSpPr>
         <p:spPr>
           <a:xfrm flipV="1">
-            <a:off x="11548872" y="2264773"/>
-            <a:ext cx="0" cy="3700054"/>
-          </a:xfrm>
-          <a:prstGeom prst="line">
-            <a:avLst/>
-          </a:prstGeom>
-          <a:noFill/>
-          <a:ln w="9525">
-            <a:solidFill>
-              <a:srgbClr val="B8C2CC"/>
-            </a:solidFill>
-            <a:prstDash val="solid"/>
-          </a:ln>
-        </p:spPr>
-      </p:sp>
-      <p:sp>
-        <p:nvSpPr>
-          <p:cNvPr id="24" name="S11-mark410"/>
-          <p:cNvSpPr/>
-          <p:nvPr/>
-        </p:nvSpPr>
-        <p:spPr>
-          <a:xfrm>
-            <a:off x="6368796" y="5964827"/>
+            <a:off x="11548872" y="2449776"/>
+            <a:ext cx="0" cy="3330049"/>
+          </a:xfrm>
+          <a:prstGeom prst="line">
+            <a:avLst/>
+          </a:prstGeom>
+          <a:noFill/>
+          <a:ln w="9525">
+            <a:solidFill>
+              <a:srgbClr val="B8C2CC"/>
+            </a:solidFill>
+            <a:prstDash val="solid"/>
+          </a:ln>
+        </p:spPr>
+      </p:sp>
+      <p:sp>
+        <p:nvSpPr>
+          <p:cNvPr id="24" name="S11-mark406"/>
+          <p:cNvSpPr/>
+          <p:nvPr/>
+        </p:nvSpPr>
+        <p:spPr>
+          <a:xfrm>
+            <a:off x="6368796" y="5779824"/>
             <a:ext cx="5180076" cy="0"/>
           </a:xfrm>
           <a:prstGeom prst="line">
@@ -6279,13 +6279,13 @@
       </p:sp>
       <p:sp>
         <p:nvSpPr>
-          <p:cNvPr id="25" name="S11-mark411"/>
-          <p:cNvSpPr/>
-          <p:nvPr/>
-        </p:nvSpPr>
-        <p:spPr>
-          <a:xfrm>
-            <a:off x="6368796" y="5594822"/>
+          <p:cNvPr id="25" name="S11-mark407"/>
+          <p:cNvSpPr/>
+          <p:nvPr/>
+        </p:nvSpPr>
+        <p:spPr>
+          <a:xfrm>
+            <a:off x="6368796" y="5409819"/>
             <a:ext cx="5180076" cy="0"/>
           </a:xfrm>
           <a:prstGeom prst="line">
@@ -6302,13 +6302,13 @@
       </p:sp>
       <p:sp>
         <p:nvSpPr>
-          <p:cNvPr id="26" name="S11-mark412"/>
-          <p:cNvSpPr/>
-          <p:nvPr/>
-        </p:nvSpPr>
-        <p:spPr>
-          <a:xfrm>
-            <a:off x="6368796" y="5224816"/>
+          <p:cNvPr id="26" name="S11-mark408"/>
+          <p:cNvSpPr/>
+          <p:nvPr/>
+        </p:nvSpPr>
+        <p:spPr>
+          <a:xfrm>
+            <a:off x="6368796" y="5039814"/>
             <a:ext cx="5180076" cy="0"/>
           </a:xfrm>
           <a:prstGeom prst="line">
@@ -6325,13 +6325,13 @@
       </p:sp>
       <p:sp>
         <p:nvSpPr>
-          <p:cNvPr id="27" name="S11-mark413"/>
-          <p:cNvSpPr/>
-          <p:nvPr/>
-        </p:nvSpPr>
-        <p:spPr>
-          <a:xfrm>
-            <a:off x="6368796" y="4854811"/>
+          <p:cNvPr id="27" name="S11-mark409"/>
+          <p:cNvSpPr/>
+          <p:nvPr/>
+        </p:nvSpPr>
+        <p:spPr>
+          <a:xfrm>
+            <a:off x="6368796" y="4669808"/>
             <a:ext cx="5180076" cy="0"/>
           </a:xfrm>
           <a:prstGeom prst="line">
@@ -6348,13 +6348,13 @@
       </p:sp>
       <p:sp>
         <p:nvSpPr>
-          <p:cNvPr id="28" name="S11-mark414"/>
-          <p:cNvSpPr/>
-          <p:nvPr/>
-        </p:nvSpPr>
-        <p:spPr>
-          <a:xfrm>
-            <a:off x="6368796" y="4484805"/>
+          <p:cNvPr id="28" name="S11-mark410"/>
+          <p:cNvSpPr/>
+          <p:nvPr/>
+        </p:nvSpPr>
+        <p:spPr>
+          <a:xfrm>
+            <a:off x="6368796" y="4299803"/>
             <a:ext cx="5180076" cy="0"/>
           </a:xfrm>
           <a:prstGeom prst="line">
@@ -6371,13 +6371,13 @@
       </p:sp>
       <p:sp>
         <p:nvSpPr>
-          <p:cNvPr id="29" name="S11-mark415"/>
-          <p:cNvSpPr/>
-          <p:nvPr/>
-        </p:nvSpPr>
-        <p:spPr>
-          <a:xfrm>
-            <a:off x="6368796" y="4114800"/>
+          <p:cNvPr id="29" name="S11-mark411"/>
+          <p:cNvSpPr/>
+          <p:nvPr/>
+        </p:nvSpPr>
+        <p:spPr>
+          <a:xfrm>
+            <a:off x="6368796" y="3929797"/>
             <a:ext cx="5180076" cy="0"/>
           </a:xfrm>
           <a:prstGeom prst="line">
@@ -6394,13 +6394,13 @@
       </p:sp>
       <p:sp>
         <p:nvSpPr>
-          <p:cNvPr id="30" name="S11-mark416"/>
-          <p:cNvSpPr/>
-          <p:nvPr/>
-        </p:nvSpPr>
-        <p:spPr>
-          <a:xfrm>
-            <a:off x="6368796" y="3744795"/>
+          <p:cNvPr id="30" name="S11-mark412"/>
+          <p:cNvSpPr/>
+          <p:nvPr/>
+        </p:nvSpPr>
+        <p:spPr>
+          <a:xfrm>
+            <a:off x="6368796" y="3559792"/>
             <a:ext cx="5180076" cy="0"/>
           </a:xfrm>
           <a:prstGeom prst="line">
@@ -6417,13 +6417,13 @@
       </p:sp>
       <p:sp>
         <p:nvSpPr>
-          <p:cNvPr id="31" name="S11-mark417"/>
-          <p:cNvSpPr/>
-          <p:nvPr/>
-        </p:nvSpPr>
-        <p:spPr>
-          <a:xfrm>
-            <a:off x="6368796" y="3374789"/>
+          <p:cNvPr id="31" name="S11-mark413"/>
+          <p:cNvSpPr/>
+          <p:nvPr/>
+        </p:nvSpPr>
+        <p:spPr>
+          <a:xfrm>
+            <a:off x="6368796" y="3189786"/>
             <a:ext cx="5180076" cy="0"/>
           </a:xfrm>
           <a:prstGeom prst="line">
@@ -6440,13 +6440,13 @@
       </p:sp>
       <p:sp>
         <p:nvSpPr>
-          <p:cNvPr id="32" name="S11-mark418"/>
-          <p:cNvSpPr/>
-          <p:nvPr/>
-        </p:nvSpPr>
-        <p:spPr>
-          <a:xfrm>
-            <a:off x="6368796" y="3004784"/>
+          <p:cNvPr id="32" name="S11-mark414"/>
+          <p:cNvSpPr/>
+          <p:nvPr/>
+        </p:nvSpPr>
+        <p:spPr>
+          <a:xfrm>
+            <a:off x="6368796" y="2819781"/>
             <a:ext cx="5180076" cy="0"/>
           </a:xfrm>
           <a:prstGeom prst="line">
@@ -6463,13 +6463,13 @@
       </p:sp>
       <p:sp>
         <p:nvSpPr>
-          <p:cNvPr id="33" name="S11-mark419"/>
-          <p:cNvSpPr/>
-          <p:nvPr/>
-        </p:nvSpPr>
-        <p:spPr>
-          <a:xfrm>
-            <a:off x="6368796" y="2634778"/>
+          <p:cNvPr id="33" name="S11-mark415"/>
+          <p:cNvSpPr/>
+          <p:nvPr/>
+        </p:nvSpPr>
+        <p:spPr>
+          <a:xfrm>
+            <a:off x="6368796" y="2449776"/>
             <a:ext cx="5180076" cy="0"/>
           </a:xfrm>
           <a:prstGeom prst="line">
@@ -6486,36 +6486,13 @@
       </p:sp>
       <p:sp>
         <p:nvSpPr>
-          <p:cNvPr id="34" name="S11-mark420"/>
-          <p:cNvSpPr/>
-          <p:nvPr/>
-        </p:nvSpPr>
-        <p:spPr>
-          <a:xfrm>
-            <a:off x="6368796" y="2264773"/>
-            <a:ext cx="5180076" cy="0"/>
-          </a:xfrm>
-          <a:prstGeom prst="line">
-            <a:avLst/>
-          </a:prstGeom>
-          <a:noFill/>
-          <a:ln w="9525">
-            <a:solidFill>
-              <a:srgbClr val="B8C2CC"/>
-            </a:solidFill>
-            <a:prstDash val="solid"/>
-          </a:ln>
-        </p:spPr>
-      </p:sp>
-      <p:sp>
-        <p:nvSpPr>
-          <p:cNvPr id="35" name="S11-figure421" descr="모눈 위의 ㄴ 모양 처음 도형과, 이동한 도형 가·나·다·라"/>
-          <p:cNvSpPr/>
-          <p:nvPr/>
-        </p:nvSpPr>
-        <p:spPr>
-          <a:xfrm>
-            <a:off x="6738801" y="3004784"/>
+          <p:cNvPr id="34" name="S11-figure416" descr="모눈 위의 ㄴ 모양 처음 도형과, 이동한 도형 가·나·다·라"/>
+          <p:cNvSpPr/>
+          <p:nvPr/>
+        </p:nvSpPr>
+        <p:spPr>
+          <a:xfrm>
+            <a:off x="6738801" y="2819781"/>
             <a:ext cx="1110016" cy="740011"/>
           </a:xfrm>
           <a:custGeom>
@@ -6559,13 +6536,13 @@
       </p:sp>
       <p:sp>
         <p:nvSpPr>
-          <p:cNvPr id="36" name="S11-mark422"/>
-          <p:cNvSpPr/>
-          <p:nvPr/>
-        </p:nvSpPr>
-        <p:spPr>
-          <a:xfrm>
-            <a:off x="8588829" y="3004784"/>
+          <p:cNvPr id="35" name="S11-mark417"/>
+          <p:cNvSpPr/>
+          <p:nvPr/>
+        </p:nvSpPr>
+        <p:spPr>
+          <a:xfrm>
+            <a:off x="8588829" y="2819781"/>
             <a:ext cx="1110016" cy="740011"/>
           </a:xfrm>
           <a:custGeom>
@@ -6609,13 +6586,13 @@
       </p:sp>
       <p:sp>
         <p:nvSpPr>
-          <p:cNvPr id="37" name="S11-mark423"/>
-          <p:cNvSpPr/>
-          <p:nvPr/>
-        </p:nvSpPr>
-        <p:spPr>
-          <a:xfrm>
-            <a:off x="10068850" y="3004784"/>
+          <p:cNvPr id="36" name="S11-mark418"/>
+          <p:cNvSpPr/>
+          <p:nvPr/>
+        </p:nvSpPr>
+        <p:spPr>
+          <a:xfrm>
+            <a:off x="10068850" y="2819781"/>
             <a:ext cx="1110016" cy="740011"/>
           </a:xfrm>
           <a:custGeom>
@@ -6659,13 +6636,13 @@
       </p:sp>
       <p:sp>
         <p:nvSpPr>
-          <p:cNvPr id="38" name="S11-mark424"/>
-          <p:cNvSpPr/>
-          <p:nvPr/>
-        </p:nvSpPr>
-        <p:spPr>
-          <a:xfrm>
-            <a:off x="7108807" y="4484805"/>
+          <p:cNvPr id="37" name="S11-mark419"/>
+          <p:cNvSpPr/>
+          <p:nvPr/>
+        </p:nvSpPr>
+        <p:spPr>
+          <a:xfrm>
+            <a:off x="7108807" y="4299803"/>
             <a:ext cx="740011" cy="1110016"/>
           </a:xfrm>
           <a:custGeom>
@@ -6709,13 +6686,13 @@
       </p:sp>
       <p:sp>
         <p:nvSpPr>
-          <p:cNvPr id="39" name="S11-mark425"/>
-          <p:cNvSpPr/>
-          <p:nvPr/>
-        </p:nvSpPr>
-        <p:spPr>
-          <a:xfrm>
-            <a:off x="8958834" y="4484805"/>
+          <p:cNvPr id="38" name="S11-mark420"/>
+          <p:cNvSpPr/>
+          <p:nvPr/>
+        </p:nvSpPr>
+        <p:spPr>
+          <a:xfrm>
+            <a:off x="8958834" y="4299803"/>
             <a:ext cx="1110016" cy="740011"/>
           </a:xfrm>
           <a:custGeom>
@@ -6759,13 +6736,13 @@
       </p:sp>
       <p:sp>
         <p:nvSpPr>
-          <p:cNvPr id="40" name="S11-label427"/>
+          <p:cNvPr id="39" name="S11-label422"/>
           <p:cNvSpPr txBox="1"/>
           <p:nvPr/>
         </p:nvSpPr>
         <p:spPr>
           <a:xfrm>
-            <a:off x="6940242" y="2592280"/>
+            <a:off x="6940242" y="2407278"/>
             <a:ext cx="707136" cy="381000"/>
           </a:xfrm>
           <a:prstGeom prst="rect">
@@ -6798,13 +6775,13 @@
       </p:sp>
       <p:sp>
         <p:nvSpPr>
-          <p:cNvPr id="41" name="S11-label429"/>
+          <p:cNvPr id="40" name="S11-label424"/>
           <p:cNvSpPr txBox="1"/>
           <p:nvPr/>
         </p:nvSpPr>
         <p:spPr>
           <a:xfrm>
-            <a:off x="8939621" y="2592280"/>
+            <a:off x="8939621" y="2407278"/>
             <a:ext cx="408432" cy="381000"/>
           </a:xfrm>
           <a:prstGeom prst="rect">
@@ -6837,13 +6814,13 @@
       </p:sp>
       <p:sp>
         <p:nvSpPr>
-          <p:cNvPr id="42" name="S11-label431"/>
+          <p:cNvPr id="41" name="S11-label426"/>
           <p:cNvSpPr txBox="1"/>
           <p:nvPr/>
         </p:nvSpPr>
         <p:spPr>
           <a:xfrm>
-            <a:off x="10419642" y="2592280"/>
+            <a:off x="10419642" y="2407278"/>
             <a:ext cx="408432" cy="381000"/>
           </a:xfrm>
           <a:prstGeom prst="rect">
@@ -6876,13 +6853,13 @@
       </p:sp>
       <p:sp>
         <p:nvSpPr>
-          <p:cNvPr id="43" name="S11-label433"/>
+          <p:cNvPr id="42" name="S11-label428"/>
           <p:cNvSpPr txBox="1"/>
           <p:nvPr/>
         </p:nvSpPr>
         <p:spPr>
           <a:xfrm>
-            <a:off x="7274596" y="4072302"/>
+            <a:off x="7274596" y="3887299"/>
             <a:ext cx="408432" cy="381000"/>
           </a:xfrm>
           <a:prstGeom prst="rect">
@@ -6915,13 +6892,13 @@
       </p:sp>
       <p:sp>
         <p:nvSpPr>
-          <p:cNvPr id="44" name="S11-label435"/>
+          <p:cNvPr id="43" name="S11-label430"/>
           <p:cNvSpPr txBox="1"/>
           <p:nvPr/>
         </p:nvSpPr>
         <p:spPr>
           <a:xfrm>
-            <a:off x="9309626" y="4072302"/>
+            <a:off x="9309626" y="3887299"/>
             <a:ext cx="408432" cy="381000"/>
           </a:xfrm>
           <a:prstGeom prst="rect">
@@ -6954,7 +6931,7 @@
       </p:sp>
       <p:sp>
         <p:nvSpPr>
-          <p:cNvPr id="45" name="S11-chip436"/>
+          <p:cNvPr id="44" name="S11-chip431"/>
           <p:cNvSpPr txBox="1"/>
           <p:nvPr/>
         </p:nvSpPr>
@@ -7001,7 +6978,7 @@
       </p:sp>
       <p:sp>
         <p:nvSpPr>
-          <p:cNvPr id="46" name="S11-text437"/>
+          <p:cNvPr id="45" name="S11-text432"/>
           <p:cNvSpPr txBox="1"/>
           <p:nvPr/>
         </p:nvSpPr>
@@ -7057,7 +7034,7 @@
       </p:sp>
       <p:sp>
         <p:nvSpPr>
-          <p:cNvPr id="47" name="S11-chip438"/>
+          <p:cNvPr id="46" name="S11-chip433"/>
           <p:cNvSpPr txBox="1"/>
           <p:nvPr/>
         </p:nvSpPr>
@@ -7104,7 +7081,7 @@
       </p:sp>
       <p:sp>
         <p:nvSpPr>
-          <p:cNvPr id="48" name="S11-text439"/>
+          <p:cNvPr id="47" name="S11-text434"/>
           <p:cNvSpPr txBox="1"/>
           <p:nvPr/>
         </p:nvSpPr>
@@ -7160,7 +7137,7 @@
       </p:sp>
       <p:sp>
         <p:nvSpPr>
-          <p:cNvPr id="49" name="S11-chip440"/>
+          <p:cNvPr id="48" name="S11-chip435"/>
           <p:cNvSpPr txBox="1"/>
           <p:nvPr/>
         </p:nvSpPr>
@@ -7207,7 +7184,7 @@
       </p:sp>
       <p:sp>
         <p:nvSpPr>
-          <p:cNvPr id="50" name="S11-text441"/>
+          <p:cNvPr id="49" name="S11-text436"/>
           <p:cNvSpPr txBox="1"/>
           <p:nvPr/>
         </p:nvSpPr>
@@ -7246,7 +7223,7 @@
       </p:sp>
       <p:sp>
         <p:nvSpPr>
-          <p:cNvPr id="51" name="S11-chip442"/>
+          <p:cNvPr id="50" name="S11-chip437"/>
           <p:cNvSpPr txBox="1"/>
           <p:nvPr/>
         </p:nvSpPr>
@@ -7293,7 +7270,7 @@
       </p:sp>
       <p:sp>
         <p:nvSpPr>
-          <p:cNvPr id="52" name="S11-text443"/>
+          <p:cNvPr id="51" name="S11-text438"/>
           <p:cNvSpPr txBox="1"/>
           <p:nvPr/>
         </p:nvSpPr>
@@ -7446,7 +7423,7 @@
       </p:sp>
       <p:sp>
         <p:nvSpPr>
-          <p:cNvPr id="3" name="S12-card444"/>
+          <p:cNvPr id="3" name="S12-card439"/>
           <p:cNvSpPr/>
           <p:nvPr/>
         </p:nvSpPr>
@@ -7473,7 +7450,7 @@
       </p:sp>
       <p:sp>
         <p:nvSpPr>
-          <p:cNvPr id="4" name="S12-cardtext445"/>
+          <p:cNvPr id="4" name="S12-cardtext440"/>
           <p:cNvSpPr txBox="1"/>
           <p:nvPr/>
         </p:nvSpPr>
@@ -7515,7 +7492,7 @@
       </p:sp>
       <p:sp>
         <p:nvSpPr>
-          <p:cNvPr id="5" name="S12-chip446"/>
+          <p:cNvPr id="5" name="S12-chip441"/>
           <p:cNvSpPr txBox="1"/>
           <p:nvPr/>
         </p:nvSpPr>
@@ -7562,7 +7539,7 @@
       </p:sp>
       <p:sp>
         <p:nvSpPr>
-          <p:cNvPr id="6" name="S12-text447"/>
+          <p:cNvPr id="6" name="S12-text442"/>
           <p:cNvSpPr txBox="1"/>
           <p:nvPr/>
         </p:nvSpPr>
@@ -7601,7 +7578,7 @@
       </p:sp>
       <p:sp>
         <p:nvSpPr>
-          <p:cNvPr id="7" name="S12-text448"/>
+          <p:cNvPr id="7" name="S12-text443"/>
           <p:cNvSpPr txBox="1"/>
           <p:nvPr/>
         </p:nvSpPr>
@@ -7640,7 +7617,7 @@
       </p:sp>
       <p:sp>
         <p:nvSpPr>
-          <p:cNvPr id="8" name="S12-text449"/>
+          <p:cNvPr id="8" name="S12-text444"/>
           <p:cNvSpPr txBox="1"/>
           <p:nvPr/>
         </p:nvSpPr>
@@ -7679,7 +7656,7 @@
       </p:sp>
       <p:sp>
         <p:nvSpPr>
-          <p:cNvPr id="9" name="S12-text450"/>
+          <p:cNvPr id="9" name="S12-text445"/>
           <p:cNvSpPr txBox="1"/>
           <p:nvPr/>
         </p:nvSpPr>
@@ -7718,7 +7695,7 @@
       </p:sp>
       <p:sp>
         <p:nvSpPr>
-          <p:cNvPr id="10" name="S12-text451"/>
+          <p:cNvPr id="10" name="S12-text446"/>
           <p:cNvSpPr txBox="1"/>
           <p:nvPr/>
         </p:nvSpPr>
@@ -7757,7 +7734,7 @@
       </p:sp>
       <p:sp>
         <p:nvSpPr>
-          <p:cNvPr id="11" name="S12-text452"/>
+          <p:cNvPr id="11" name="S12-text447"/>
           <p:cNvSpPr txBox="1"/>
           <p:nvPr/>
         </p:nvSpPr>
@@ -7796,7 +7773,7 @@
       </p:sp>
       <p:sp>
         <p:nvSpPr>
-          <p:cNvPr id="12" name="S12-text453"/>
+          <p:cNvPr id="12" name="S12-text448"/>
           <p:cNvSpPr txBox="1"/>
           <p:nvPr/>
         </p:nvSpPr>
@@ -7835,7 +7812,7 @@
       </p:sp>
       <p:sp>
         <p:nvSpPr>
-          <p:cNvPr id="13" name="S12-text454"/>
+          <p:cNvPr id="13" name="S12-text449"/>
           <p:cNvSpPr txBox="1"/>
           <p:nvPr/>
         </p:nvSpPr>
@@ -7874,7 +7851,7 @@
       </p:sp>
       <p:sp>
         <p:nvSpPr>
-          <p:cNvPr id="14" name="S12-chip455"/>
+          <p:cNvPr id="14" name="S12-chip450"/>
           <p:cNvSpPr txBox="1"/>
           <p:nvPr/>
         </p:nvSpPr>
@@ -7921,7 +7898,7 @@
       </p:sp>
       <p:sp>
         <p:nvSpPr>
-          <p:cNvPr id="15" name="S12-text456"/>
+          <p:cNvPr id="15" name="S12-text451"/>
           <p:cNvSpPr txBox="1"/>
           <p:nvPr/>
         </p:nvSpPr>
@@ -7960,7 +7937,7 @@
       </p:sp>
       <p:sp>
         <p:nvSpPr>
-          <p:cNvPr id="16" name="S12-text457"/>
+          <p:cNvPr id="16" name="S12-text452"/>
           <p:cNvSpPr txBox="1"/>
           <p:nvPr/>
         </p:nvSpPr>
@@ -7999,7 +7976,7 @@
       </p:sp>
       <p:sp>
         <p:nvSpPr>
-          <p:cNvPr id="17" name="S12-text458"/>
+          <p:cNvPr id="17" name="S12-text453"/>
           <p:cNvSpPr txBox="1"/>
           <p:nvPr/>
         </p:nvSpPr>
@@ -8038,7 +8015,7 @@
       </p:sp>
       <p:sp>
         <p:nvSpPr>
-          <p:cNvPr id="18" name="S12-text459"/>
+          <p:cNvPr id="18" name="S12-text454"/>
           <p:cNvSpPr txBox="1"/>
           <p:nvPr/>
         </p:nvSpPr>
@@ -8191,7 +8168,7 @@
       </p:sp>
       <p:sp>
         <p:nvSpPr>
-          <p:cNvPr id="3" name="S13-text460"/>
+          <p:cNvPr id="3" name="S13-text455"/>
           <p:cNvSpPr txBox="1"/>
           <p:nvPr/>
         </p:nvSpPr>
@@ -8230,7 +8207,7 @@
       </p:sp>
       <p:sp>
         <p:nvSpPr>
-          <p:cNvPr id="4" name="S13-card461"/>
+          <p:cNvPr id="4" name="S13-card456"/>
           <p:cNvSpPr/>
           <p:nvPr/>
         </p:nvSpPr>
@@ -8257,7 +8234,7 @@
       </p:sp>
       <p:sp>
         <p:nvSpPr>
-          <p:cNvPr id="5" name="S13-cardtext462"/>
+          <p:cNvPr id="5" name="S13-cardtext457"/>
           <p:cNvSpPr txBox="1"/>
           <p:nvPr/>
         </p:nvSpPr>
@@ -8299,7 +8276,7 @@
       </p:sp>
       <p:sp>
         <p:nvSpPr>
-          <p:cNvPr id="6" name="S13-chip463"/>
+          <p:cNvPr id="6" name="S13-chip458"/>
           <p:cNvSpPr txBox="1"/>
           <p:nvPr/>
         </p:nvSpPr>
@@ -8346,7 +8323,7 @@
       </p:sp>
       <p:sp>
         <p:nvSpPr>
-          <p:cNvPr id="7" name="S13-card464"/>
+          <p:cNvPr id="7" name="S13-card459"/>
           <p:cNvSpPr/>
           <p:nvPr/>
         </p:nvSpPr>
@@ -8373,7 +8350,7 @@
       </p:sp>
       <p:sp>
         <p:nvSpPr>
-          <p:cNvPr id="8" name="S13-cardtext465"/>
+          <p:cNvPr id="8" name="S13-cardtext460"/>
           <p:cNvSpPr txBox="1"/>
           <p:nvPr/>
         </p:nvSpPr>
@@ -8415,7 +8392,7 @@
       </p:sp>
       <p:sp>
         <p:nvSpPr>
-          <p:cNvPr id="9" name="S13-chip466"/>
+          <p:cNvPr id="9" name="S13-chip461"/>
           <p:cNvSpPr txBox="1"/>
           <p:nvPr/>
         </p:nvSpPr>
@@ -8462,7 +8439,7 @@
       </p:sp>
       <p:sp>
         <p:nvSpPr>
-          <p:cNvPr id="10" name="S13-card467"/>
+          <p:cNvPr id="10" name="S13-card462"/>
           <p:cNvSpPr/>
           <p:nvPr/>
         </p:nvSpPr>
@@ -8489,7 +8466,7 @@
       </p:sp>
       <p:sp>
         <p:nvSpPr>
-          <p:cNvPr id="11" name="S13-cardtext468"/>
+          <p:cNvPr id="11" name="S13-cardtext463"/>
           <p:cNvSpPr txBox="1"/>
           <p:nvPr/>
         </p:nvSpPr>
@@ -8551,7 +8528,7 @@
       </p:sp>
       <p:sp>
         <p:nvSpPr>
-          <p:cNvPr id="12" name="S13-chip469"/>
+          <p:cNvPr id="12" name="S13-chip464"/>
           <p:cNvSpPr txBox="1"/>
           <p:nvPr/>
         </p:nvSpPr>
@@ -8598,7 +8575,7 @@
       </p:sp>
       <p:sp>
         <p:nvSpPr>
-          <p:cNvPr id="13" name="S13-card470"/>
+          <p:cNvPr id="13" name="S13-card465"/>
           <p:cNvSpPr/>
           <p:nvPr/>
         </p:nvSpPr>
@@ -8625,7 +8602,7 @@
       </p:sp>
       <p:sp>
         <p:nvSpPr>
-          <p:cNvPr id="14" name="S13-cardtext471"/>
+          <p:cNvPr id="14" name="S13-cardtext466"/>
           <p:cNvSpPr txBox="1"/>
           <p:nvPr/>
         </p:nvSpPr>
@@ -8687,7 +8664,7 @@
       </p:sp>
       <p:sp>
         <p:nvSpPr>
-          <p:cNvPr id="15" name="S13-chip472"/>
+          <p:cNvPr id="15" name="S13-chip467"/>
           <p:cNvSpPr txBox="1"/>
           <p:nvPr/>
         </p:nvSpPr>
@@ -8734,7 +8711,7 @@
       </p:sp>
       <p:sp>
         <p:nvSpPr>
-          <p:cNvPr id="16" name="S13-card473"/>
+          <p:cNvPr id="16" name="S13-card468"/>
           <p:cNvSpPr/>
           <p:nvPr/>
         </p:nvSpPr>
@@ -8761,7 +8738,7 @@
       </p:sp>
       <p:sp>
         <p:nvSpPr>
-          <p:cNvPr id="17" name="S13-cardtext474"/>
+          <p:cNvPr id="17" name="S13-cardtext469"/>
           <p:cNvSpPr txBox="1"/>
           <p:nvPr/>
         </p:nvSpPr>
@@ -8917,7 +8894,7 @@
       </p:sp>
       <p:sp>
         <p:nvSpPr>
-          <p:cNvPr id="3" name="S14-card475"/>
+          <p:cNvPr id="3" name="S14-card470"/>
           <p:cNvSpPr/>
           <p:nvPr/>
         </p:nvSpPr>
@@ -8944,7 +8921,7 @@
       </p:sp>
       <p:sp>
         <p:nvSpPr>
-          <p:cNvPr id="4" name="S14-cardtext476"/>
+          <p:cNvPr id="4" name="S14-cardtext471"/>
           <p:cNvSpPr txBox="1"/>
           <p:nvPr/>
         </p:nvSpPr>
@@ -8986,7 +8963,7 @@
       </p:sp>
       <p:sp>
         <p:nvSpPr>
-          <p:cNvPr id="5" name="S14-chip477"/>
+          <p:cNvPr id="5" name="S14-chip472"/>
           <p:cNvSpPr txBox="1"/>
           <p:nvPr/>
         </p:nvSpPr>
@@ -9033,7 +9010,7 @@
       </p:sp>
       <p:sp>
         <p:nvSpPr>
-          <p:cNvPr id="6" name="S14-chip478"/>
+          <p:cNvPr id="6" name="S14-chip473"/>
           <p:cNvSpPr txBox="1"/>
           <p:nvPr/>
         </p:nvSpPr>
@@ -9080,7 +9057,7 @@
       </p:sp>
       <p:sp>
         <p:nvSpPr>
-          <p:cNvPr id="7" name="S14-text479"/>
+          <p:cNvPr id="7" name="S14-text474"/>
           <p:cNvSpPr txBox="1"/>
           <p:nvPr/>
         </p:nvSpPr>
@@ -9119,7 +9096,7 @@
       </p:sp>
       <p:sp>
         <p:nvSpPr>
-          <p:cNvPr id="8" name="S14-text480"/>
+          <p:cNvPr id="8" name="S14-text475"/>
           <p:cNvSpPr txBox="1"/>
           <p:nvPr/>
         </p:nvSpPr>
@@ -9175,7 +9152,7 @@
       </p:sp>
       <p:sp>
         <p:nvSpPr>
-          <p:cNvPr id="9" name="S14-text481"/>
+          <p:cNvPr id="9" name="S14-text476"/>
           <p:cNvSpPr txBox="1"/>
           <p:nvPr/>
         </p:nvSpPr>
@@ -9231,7 +9208,7 @@
       </p:sp>
       <p:sp>
         <p:nvSpPr>
-          <p:cNvPr id="10" name="S14-text482"/>
+          <p:cNvPr id="10" name="S14-text477"/>
           <p:cNvSpPr txBox="1"/>
           <p:nvPr/>
         </p:nvSpPr>
@@ -9287,7 +9264,7 @@
       </p:sp>
       <p:sp>
         <p:nvSpPr>
-          <p:cNvPr id="11" name="S14-text483"/>
+          <p:cNvPr id="11" name="S14-text478"/>
           <p:cNvSpPr txBox="1"/>
           <p:nvPr/>
         </p:nvSpPr>
@@ -9440,7 +9417,7 @@
       </p:sp>
       <p:sp>
         <p:nvSpPr>
-          <p:cNvPr id="3" name="S15-card484"/>
+          <p:cNvPr id="3" name="S15-card479"/>
           <p:cNvSpPr/>
           <p:nvPr/>
         </p:nvSpPr>
@@ -9467,7 +9444,7 @@
       </p:sp>
       <p:sp>
         <p:nvSpPr>
-          <p:cNvPr id="4" name="S15-cardtext485"/>
+          <p:cNvPr id="4" name="S15-cardtext480"/>
           <p:cNvSpPr txBox="1"/>
           <p:nvPr/>
         </p:nvSpPr>
@@ -9529,7 +9506,7 @@
       </p:sp>
       <p:sp>
         <p:nvSpPr>
-          <p:cNvPr id="5" name="S15-card486"/>
+          <p:cNvPr id="5" name="S15-card481"/>
           <p:cNvSpPr/>
           <p:nvPr/>
         </p:nvSpPr>
@@ -9556,7 +9533,7 @@
       </p:sp>
       <p:sp>
         <p:nvSpPr>
-          <p:cNvPr id="6" name="S15-cardtext487"/>
+          <p:cNvPr id="6" name="S15-cardtext482"/>
           <p:cNvSpPr txBox="1"/>
           <p:nvPr/>
         </p:nvSpPr>
@@ -9618,7 +9595,7 @@
       </p:sp>
       <p:sp>
         <p:nvSpPr>
-          <p:cNvPr id="7" name="S15-figure488" descr="3시를 가리키는 시계: 두 바늘이 직각"/>
+          <p:cNvPr id="7" name="S15-figure483" descr="3시를 가리키는 시계: 두 바늘이 직각"/>
           <p:cNvSpPr/>
           <p:nvPr/>
         </p:nvSpPr>
@@ -9643,7 +9620,7 @@
       </p:sp>
       <p:sp>
         <p:nvSpPr>
-          <p:cNvPr id="8" name="S15-line489"/>
+          <p:cNvPr id="8" name="S15-line484"/>
           <p:cNvSpPr/>
           <p:nvPr/>
         </p:nvSpPr>
@@ -9666,7 +9643,7 @@
       </p:sp>
       <p:sp>
         <p:nvSpPr>
-          <p:cNvPr id="9" name="S15-line490"/>
+          <p:cNvPr id="9" name="S15-line485"/>
           <p:cNvSpPr/>
           <p:nvPr/>
         </p:nvSpPr>
@@ -9689,7 +9666,7 @@
       </p:sp>
       <p:sp>
         <p:nvSpPr>
-          <p:cNvPr id="10" name="S15-line491"/>
+          <p:cNvPr id="10" name="S15-line486"/>
           <p:cNvSpPr/>
           <p:nvPr/>
         </p:nvSpPr>
@@ -9712,7 +9689,7 @@
       </p:sp>
       <p:sp>
         <p:nvSpPr>
-          <p:cNvPr id="11" name="S15-line492"/>
+          <p:cNvPr id="11" name="S15-line487"/>
           <p:cNvSpPr/>
           <p:nvPr/>
         </p:nvSpPr>
@@ -9735,7 +9712,7 @@
       </p:sp>
       <p:sp>
         <p:nvSpPr>
-          <p:cNvPr id="12" name="S15-line493"/>
+          <p:cNvPr id="12" name="S15-line488"/>
           <p:cNvSpPr/>
           <p:nvPr/>
         </p:nvSpPr>
@@ -9758,7 +9735,7 @@
       </p:sp>
       <p:sp>
         <p:nvSpPr>
-          <p:cNvPr id="13" name="S15-line494"/>
+          <p:cNvPr id="13" name="S15-line489"/>
           <p:cNvSpPr/>
           <p:nvPr/>
         </p:nvSpPr>
@@ -9781,7 +9758,7 @@
       </p:sp>
       <p:sp>
         <p:nvSpPr>
-          <p:cNvPr id="14" name="S15-line495"/>
+          <p:cNvPr id="14" name="S15-line490"/>
           <p:cNvSpPr/>
           <p:nvPr/>
         </p:nvSpPr>
@@ -9804,7 +9781,7 @@
       </p:sp>
       <p:sp>
         <p:nvSpPr>
-          <p:cNvPr id="15" name="S15-line496"/>
+          <p:cNvPr id="15" name="S15-line491"/>
           <p:cNvSpPr/>
           <p:nvPr/>
         </p:nvSpPr>
@@ -9827,7 +9804,7 @@
       </p:sp>
       <p:sp>
         <p:nvSpPr>
-          <p:cNvPr id="16" name="S15-line497"/>
+          <p:cNvPr id="16" name="S15-line492"/>
           <p:cNvSpPr/>
           <p:nvPr/>
         </p:nvSpPr>
@@ -9850,7 +9827,7 @@
       </p:sp>
       <p:sp>
         <p:nvSpPr>
-          <p:cNvPr id="17" name="S15-line498"/>
+          <p:cNvPr id="17" name="S15-line493"/>
           <p:cNvSpPr/>
           <p:nvPr/>
         </p:nvSpPr>
@@ -9873,7 +9850,7 @@
       </p:sp>
       <p:sp>
         <p:nvSpPr>
-          <p:cNvPr id="18" name="S15-line499"/>
+          <p:cNvPr id="18" name="S15-line494"/>
           <p:cNvSpPr/>
           <p:nvPr/>
         </p:nvSpPr>
@@ -9896,7 +9873,7 @@
       </p:sp>
       <p:sp>
         <p:nvSpPr>
-          <p:cNvPr id="19" name="S15-line500"/>
+          <p:cNvPr id="19" name="S15-line495"/>
           <p:cNvSpPr/>
           <p:nvPr/>
         </p:nvSpPr>
@@ -9919,7 +9896,7 @@
       </p:sp>
       <p:sp>
         <p:nvSpPr>
-          <p:cNvPr id="20" name="S15-line501"/>
+          <p:cNvPr id="20" name="S15-line496"/>
           <p:cNvSpPr/>
           <p:nvPr/>
         </p:nvSpPr>
@@ -9942,7 +9919,7 @@
       </p:sp>
       <p:sp>
         <p:nvSpPr>
-          <p:cNvPr id="21" name="S15-line502"/>
+          <p:cNvPr id="21" name="S15-line497"/>
           <p:cNvSpPr/>
           <p:nvPr/>
         </p:nvSpPr>
@@ -9965,7 +9942,7 @@
       </p:sp>
       <p:sp>
         <p:nvSpPr>
-          <p:cNvPr id="22" name="S15-line503"/>
+          <p:cNvPr id="22" name="S15-line498"/>
           <p:cNvSpPr/>
           <p:nvPr/>
         </p:nvSpPr>
@@ -9988,7 +9965,7 @@
       </p:sp>
       <p:sp>
         <p:nvSpPr>
-          <p:cNvPr id="23" name="S15-line504"/>
+          <p:cNvPr id="23" name="S15-line499"/>
           <p:cNvSpPr/>
           <p:nvPr/>
         </p:nvSpPr>
@@ -10011,7 +9988,7 @@
       </p:sp>
       <p:sp>
         <p:nvSpPr>
-          <p:cNvPr id="24" name="S15-line505"/>
+          <p:cNvPr id="24" name="S15-line500"/>
           <p:cNvSpPr/>
           <p:nvPr/>
         </p:nvSpPr>
@@ -10034,7 +10011,7 @@
       </p:sp>
       <p:sp>
         <p:nvSpPr>
-          <p:cNvPr id="25" name="S15-line506"/>
+          <p:cNvPr id="25" name="S15-line501"/>
           <p:cNvSpPr/>
           <p:nvPr/>
         </p:nvSpPr>
@@ -10057,7 +10034,7 @@
       </p:sp>
       <p:sp>
         <p:nvSpPr>
-          <p:cNvPr id="26" name="S15-line507"/>
+          <p:cNvPr id="26" name="S15-line502"/>
           <p:cNvSpPr/>
           <p:nvPr/>
         </p:nvSpPr>
@@ -10080,7 +10057,7 @@
       </p:sp>
       <p:sp>
         <p:nvSpPr>
-          <p:cNvPr id="27" name="S15-line508"/>
+          <p:cNvPr id="27" name="S15-line503"/>
           <p:cNvSpPr/>
           <p:nvPr/>
         </p:nvSpPr>
@@ -10103,7 +10080,7 @@
       </p:sp>
       <p:sp>
         <p:nvSpPr>
-          <p:cNvPr id="28" name="S15-line509"/>
+          <p:cNvPr id="28" name="S15-line504"/>
           <p:cNvSpPr/>
           <p:nvPr/>
         </p:nvSpPr>
@@ -10126,7 +10103,7 @@
       </p:sp>
       <p:sp>
         <p:nvSpPr>
-          <p:cNvPr id="29" name="S15-line510"/>
+          <p:cNvPr id="29" name="S15-line505"/>
           <p:cNvSpPr/>
           <p:nvPr/>
         </p:nvSpPr>
@@ -10149,7 +10126,7 @@
       </p:sp>
       <p:sp>
         <p:nvSpPr>
-          <p:cNvPr id="30" name="S15-line511"/>
+          <p:cNvPr id="30" name="S15-line506"/>
           <p:cNvSpPr/>
           <p:nvPr/>
         </p:nvSpPr>
@@ -10172,7 +10149,7 @@
       </p:sp>
       <p:sp>
         <p:nvSpPr>
-          <p:cNvPr id="31" name="S15-line512"/>
+          <p:cNvPr id="31" name="S15-line507"/>
           <p:cNvSpPr/>
           <p:nvPr/>
         </p:nvSpPr>
@@ -10195,7 +10172,7 @@
       </p:sp>
       <p:sp>
         <p:nvSpPr>
-          <p:cNvPr id="32" name="S15-line513"/>
+          <p:cNvPr id="32" name="S15-line508"/>
           <p:cNvSpPr/>
           <p:nvPr/>
         </p:nvSpPr>
@@ -10218,7 +10195,7 @@
       </p:sp>
       <p:sp>
         <p:nvSpPr>
-          <p:cNvPr id="33" name="S15-line514"/>
+          <p:cNvPr id="33" name="S15-line509"/>
           <p:cNvSpPr/>
           <p:nvPr/>
         </p:nvSpPr>
@@ -10241,7 +10218,7 @@
       </p:sp>
       <p:sp>
         <p:nvSpPr>
-          <p:cNvPr id="34" name="S15-line515"/>
+          <p:cNvPr id="34" name="S15-line510"/>
           <p:cNvSpPr/>
           <p:nvPr/>
         </p:nvSpPr>
@@ -10264,7 +10241,7 @@
       </p:sp>
       <p:sp>
         <p:nvSpPr>
-          <p:cNvPr id="35" name="S15-line516"/>
+          <p:cNvPr id="35" name="S15-line511"/>
           <p:cNvSpPr/>
           <p:nvPr/>
         </p:nvSpPr>
@@ -10287,7 +10264,7 @@
       </p:sp>
       <p:sp>
         <p:nvSpPr>
-          <p:cNvPr id="36" name="S15-line517"/>
+          <p:cNvPr id="36" name="S15-line512"/>
           <p:cNvSpPr/>
           <p:nvPr/>
         </p:nvSpPr>
@@ -10310,7 +10287,7 @@
       </p:sp>
       <p:sp>
         <p:nvSpPr>
-          <p:cNvPr id="37" name="S15-line518"/>
+          <p:cNvPr id="37" name="S15-line513"/>
           <p:cNvSpPr/>
           <p:nvPr/>
         </p:nvSpPr>
@@ -10333,7 +10310,7 @@
       </p:sp>
       <p:sp>
         <p:nvSpPr>
-          <p:cNvPr id="38" name="S15-line519"/>
+          <p:cNvPr id="38" name="S15-line514"/>
           <p:cNvSpPr/>
           <p:nvPr/>
         </p:nvSpPr>
@@ -10356,7 +10333,7 @@
       </p:sp>
       <p:sp>
         <p:nvSpPr>
-          <p:cNvPr id="39" name="S15-line520"/>
+          <p:cNvPr id="39" name="S15-line515"/>
           <p:cNvSpPr/>
           <p:nvPr/>
         </p:nvSpPr>
@@ -10379,7 +10356,7 @@
       </p:sp>
       <p:sp>
         <p:nvSpPr>
-          <p:cNvPr id="40" name="S15-line521"/>
+          <p:cNvPr id="40" name="S15-line516"/>
           <p:cNvSpPr/>
           <p:nvPr/>
         </p:nvSpPr>
@@ -10402,7 +10379,7 @@
       </p:sp>
       <p:sp>
         <p:nvSpPr>
-          <p:cNvPr id="41" name="S15-line522"/>
+          <p:cNvPr id="41" name="S15-line517"/>
           <p:cNvSpPr/>
           <p:nvPr/>
         </p:nvSpPr>
@@ -10425,7 +10402,7 @@
       </p:sp>
       <p:sp>
         <p:nvSpPr>
-          <p:cNvPr id="42" name="S15-line523"/>
+          <p:cNvPr id="42" name="S15-line518"/>
           <p:cNvSpPr/>
           <p:nvPr/>
         </p:nvSpPr>
@@ -10448,7 +10425,7 @@
       </p:sp>
       <p:sp>
         <p:nvSpPr>
-          <p:cNvPr id="43" name="S15-line524"/>
+          <p:cNvPr id="43" name="S15-line519"/>
           <p:cNvSpPr/>
           <p:nvPr/>
         </p:nvSpPr>
@@ -10471,7 +10448,7 @@
       </p:sp>
       <p:sp>
         <p:nvSpPr>
-          <p:cNvPr id="44" name="S15-line525"/>
+          <p:cNvPr id="44" name="S15-line520"/>
           <p:cNvSpPr/>
           <p:nvPr/>
         </p:nvSpPr>
@@ -10494,7 +10471,7 @@
       </p:sp>
       <p:sp>
         <p:nvSpPr>
-          <p:cNvPr id="45" name="S15-line526"/>
+          <p:cNvPr id="45" name="S15-line521"/>
           <p:cNvSpPr/>
           <p:nvPr/>
         </p:nvSpPr>
@@ -10517,7 +10494,7 @@
       </p:sp>
       <p:sp>
         <p:nvSpPr>
-          <p:cNvPr id="46" name="S15-line527"/>
+          <p:cNvPr id="46" name="S15-line522"/>
           <p:cNvSpPr/>
           <p:nvPr/>
         </p:nvSpPr>
@@ -10540,7 +10517,7 @@
       </p:sp>
       <p:sp>
         <p:nvSpPr>
-          <p:cNvPr id="47" name="S15-line528"/>
+          <p:cNvPr id="47" name="S15-line523"/>
           <p:cNvSpPr/>
           <p:nvPr/>
         </p:nvSpPr>
@@ -10563,7 +10540,7 @@
       </p:sp>
       <p:sp>
         <p:nvSpPr>
-          <p:cNvPr id="48" name="S15-line529"/>
+          <p:cNvPr id="48" name="S15-line524"/>
           <p:cNvSpPr/>
           <p:nvPr/>
         </p:nvSpPr>
@@ -10586,7 +10563,7 @@
       </p:sp>
       <p:sp>
         <p:nvSpPr>
-          <p:cNvPr id="49" name="S15-line530"/>
+          <p:cNvPr id="49" name="S15-line525"/>
           <p:cNvSpPr/>
           <p:nvPr/>
         </p:nvSpPr>
@@ -10609,7 +10586,7 @@
       </p:sp>
       <p:sp>
         <p:nvSpPr>
-          <p:cNvPr id="50" name="S15-line531"/>
+          <p:cNvPr id="50" name="S15-line526"/>
           <p:cNvSpPr/>
           <p:nvPr/>
         </p:nvSpPr>
@@ -10632,7 +10609,7 @@
       </p:sp>
       <p:sp>
         <p:nvSpPr>
-          <p:cNvPr id="51" name="S15-line532"/>
+          <p:cNvPr id="51" name="S15-line527"/>
           <p:cNvSpPr/>
           <p:nvPr/>
         </p:nvSpPr>
@@ -10655,7 +10632,7 @@
       </p:sp>
       <p:sp>
         <p:nvSpPr>
-          <p:cNvPr id="52" name="S15-line533"/>
+          <p:cNvPr id="52" name="S15-line528"/>
           <p:cNvSpPr/>
           <p:nvPr/>
         </p:nvSpPr>
@@ -10678,7 +10655,7 @@
       </p:sp>
       <p:sp>
         <p:nvSpPr>
-          <p:cNvPr id="53" name="S15-line534"/>
+          <p:cNvPr id="53" name="S15-line529"/>
           <p:cNvSpPr/>
           <p:nvPr/>
         </p:nvSpPr>
@@ -10701,7 +10678,7 @@
       </p:sp>
       <p:sp>
         <p:nvSpPr>
-          <p:cNvPr id="54" name="S15-line535"/>
+          <p:cNvPr id="54" name="S15-line530"/>
           <p:cNvSpPr/>
           <p:nvPr/>
         </p:nvSpPr>
@@ -10724,7 +10701,7 @@
       </p:sp>
       <p:sp>
         <p:nvSpPr>
-          <p:cNvPr id="55" name="S15-line536"/>
+          <p:cNvPr id="55" name="S15-line531"/>
           <p:cNvSpPr/>
           <p:nvPr/>
         </p:nvSpPr>
@@ -10747,7 +10724,7 @@
       </p:sp>
       <p:sp>
         <p:nvSpPr>
-          <p:cNvPr id="56" name="S15-line537"/>
+          <p:cNvPr id="56" name="S15-line532"/>
           <p:cNvSpPr/>
           <p:nvPr/>
         </p:nvSpPr>
@@ -10770,7 +10747,7 @@
       </p:sp>
       <p:sp>
         <p:nvSpPr>
-          <p:cNvPr id="57" name="S15-line538"/>
+          <p:cNvPr id="57" name="S15-line533"/>
           <p:cNvSpPr/>
           <p:nvPr/>
         </p:nvSpPr>
@@ -10793,7 +10770,7 @@
       </p:sp>
       <p:sp>
         <p:nvSpPr>
-          <p:cNvPr id="58" name="S15-line539"/>
+          <p:cNvPr id="58" name="S15-line534"/>
           <p:cNvSpPr/>
           <p:nvPr/>
         </p:nvSpPr>
@@ -10816,7 +10793,7 @@
       </p:sp>
       <p:sp>
         <p:nvSpPr>
-          <p:cNvPr id="59" name="S15-line540"/>
+          <p:cNvPr id="59" name="S15-line535"/>
           <p:cNvSpPr/>
           <p:nvPr/>
         </p:nvSpPr>
@@ -10839,7 +10816,7 @@
       </p:sp>
       <p:sp>
         <p:nvSpPr>
-          <p:cNvPr id="60" name="S15-line541"/>
+          <p:cNvPr id="60" name="S15-line536"/>
           <p:cNvSpPr/>
           <p:nvPr/>
         </p:nvSpPr>
@@ -10862,7 +10839,7 @@
       </p:sp>
       <p:sp>
         <p:nvSpPr>
-          <p:cNvPr id="61" name="S15-line542"/>
+          <p:cNvPr id="61" name="S15-line537"/>
           <p:cNvSpPr/>
           <p:nvPr/>
         </p:nvSpPr>
@@ -10885,7 +10862,7 @@
       </p:sp>
       <p:sp>
         <p:nvSpPr>
-          <p:cNvPr id="62" name="S15-line543"/>
+          <p:cNvPr id="62" name="S15-line538"/>
           <p:cNvSpPr/>
           <p:nvPr/>
         </p:nvSpPr>
@@ -10908,7 +10885,7 @@
       </p:sp>
       <p:sp>
         <p:nvSpPr>
-          <p:cNvPr id="63" name="S15-line544"/>
+          <p:cNvPr id="63" name="S15-line539"/>
           <p:cNvSpPr/>
           <p:nvPr/>
         </p:nvSpPr>
@@ -10931,7 +10908,7 @@
       </p:sp>
       <p:sp>
         <p:nvSpPr>
-          <p:cNvPr id="64" name="S15-line545"/>
+          <p:cNvPr id="64" name="S15-line540"/>
           <p:cNvSpPr/>
           <p:nvPr/>
         </p:nvSpPr>
@@ -10954,7 +10931,7 @@
       </p:sp>
       <p:sp>
         <p:nvSpPr>
-          <p:cNvPr id="65" name="S15-line546"/>
+          <p:cNvPr id="65" name="S15-line541"/>
           <p:cNvSpPr/>
           <p:nvPr/>
         </p:nvSpPr>
@@ -10977,7 +10954,7 @@
       </p:sp>
       <p:sp>
         <p:nvSpPr>
-          <p:cNvPr id="66" name="S15-line547"/>
+          <p:cNvPr id="66" name="S15-line542"/>
           <p:cNvSpPr/>
           <p:nvPr/>
         </p:nvSpPr>
@@ -11000,7 +10977,7 @@
       </p:sp>
       <p:sp>
         <p:nvSpPr>
-          <p:cNvPr id="67" name="S15-line548"/>
+          <p:cNvPr id="67" name="S15-line543"/>
           <p:cNvSpPr/>
           <p:nvPr/>
         </p:nvSpPr>
@@ -11023,7 +11000,7 @@
       </p:sp>
       <p:sp>
         <p:nvSpPr>
-          <p:cNvPr id="68" name="S15-label549"/>
+          <p:cNvPr id="68" name="S15-label544"/>
           <p:cNvSpPr txBox="1"/>
           <p:nvPr/>
         </p:nvSpPr>
@@ -11062,7 +11039,7 @@
       </p:sp>
       <p:sp>
         <p:nvSpPr>
-          <p:cNvPr id="69" name="S15-label550"/>
+          <p:cNvPr id="69" name="S15-label545"/>
           <p:cNvSpPr txBox="1"/>
           <p:nvPr/>
         </p:nvSpPr>
@@ -11101,7 +11078,7 @@
       </p:sp>
       <p:sp>
         <p:nvSpPr>
-          <p:cNvPr id="70" name="S15-label551"/>
+          <p:cNvPr id="70" name="S15-label546"/>
           <p:cNvSpPr txBox="1"/>
           <p:nvPr/>
         </p:nvSpPr>
@@ -11140,7 +11117,7 @@
       </p:sp>
       <p:sp>
         <p:nvSpPr>
-          <p:cNvPr id="71" name="S15-label552"/>
+          <p:cNvPr id="71" name="S15-label547"/>
           <p:cNvSpPr txBox="1"/>
           <p:nvPr/>
         </p:nvSpPr>
@@ -11179,7 +11156,7 @@
       </p:sp>
       <p:sp>
         <p:nvSpPr>
-          <p:cNvPr id="72" name="S15-label553"/>
+          <p:cNvPr id="72" name="S15-label548"/>
           <p:cNvSpPr txBox="1"/>
           <p:nvPr/>
         </p:nvSpPr>
@@ -11218,7 +11195,7 @@
       </p:sp>
       <p:sp>
         <p:nvSpPr>
-          <p:cNvPr id="73" name="S15-label554"/>
+          <p:cNvPr id="73" name="S15-label549"/>
           <p:cNvSpPr txBox="1"/>
           <p:nvPr/>
         </p:nvSpPr>
@@ -11257,7 +11234,7 @@
       </p:sp>
       <p:sp>
         <p:nvSpPr>
-          <p:cNvPr id="74" name="S15-label555"/>
+          <p:cNvPr id="74" name="S15-label550"/>
           <p:cNvSpPr txBox="1"/>
           <p:nvPr/>
         </p:nvSpPr>
@@ -11296,7 +11273,7 @@
       </p:sp>
       <p:sp>
         <p:nvSpPr>
-          <p:cNvPr id="75" name="S15-label556"/>
+          <p:cNvPr id="75" name="S15-label551"/>
           <p:cNvSpPr txBox="1"/>
           <p:nvPr/>
         </p:nvSpPr>
@@ -11335,7 +11312,7 @@
       </p:sp>
       <p:sp>
         <p:nvSpPr>
-          <p:cNvPr id="76" name="S15-label557"/>
+          <p:cNvPr id="76" name="S15-label552"/>
           <p:cNvSpPr txBox="1"/>
           <p:nvPr/>
         </p:nvSpPr>
@@ -11374,7 +11351,7 @@
       </p:sp>
       <p:sp>
         <p:nvSpPr>
-          <p:cNvPr id="77" name="S15-label558"/>
+          <p:cNvPr id="77" name="S15-label553"/>
           <p:cNvSpPr txBox="1"/>
           <p:nvPr/>
         </p:nvSpPr>
@@ -11413,7 +11390,7 @@
       </p:sp>
       <p:sp>
         <p:nvSpPr>
-          <p:cNvPr id="78" name="S15-label559"/>
+          <p:cNvPr id="78" name="S15-label554"/>
           <p:cNvSpPr txBox="1"/>
           <p:nvPr/>
         </p:nvSpPr>
@@ -11452,7 +11429,7 @@
       </p:sp>
       <p:sp>
         <p:nvSpPr>
-          <p:cNvPr id="79" name="S15-label560"/>
+          <p:cNvPr id="79" name="S15-label555"/>
           <p:cNvSpPr txBox="1"/>
           <p:nvPr/>
         </p:nvSpPr>
@@ -11491,7 +11468,7 @@
       </p:sp>
       <p:sp>
         <p:nvSpPr>
-          <p:cNvPr id="80" name="S15-line561"/>
+          <p:cNvPr id="80" name="S15-line556"/>
           <p:cNvSpPr/>
           <p:nvPr/>
         </p:nvSpPr>
@@ -11514,7 +11491,7 @@
       </p:sp>
       <p:sp>
         <p:nvSpPr>
-          <p:cNvPr id="81" name="S15-line562"/>
+          <p:cNvPr id="81" name="S15-line557"/>
           <p:cNvSpPr/>
           <p:nvPr/>
         </p:nvSpPr>
@@ -11537,7 +11514,7 @@
       </p:sp>
       <p:sp>
         <p:nvSpPr>
-          <p:cNvPr id="82" name="S15-pin563"/>
+          <p:cNvPr id="82" name="S15-pin558"/>
           <p:cNvSpPr/>
           <p:nvPr/>
         </p:nvSpPr>
@@ -11562,7 +11539,7 @@
       </p:sp>
       <p:sp>
         <p:nvSpPr>
-          <p:cNvPr id="83" name="S15-label564"/>
+          <p:cNvPr id="83" name="S15-label559"/>
           <p:cNvSpPr txBox="1"/>
           <p:nvPr/>
         </p:nvSpPr>
@@ -11601,7 +11578,7 @@
       </p:sp>
       <p:sp>
         <p:nvSpPr>
-          <p:cNvPr id="84" name="S15-figure565" descr="6시를 가리키는 시계: 두 바늘이 일직선"/>
+          <p:cNvPr id="84" name="S15-figure560" descr="6시를 가리키는 시계: 두 바늘이 일직선"/>
           <p:cNvSpPr/>
           <p:nvPr/>
         </p:nvSpPr>
@@ -11626,7 +11603,7 @@
       </p:sp>
       <p:sp>
         <p:nvSpPr>
-          <p:cNvPr id="85" name="S15-line566"/>
+          <p:cNvPr id="85" name="S15-line561"/>
           <p:cNvSpPr/>
           <p:nvPr/>
         </p:nvSpPr>
@@ -11649,7 +11626,7 @@
       </p:sp>
       <p:sp>
         <p:nvSpPr>
-          <p:cNvPr id="86" name="S15-line567"/>
+          <p:cNvPr id="86" name="S15-line562"/>
           <p:cNvSpPr/>
           <p:nvPr/>
         </p:nvSpPr>
@@ -11672,7 +11649,7 @@
       </p:sp>
       <p:sp>
         <p:nvSpPr>
-          <p:cNvPr id="87" name="S15-line568"/>
+          <p:cNvPr id="87" name="S15-line563"/>
           <p:cNvSpPr/>
           <p:nvPr/>
         </p:nvSpPr>
@@ -11695,7 +11672,7 @@
       </p:sp>
       <p:sp>
         <p:nvSpPr>
-          <p:cNvPr id="88" name="S15-line569"/>
+          <p:cNvPr id="88" name="S15-line564"/>
           <p:cNvSpPr/>
           <p:nvPr/>
         </p:nvSpPr>
@@ -11718,7 +11695,7 @@
       </p:sp>
       <p:sp>
         <p:nvSpPr>
-          <p:cNvPr id="89" name="S15-line570"/>
+          <p:cNvPr id="89" name="S15-line565"/>
           <p:cNvSpPr/>
           <p:nvPr/>
         </p:nvSpPr>
@@ -11741,7 +11718,7 @@
       </p:sp>
       <p:sp>
         <p:nvSpPr>
-          <p:cNvPr id="90" name="S15-line571"/>
+          <p:cNvPr id="90" name="S15-line566"/>
           <p:cNvSpPr/>
           <p:nvPr/>
         </p:nvSpPr>
@@ -11764,7 +11741,7 @@
       </p:sp>
       <p:sp>
         <p:nvSpPr>
-          <p:cNvPr id="91" name="S15-line572"/>
+          <p:cNvPr id="91" name="S15-line567"/>
           <p:cNvSpPr/>
           <p:nvPr/>
         </p:nvSpPr>
@@ -11787,7 +11764,7 @@
       </p:sp>
       <p:sp>
         <p:nvSpPr>
-          <p:cNvPr id="92" name="S15-line573"/>
+          <p:cNvPr id="92" name="S15-line568"/>
           <p:cNvSpPr/>
           <p:nvPr/>
         </p:nvSpPr>
@@ -11810,7 +11787,7 @@
       </p:sp>
       <p:sp>
         <p:nvSpPr>
-          <p:cNvPr id="93" name="S15-line574"/>
+          <p:cNvPr id="93" name="S15-line569"/>
           <p:cNvSpPr/>
           <p:nvPr/>
         </p:nvSpPr>
@@ -11833,7 +11810,7 @@
       </p:sp>
       <p:sp>
         <p:nvSpPr>
-          <p:cNvPr id="94" name="S15-line575"/>
+          <p:cNvPr id="94" name="S15-line570"/>
           <p:cNvSpPr/>
           <p:nvPr/>
         </p:nvSpPr>
@@ -11856,7 +11833,7 @@
       </p:sp>
       <p:sp>
         <p:nvSpPr>
-          <p:cNvPr id="95" name="S15-line576"/>
+          <p:cNvPr id="95" name="S15-line571"/>
           <p:cNvSpPr/>
           <p:nvPr/>
         </p:nvSpPr>
@@ -11879,7 +11856,7 @@
       </p:sp>
       <p:sp>
         <p:nvSpPr>
-          <p:cNvPr id="96" name="S15-line577"/>
+          <p:cNvPr id="96" name="S15-line572"/>
           <p:cNvSpPr/>
           <p:nvPr/>
         </p:nvSpPr>
@@ -11902,7 +11879,7 @@
       </p:sp>
       <p:sp>
         <p:nvSpPr>
-          <p:cNvPr id="97" name="S15-line578"/>
+          <p:cNvPr id="97" name="S15-line573"/>
           <p:cNvSpPr/>
           <p:nvPr/>
         </p:nvSpPr>
@@ -11925,7 +11902,7 @@
       </p:sp>
       <p:sp>
         <p:nvSpPr>
-          <p:cNvPr id="98" name="S15-line579"/>
+          <p:cNvPr id="98" name="S15-line574"/>
           <p:cNvSpPr/>
           <p:nvPr/>
         </p:nvSpPr>
@@ -11948,7 +11925,7 @@
       </p:sp>
       <p:sp>
         <p:nvSpPr>
-          <p:cNvPr id="99" name="S15-line580"/>
+          <p:cNvPr id="99" name="S15-line575"/>
           <p:cNvSpPr/>
           <p:nvPr/>
         </p:nvSpPr>
@@ -11971,7 +11948,7 @@
       </p:sp>
       <p:sp>
         <p:nvSpPr>
-          <p:cNvPr id="100" name="S15-line581"/>
+          <p:cNvPr id="100" name="S15-line576"/>
           <p:cNvSpPr/>
           <p:nvPr/>
         </p:nvSpPr>
@@ -11994,7 +11971,7 @@
       </p:sp>
       <p:sp>
         <p:nvSpPr>
-          <p:cNvPr id="101" name="S15-line582"/>
+          <p:cNvPr id="101" name="S15-line577"/>
           <p:cNvSpPr/>
           <p:nvPr/>
         </p:nvSpPr>
@@ -12017,7 +11994,7 @@
       </p:sp>
       <p:sp>
         <p:nvSpPr>
-          <p:cNvPr id="102" name="S15-line583"/>
+          <p:cNvPr id="102" name="S15-line578"/>
           <p:cNvSpPr/>
           <p:nvPr/>
         </p:nvSpPr>
@@ -12040,7 +12017,7 @@
       </p:sp>
       <p:sp>
         <p:nvSpPr>
-          <p:cNvPr id="103" name="S15-line584"/>
+          <p:cNvPr id="103" name="S15-line579"/>
           <p:cNvSpPr/>
           <p:nvPr/>
         </p:nvSpPr>
@@ -12063,7 +12040,7 @@
       </p:sp>
       <p:sp>
         <p:nvSpPr>
-          <p:cNvPr id="104" name="S15-line585"/>
+          <p:cNvPr id="104" name="S15-line580"/>
           <p:cNvSpPr/>
           <p:nvPr/>
         </p:nvSpPr>
@@ -12086,7 +12063,7 @@
       </p:sp>
       <p:sp>
         <p:nvSpPr>
-          <p:cNvPr id="105" name="S15-line586"/>
+          <p:cNvPr id="105" name="S15-line581"/>
           <p:cNvSpPr/>
           <p:nvPr/>
         </p:nvSpPr>
@@ -12109,7 +12086,7 @@
       </p:sp>
       <p:sp>
         <p:nvSpPr>
-          <p:cNvPr id="106" name="S15-line587"/>
+          <p:cNvPr id="106" name="S15-line582"/>
           <p:cNvSpPr/>
           <p:nvPr/>
         </p:nvSpPr>
@@ -12132,7 +12109,7 @@
       </p:sp>
       <p:sp>
         <p:nvSpPr>
-          <p:cNvPr id="107" name="S15-line588"/>
+          <p:cNvPr id="107" name="S15-line583"/>
           <p:cNvSpPr/>
           <p:nvPr/>
         </p:nvSpPr>
@@ -12155,7 +12132,7 @@
       </p:sp>
       <p:sp>
         <p:nvSpPr>
-          <p:cNvPr id="108" name="S15-line589"/>
+          <p:cNvPr id="108" name="S15-line584"/>
           <p:cNvSpPr/>
           <p:nvPr/>
         </p:nvSpPr>
@@ -12178,7 +12155,7 @@
       </p:sp>
       <p:sp>
         <p:nvSpPr>
-          <p:cNvPr id="109" name="S15-line590"/>
+          <p:cNvPr id="109" name="S15-line585"/>
           <p:cNvSpPr/>
           <p:nvPr/>
         </p:nvSpPr>
@@ -12201,7 +12178,7 @@
       </p:sp>
       <p:sp>
         <p:nvSpPr>
-          <p:cNvPr id="110" name="S15-line591"/>
+          <p:cNvPr id="110" name="S15-line586"/>
           <p:cNvSpPr/>
           <p:nvPr/>
         </p:nvSpPr>
@@ -12224,7 +12201,7 @@
       </p:sp>
       <p:sp>
         <p:nvSpPr>
-          <p:cNvPr id="111" name="S15-line592"/>
+          <p:cNvPr id="111" name="S15-line587"/>
           <p:cNvSpPr/>
           <p:nvPr/>
         </p:nvSpPr>
@@ -12247,7 +12224,7 @@
       </p:sp>
       <p:sp>
         <p:nvSpPr>
-          <p:cNvPr id="112" name="S15-line593"/>
+          <p:cNvPr id="112" name="S15-line588"/>
           <p:cNvSpPr/>
           <p:nvPr/>
         </p:nvSpPr>
@@ -12270,7 +12247,7 @@
       </p:sp>
       <p:sp>
         <p:nvSpPr>
-          <p:cNvPr id="113" name="S15-line594"/>
+          <p:cNvPr id="113" name="S15-line589"/>
           <p:cNvSpPr/>
           <p:nvPr/>
         </p:nvSpPr>
@@ -12293,7 +12270,7 @@
       </p:sp>
       <p:sp>
         <p:nvSpPr>
-          <p:cNvPr id="114" name="S15-line595"/>
+          <p:cNvPr id="114" name="S15-line590"/>
           <p:cNvSpPr/>
           <p:nvPr/>
         </p:nvSpPr>
@@ -12316,7 +12293,7 @@
       </p:sp>
       <p:sp>
         <p:nvSpPr>
-          <p:cNvPr id="115" name="S15-line596"/>
+          <p:cNvPr id="115" name="S15-line591"/>
           <p:cNvSpPr/>
           <p:nvPr/>
         </p:nvSpPr>
@@ -12339,7 +12316,7 @@
       </p:sp>
       <p:sp>
         <p:nvSpPr>
-          <p:cNvPr id="116" name="S15-line597"/>
+          <p:cNvPr id="116" name="S15-line592"/>
           <p:cNvSpPr/>
           <p:nvPr/>
         </p:nvSpPr>
@@ -12362,7 +12339,7 @@
       </p:sp>
       <p:sp>
         <p:nvSpPr>
-          <p:cNvPr id="117" name="S15-line598"/>
+          <p:cNvPr id="117" name="S15-line593"/>
           <p:cNvSpPr/>
           <p:nvPr/>
         </p:nvSpPr>
@@ -12385,7 +12362,7 @@
       </p:sp>
       <p:sp>
         <p:nvSpPr>
-          <p:cNvPr id="118" name="S15-line599"/>
+          <p:cNvPr id="118" name="S15-line594"/>
           <p:cNvSpPr/>
           <p:nvPr/>
         </p:nvSpPr>
@@ -12408,7 +12385,7 @@
       </p:sp>
       <p:sp>
         <p:nvSpPr>
-          <p:cNvPr id="119" name="S15-line600"/>
+          <p:cNvPr id="119" name="S15-line595"/>
           <p:cNvSpPr/>
           <p:nvPr/>
         </p:nvSpPr>
@@ -12431,7 +12408,7 @@
       </p:sp>
       <p:sp>
         <p:nvSpPr>
-          <p:cNvPr id="120" name="S15-line601"/>
+          <p:cNvPr id="120" name="S15-line596"/>
           <p:cNvSpPr/>
           <p:nvPr/>
         </p:nvSpPr>
@@ -12454,7 +12431,7 @@
       </p:sp>
       <p:sp>
         <p:nvSpPr>
-          <p:cNvPr id="121" name="S15-line602"/>
+          <p:cNvPr id="121" name="S15-line597"/>
           <p:cNvSpPr/>
           <p:nvPr/>
         </p:nvSpPr>
@@ -12477,7 +12454,7 @@
       </p:sp>
       <p:sp>
         <p:nvSpPr>
-          <p:cNvPr id="122" name="S15-line603"/>
+          <p:cNvPr id="122" name="S15-line598"/>
           <p:cNvSpPr/>
           <p:nvPr/>
         </p:nvSpPr>
@@ -12500,7 +12477,7 @@
       </p:sp>
       <p:sp>
         <p:nvSpPr>
-          <p:cNvPr id="123" name="S15-line604"/>
+          <p:cNvPr id="123" name="S15-line599"/>
           <p:cNvSpPr/>
           <p:nvPr/>
         </p:nvSpPr>
@@ -12523,7 +12500,7 @@
       </p:sp>
       <p:sp>
         <p:nvSpPr>
-          <p:cNvPr id="124" name="S15-line605"/>
+          <p:cNvPr id="124" name="S15-line600"/>
           <p:cNvSpPr/>
           <p:nvPr/>
         </p:nvSpPr>
@@ -12546,7 +12523,7 @@
       </p:sp>
       <p:sp>
         <p:nvSpPr>
-          <p:cNvPr id="125" name="S15-line606"/>
+          <p:cNvPr id="125" name="S15-line601"/>
           <p:cNvSpPr/>
           <p:nvPr/>
         </p:nvSpPr>
@@ -12569,7 +12546,7 @@
       </p:sp>
       <p:sp>
         <p:nvSpPr>
-          <p:cNvPr id="126" name="S15-line607"/>
+          <p:cNvPr id="126" name="S15-line602"/>
           <p:cNvSpPr/>
           <p:nvPr/>
         </p:nvSpPr>
@@ -12592,7 +12569,7 @@
       </p:sp>
       <p:sp>
         <p:nvSpPr>
-          <p:cNvPr id="127" name="S15-line608"/>
+          <p:cNvPr id="127" name="S15-line603"/>
           <p:cNvSpPr/>
           <p:nvPr/>
         </p:nvSpPr>
@@ -12615,7 +12592,7 @@
       </p:sp>
       <p:sp>
         <p:nvSpPr>
-          <p:cNvPr id="128" name="S15-line609"/>
+          <p:cNvPr id="128" name="S15-line604"/>
           <p:cNvSpPr/>
           <p:nvPr/>
         </p:nvSpPr>
@@ -12638,7 +12615,7 @@
       </p:sp>
       <p:sp>
         <p:nvSpPr>
-          <p:cNvPr id="129" name="S15-line610"/>
+          <p:cNvPr id="129" name="S15-line605"/>
           <p:cNvSpPr/>
           <p:nvPr/>
         </p:nvSpPr>
@@ -12661,7 +12638,7 @@
       </p:sp>
       <p:sp>
         <p:nvSpPr>
-          <p:cNvPr id="130" name="S15-line611"/>
+          <p:cNvPr id="130" name="S15-line606"/>
           <p:cNvSpPr/>
           <p:nvPr/>
         </p:nvSpPr>
@@ -12684,7 +12661,7 @@
       </p:sp>
       <p:sp>
         <p:nvSpPr>
-          <p:cNvPr id="131" name="S15-line612"/>
+          <p:cNvPr id="131" name="S15-line607"/>
           <p:cNvSpPr/>
           <p:nvPr/>
         </p:nvSpPr>
@@ -12707,7 +12684,7 @@
       </p:sp>
       <p:sp>
         <p:nvSpPr>
-          <p:cNvPr id="132" name="S15-line613"/>
+          <p:cNvPr id="132" name="S15-line608"/>
           <p:cNvSpPr/>
           <p:nvPr/>
         </p:nvSpPr>
@@ -12730,7 +12707,7 @@
       </p:sp>
       <p:sp>
         <p:nvSpPr>
-          <p:cNvPr id="133" name="S15-line614"/>
+          <p:cNvPr id="133" name="S15-line609"/>
           <p:cNvSpPr/>
           <p:nvPr/>
         </p:nvSpPr>
@@ -12753,7 +12730,7 @@
       </p:sp>
       <p:sp>
         <p:nvSpPr>
-          <p:cNvPr id="134" name="S15-line615"/>
+          <p:cNvPr id="134" name="S15-line610"/>
           <p:cNvSpPr/>
           <p:nvPr/>
         </p:nvSpPr>
@@ -12776,7 +12753,7 @@
       </p:sp>
       <p:sp>
         <p:nvSpPr>
-          <p:cNvPr id="135" name="S15-line616"/>
+          <p:cNvPr id="135" name="S15-line611"/>
           <p:cNvSpPr/>
           <p:nvPr/>
         </p:nvSpPr>
@@ -12799,7 +12776,7 @@
       </p:sp>
       <p:sp>
         <p:nvSpPr>
-          <p:cNvPr id="136" name="S15-line617"/>
+          <p:cNvPr id="136" name="S15-line612"/>
           <p:cNvSpPr/>
           <p:nvPr/>
         </p:nvSpPr>
@@ -12822,7 +12799,7 @@
       </p:sp>
       <p:sp>
         <p:nvSpPr>
-          <p:cNvPr id="137" name="S15-line618"/>
+          <p:cNvPr id="137" name="S15-line613"/>
           <p:cNvSpPr/>
           <p:nvPr/>
         </p:nvSpPr>
@@ -12845,7 +12822,7 @@
       </p:sp>
       <p:sp>
         <p:nvSpPr>
-          <p:cNvPr id="138" name="S15-line619"/>
+          <p:cNvPr id="138" name="S15-line614"/>
           <p:cNvSpPr/>
           <p:nvPr/>
         </p:nvSpPr>
@@ -12868,7 +12845,7 @@
       </p:sp>
       <p:sp>
         <p:nvSpPr>
-          <p:cNvPr id="139" name="S15-line620"/>
+          <p:cNvPr id="139" name="S15-line615"/>
           <p:cNvSpPr/>
           <p:nvPr/>
         </p:nvSpPr>
@@ -12891,7 +12868,7 @@
       </p:sp>
       <p:sp>
         <p:nvSpPr>
-          <p:cNvPr id="140" name="S15-line621"/>
+          <p:cNvPr id="140" name="S15-line616"/>
           <p:cNvSpPr/>
           <p:nvPr/>
         </p:nvSpPr>
@@ -12914,7 +12891,7 @@
       </p:sp>
       <p:sp>
         <p:nvSpPr>
-          <p:cNvPr id="141" name="S15-line622"/>
+          <p:cNvPr id="141" name="S15-line617"/>
           <p:cNvSpPr/>
           <p:nvPr/>
         </p:nvSpPr>
@@ -12937,7 +12914,7 @@
       </p:sp>
       <p:sp>
         <p:nvSpPr>
-          <p:cNvPr id="142" name="S15-line623"/>
+          <p:cNvPr id="142" name="S15-line618"/>
           <p:cNvSpPr/>
           <p:nvPr/>
         </p:nvSpPr>
@@ -12960,7 +12937,7 @@
       </p:sp>
       <p:sp>
         <p:nvSpPr>
-          <p:cNvPr id="143" name="S15-line624"/>
+          <p:cNvPr id="143" name="S15-line619"/>
           <p:cNvSpPr/>
           <p:nvPr/>
         </p:nvSpPr>
@@ -12983,7 +12960,7 @@
       </p:sp>
       <p:sp>
         <p:nvSpPr>
-          <p:cNvPr id="144" name="S15-line625"/>
+          <p:cNvPr id="144" name="S15-line620"/>
           <p:cNvSpPr/>
           <p:nvPr/>
         </p:nvSpPr>
@@ -13006,7 +12983,7 @@
       </p:sp>
       <p:sp>
         <p:nvSpPr>
-          <p:cNvPr id="145" name="S15-label626"/>
+          <p:cNvPr id="145" name="S15-label621"/>
           <p:cNvSpPr txBox="1"/>
           <p:nvPr/>
         </p:nvSpPr>
@@ -13045,7 +13022,7 @@
       </p:sp>
       <p:sp>
         <p:nvSpPr>
-          <p:cNvPr id="146" name="S15-label627"/>
+          <p:cNvPr id="146" name="S15-label622"/>
           <p:cNvSpPr txBox="1"/>
           <p:nvPr/>
         </p:nvSpPr>
@@ -13084,7 +13061,7 @@
       </p:sp>
       <p:sp>
         <p:nvSpPr>
-          <p:cNvPr id="147" name="S15-label628"/>
+          <p:cNvPr id="147" name="S15-label623"/>
           <p:cNvSpPr txBox="1"/>
           <p:nvPr/>
         </p:nvSpPr>
@@ -13123,7 +13100,7 @@
       </p:sp>
       <p:sp>
         <p:nvSpPr>
-          <p:cNvPr id="148" name="S15-label629"/>
+          <p:cNvPr id="148" name="S15-label624"/>
           <p:cNvSpPr txBox="1"/>
           <p:nvPr/>
         </p:nvSpPr>
@@ -13162,7 +13139,7 @@
       </p:sp>
       <p:sp>
         <p:nvSpPr>
-          <p:cNvPr id="149" name="S15-label630"/>
+          <p:cNvPr id="149" name="S15-label625"/>
           <p:cNvSpPr txBox="1"/>
           <p:nvPr/>
         </p:nvSpPr>
@@ -13201,7 +13178,7 @@
       </p:sp>
       <p:sp>
         <p:nvSpPr>
-          <p:cNvPr id="150" name="S15-label631"/>
+          <p:cNvPr id="150" name="S15-label626"/>
           <p:cNvSpPr txBox="1"/>
           <p:nvPr/>
         </p:nvSpPr>
@@ -13240,7 +13217,7 @@
       </p:sp>
       <p:sp>
         <p:nvSpPr>
-          <p:cNvPr id="151" name="S15-label632"/>
+          <p:cNvPr id="151" name="S15-label627"/>
           <p:cNvSpPr txBox="1"/>
           <p:nvPr/>
         </p:nvSpPr>
@@ -13279,7 +13256,7 @@
       </p:sp>
       <p:sp>
         <p:nvSpPr>
-          <p:cNvPr id="152" name="S15-label633"/>
+          <p:cNvPr id="152" name="S15-label628"/>
           <p:cNvSpPr txBox="1"/>
           <p:nvPr/>
         </p:nvSpPr>
@@ -13318,7 +13295,7 @@
       </p:sp>
       <p:sp>
         <p:nvSpPr>
-          <p:cNvPr id="153" name="S15-label634"/>
+          <p:cNvPr id="153" name="S15-label629"/>
           <p:cNvSpPr txBox="1"/>
           <p:nvPr/>
         </p:nvSpPr>
@@ -13357,7 +13334,7 @@
       </p:sp>
       <p:sp>
         <p:nvSpPr>
-          <p:cNvPr id="154" name="S15-label635"/>
+          <p:cNvPr id="154" name="S15-label630"/>
           <p:cNvSpPr txBox="1"/>
           <p:nvPr/>
         </p:nvSpPr>
@@ -13396,7 +13373,7 @@
       </p:sp>
       <p:sp>
         <p:nvSpPr>
-          <p:cNvPr id="155" name="S15-label636"/>
+          <p:cNvPr id="155" name="S15-label631"/>
           <p:cNvSpPr txBox="1"/>
           <p:nvPr/>
         </p:nvSpPr>
@@ -13435,7 +13412,7 @@
       </p:sp>
       <p:sp>
         <p:nvSpPr>
-          <p:cNvPr id="156" name="S15-label637"/>
+          <p:cNvPr id="156" name="S15-label632"/>
           <p:cNvSpPr txBox="1"/>
           <p:nvPr/>
         </p:nvSpPr>
@@ -13474,7 +13451,7 @@
       </p:sp>
       <p:sp>
         <p:nvSpPr>
-          <p:cNvPr id="157" name="S15-line638"/>
+          <p:cNvPr id="157" name="S15-line633"/>
           <p:cNvSpPr/>
           <p:nvPr/>
         </p:nvSpPr>
@@ -13497,7 +13474,7 @@
       </p:sp>
       <p:sp>
         <p:nvSpPr>
-          <p:cNvPr id="158" name="S15-line639"/>
+          <p:cNvPr id="158" name="S15-line634"/>
           <p:cNvSpPr/>
           <p:nvPr/>
         </p:nvSpPr>
@@ -13520,7 +13497,7 @@
       </p:sp>
       <p:sp>
         <p:nvSpPr>
-          <p:cNvPr id="159" name="S15-pin640"/>
+          <p:cNvPr id="159" name="S15-pin635"/>
           <p:cNvSpPr/>
           <p:nvPr/>
         </p:nvSpPr>
@@ -13545,7 +13522,7 @@
       </p:sp>
       <p:sp>
         <p:nvSpPr>
-          <p:cNvPr id="160" name="S15-label641"/>
+          <p:cNvPr id="160" name="S15-label636"/>
           <p:cNvSpPr txBox="1"/>
           <p:nvPr/>
         </p:nvSpPr>
@@ -14619,7 +14596,7 @@
         </p:nvSpPr>
         <p:spPr>
           <a:xfrm>
-            <a:off x="1441899" y="2980651"/>
+            <a:off x="1441899" y="2716902"/>
             <a:ext cx="1582497" cy="1582497"/>
           </a:xfrm>
           <a:custGeom>
@@ -14666,7 +14643,7 @@
         </p:nvSpPr>
         <p:spPr>
           <a:xfrm>
-            <a:off x="4079394" y="2980651"/>
+            <a:off x="4079394" y="2716902"/>
             <a:ext cx="1582497" cy="1582497"/>
           </a:xfrm>
           <a:custGeom>
@@ -14713,8 +14690,8 @@
         </p:nvSpPr>
         <p:spPr>
           <a:xfrm flipV="1">
-            <a:off x="914400" y="1925653"/>
-            <a:ext cx="0" cy="3692494"/>
+            <a:off x="914400" y="2189403"/>
+            <a:ext cx="0" cy="3164994"/>
           </a:xfrm>
           <a:prstGeom prst="line">
             <a:avLst/>
@@ -14736,8 +14713,8 @@
         </p:nvSpPr>
         <p:spPr>
           <a:xfrm flipV="1">
-            <a:off x="1441899" y="1925653"/>
-            <a:ext cx="0" cy="3692494"/>
+            <a:off x="1441899" y="2189403"/>
+            <a:ext cx="0" cy="3164994"/>
           </a:xfrm>
           <a:prstGeom prst="line">
             <a:avLst/>
@@ -14759,8 +14736,8 @@
         </p:nvSpPr>
         <p:spPr>
           <a:xfrm flipV="1">
-            <a:off x="1969398" y="1925653"/>
-            <a:ext cx="0" cy="3692494"/>
+            <a:off x="1969398" y="2189403"/>
+            <a:ext cx="0" cy="3164994"/>
           </a:xfrm>
           <a:prstGeom prst="line">
             <a:avLst/>
@@ -14782,8 +14759,8 @@
         </p:nvSpPr>
         <p:spPr>
           <a:xfrm flipV="1">
-            <a:off x="2496897" y="1925653"/>
-            <a:ext cx="0" cy="3692494"/>
+            <a:off x="2496897" y="2189403"/>
+            <a:ext cx="0" cy="3164994"/>
           </a:xfrm>
           <a:prstGeom prst="line">
             <a:avLst/>
@@ -14805,8 +14782,8 @@
         </p:nvSpPr>
         <p:spPr>
           <a:xfrm flipV="1">
-            <a:off x="3024396" y="1925653"/>
-            <a:ext cx="0" cy="3692494"/>
+            <a:off x="3024396" y="2189403"/>
+            <a:ext cx="0" cy="3164994"/>
           </a:xfrm>
           <a:prstGeom prst="line">
             <a:avLst/>
@@ -14828,8 +14805,8 @@
         </p:nvSpPr>
         <p:spPr>
           <a:xfrm flipV="1">
-            <a:off x="3551895" y="1925653"/>
-            <a:ext cx="0" cy="3692494"/>
+            <a:off x="3551895" y="2189403"/>
+            <a:ext cx="0" cy="3164994"/>
           </a:xfrm>
           <a:prstGeom prst="line">
             <a:avLst/>
@@ -14851,8 +14828,8 @@
         </p:nvSpPr>
         <p:spPr>
           <a:xfrm flipV="1">
-            <a:off x="4079394" y="1925653"/>
-            <a:ext cx="0" cy="3692494"/>
+            <a:off x="4079394" y="2189403"/>
+            <a:ext cx="0" cy="3164994"/>
           </a:xfrm>
           <a:prstGeom prst="line">
             <a:avLst/>
@@ -14874,8 +14851,8 @@
         </p:nvSpPr>
         <p:spPr>
           <a:xfrm flipV="1">
-            <a:off x="4606894" y="1925653"/>
-            <a:ext cx="0" cy="3692494"/>
+            <a:off x="4606894" y="2189403"/>
+            <a:ext cx="0" cy="3164994"/>
           </a:xfrm>
           <a:prstGeom prst="line">
             <a:avLst/>
@@ -14897,8 +14874,8 @@
         </p:nvSpPr>
         <p:spPr>
           <a:xfrm flipV="1">
-            <a:off x="5134393" y="1925653"/>
-            <a:ext cx="0" cy="3692494"/>
+            <a:off x="5134393" y="2189403"/>
+            <a:ext cx="0" cy="3164994"/>
           </a:xfrm>
           <a:prstGeom prst="line">
             <a:avLst/>
@@ -14920,8 +14897,8 @@
         </p:nvSpPr>
         <p:spPr>
           <a:xfrm flipV="1">
-            <a:off x="5661892" y="1925653"/>
-            <a:ext cx="0" cy="3692494"/>
+            <a:off x="5661892" y="2189403"/>
+            <a:ext cx="0" cy="3164994"/>
           </a:xfrm>
           <a:prstGeom prst="line">
             <a:avLst/>
@@ -14943,8 +14920,8 @@
         </p:nvSpPr>
         <p:spPr>
           <a:xfrm flipV="1">
-            <a:off x="6189391" y="1925653"/>
-            <a:ext cx="0" cy="3692494"/>
+            <a:off x="6189391" y="2189403"/>
+            <a:ext cx="0" cy="3164994"/>
           </a:xfrm>
           <a:prstGeom prst="line">
             <a:avLst/>
@@ -14966,7 +14943,7 @@
         </p:nvSpPr>
         <p:spPr>
           <a:xfrm>
-            <a:off x="914400" y="5618147"/>
+            <a:off x="914400" y="5354397"/>
             <a:ext cx="5274991" cy="0"/>
           </a:xfrm>
           <a:prstGeom prst="line">
@@ -14989,7 +14966,7 @@
         </p:nvSpPr>
         <p:spPr>
           <a:xfrm>
-            <a:off x="914400" y="5090648"/>
+            <a:off x="914400" y="4826898"/>
             <a:ext cx="5274991" cy="0"/>
           </a:xfrm>
           <a:prstGeom prst="line">
@@ -15012,7 +14989,7 @@
         </p:nvSpPr>
         <p:spPr>
           <a:xfrm>
-            <a:off x="914400" y="4563149"/>
+            <a:off x="914400" y="4299399"/>
             <a:ext cx="5274991" cy="0"/>
           </a:xfrm>
           <a:prstGeom prst="line">
@@ -15035,7 +15012,7 @@
         </p:nvSpPr>
         <p:spPr>
           <a:xfrm>
-            <a:off x="914400" y="4035650"/>
+            <a:off x="914400" y="3771900"/>
             <a:ext cx="5274991" cy="0"/>
           </a:xfrm>
           <a:prstGeom prst="line">
@@ -15058,7 +15035,7 @@
         </p:nvSpPr>
         <p:spPr>
           <a:xfrm>
-            <a:off x="914400" y="3508150"/>
+            <a:off x="914400" y="3244401"/>
             <a:ext cx="5274991" cy="0"/>
           </a:xfrm>
           <a:prstGeom prst="line">
@@ -15081,7 +15058,7 @@
         </p:nvSpPr>
         <p:spPr>
           <a:xfrm>
-            <a:off x="914400" y="2980651"/>
+            <a:off x="914400" y="2716902"/>
             <a:ext cx="5274991" cy="0"/>
           </a:xfrm>
           <a:prstGeom prst="line">
@@ -15104,7 +15081,7 @@
         </p:nvSpPr>
         <p:spPr>
           <a:xfrm>
-            <a:off x="914400" y="2453152"/>
+            <a:off x="914400" y="2189403"/>
             <a:ext cx="5274991" cy="0"/>
           </a:xfrm>
           <a:prstGeom prst="line">
@@ -15121,36 +15098,13 @@
       </p:sp>
       <p:sp>
         <p:nvSpPr>
-          <p:cNvPr id="23" name="S03-mark77"/>
-          <p:cNvSpPr/>
-          <p:nvPr/>
-        </p:nvSpPr>
-        <p:spPr>
-          <a:xfrm>
-            <a:off x="914400" y="1925653"/>
-            <a:ext cx="5274991" cy="0"/>
-          </a:xfrm>
-          <a:prstGeom prst="line">
-            <a:avLst/>
-          </a:prstGeom>
-          <a:noFill/>
-          <a:ln w="9525">
-            <a:solidFill>
-              <a:srgbClr val="B8C2CC"/>
-            </a:solidFill>
-            <a:prstDash val="solid"/>
-          </a:ln>
-        </p:spPr>
-      </p:sp>
-      <p:sp>
-        <p:nvSpPr>
-          <p:cNvPr id="24" name="S03-figure78" descr="모눈 위의 깃발과, 오른쪽으로 5칸 민 깃발: 모양과 방향은 같고 위치만 다름"/>
-          <p:cNvSpPr/>
-          <p:nvPr/>
-        </p:nvSpPr>
-        <p:spPr>
-          <a:xfrm>
-            <a:off x="1441899" y="2980651"/>
+          <p:cNvPr id="23" name="S03-figure77" descr="모눈 위의 깃발과, 오른쪽으로 5칸 민 깃발: 모양과 방향은 같고 위치만 다름"/>
+          <p:cNvSpPr/>
+          <p:nvPr/>
+        </p:nvSpPr>
+        <p:spPr>
+          <a:xfrm>
+            <a:off x="1441899" y="2716902"/>
             <a:ext cx="1582497" cy="1582497"/>
           </a:xfrm>
           <a:custGeom>
@@ -15194,13 +15148,13 @@
       </p:sp>
       <p:sp>
         <p:nvSpPr>
-          <p:cNvPr id="25" name="S03-mark79"/>
-          <p:cNvSpPr/>
-          <p:nvPr/>
-        </p:nvSpPr>
-        <p:spPr>
-          <a:xfrm>
-            <a:off x="4079394" y="2980651"/>
+          <p:cNvPr id="24" name="S03-mark78"/>
+          <p:cNvSpPr/>
+          <p:nvPr/>
+        </p:nvSpPr>
+        <p:spPr>
+          <a:xfrm>
+            <a:off x="4079394" y="2716902"/>
             <a:ext cx="1582497" cy="1582497"/>
           </a:xfrm>
           <a:custGeom>
@@ -15244,13 +15198,13 @@
       </p:sp>
       <p:sp>
         <p:nvSpPr>
-          <p:cNvPr id="26" name="S03-mark80"/>
-          <p:cNvSpPr/>
-          <p:nvPr/>
-        </p:nvSpPr>
-        <p:spPr>
-          <a:xfrm>
-            <a:off x="1441899" y="4879648"/>
+          <p:cNvPr id="25" name="S03-mark79"/>
+          <p:cNvSpPr/>
+          <p:nvPr/>
+        </p:nvSpPr>
+        <p:spPr>
+          <a:xfrm>
+            <a:off x="1441899" y="4615899"/>
             <a:ext cx="2637495" cy="0"/>
           </a:xfrm>
           <a:prstGeom prst="line">
@@ -15268,13 +15222,13 @@
       </p:sp>
       <p:sp>
         <p:nvSpPr>
-          <p:cNvPr id="27" name="S03-label82"/>
+          <p:cNvPr id="26" name="S03-label81"/>
           <p:cNvSpPr txBox="1"/>
           <p:nvPr/>
         </p:nvSpPr>
         <p:spPr>
           <a:xfrm>
-            <a:off x="2455847" y="4963468"/>
+            <a:off x="2455847" y="4699719"/>
             <a:ext cx="609600" cy="381000"/>
           </a:xfrm>
           <a:prstGeom prst="rect">
@@ -15307,13 +15261,13 @@
       </p:sp>
       <p:sp>
         <p:nvSpPr>
-          <p:cNvPr id="28" name="S03-label84"/>
+          <p:cNvPr id="27" name="S03-label83"/>
           <p:cNvSpPr txBox="1"/>
           <p:nvPr/>
         </p:nvSpPr>
         <p:spPr>
           <a:xfrm>
-            <a:off x="1879580" y="2368152"/>
+            <a:off x="1879580" y="2104403"/>
             <a:ext cx="707136" cy="381000"/>
           </a:xfrm>
           <a:prstGeom prst="rect">
@@ -15346,13 +15300,13 @@
       </p:sp>
       <p:sp>
         <p:nvSpPr>
-          <p:cNvPr id="29" name="S03-label86"/>
+          <p:cNvPr id="28" name="S03-label85"/>
           <p:cNvSpPr txBox="1"/>
           <p:nvPr/>
         </p:nvSpPr>
         <p:spPr>
           <a:xfrm>
-            <a:off x="4471355" y="2368152"/>
+            <a:off x="4471355" y="2104403"/>
             <a:ext cx="798576" cy="381000"/>
           </a:xfrm>
           <a:prstGeom prst="rect">
@@ -15385,7 +15339,7 @@
       </p:sp>
       <p:sp>
         <p:nvSpPr>
-          <p:cNvPr id="30" name="S03-card87"/>
+          <p:cNvPr id="29" name="S03-card86"/>
           <p:cNvSpPr/>
           <p:nvPr/>
         </p:nvSpPr>
@@ -15412,7 +15366,7 @@
       </p:sp>
       <p:sp>
         <p:nvSpPr>
-          <p:cNvPr id="31" name="S03-cardtext88"/>
+          <p:cNvPr id="30" name="S03-cardtext87"/>
           <p:cNvSpPr txBox="1"/>
           <p:nvPr/>
         </p:nvSpPr>
@@ -15474,7 +15428,7 @@
       </p:sp>
       <p:sp>
         <p:nvSpPr>
-          <p:cNvPr id="32" name="S03-card89"/>
+          <p:cNvPr id="31" name="S03-card88"/>
           <p:cNvSpPr/>
           <p:nvPr/>
         </p:nvSpPr>
@@ -15501,7 +15455,7 @@
       </p:sp>
       <p:sp>
         <p:nvSpPr>
-          <p:cNvPr id="33" name="S03-cardtext90"/>
+          <p:cNvPr id="32" name="S03-cardtext89"/>
           <p:cNvSpPr txBox="1"/>
           <p:nvPr/>
         </p:nvSpPr>
@@ -15657,7 +15611,7 @@
       </p:sp>
       <p:sp>
         <p:nvSpPr>
-          <p:cNvPr id="3" name="S04-card91"/>
+          <p:cNvPr id="3" name="S04-card90"/>
           <p:cNvSpPr/>
           <p:nvPr/>
         </p:nvSpPr>
@@ -15684,7 +15638,7 @@
       </p:sp>
       <p:sp>
         <p:nvSpPr>
-          <p:cNvPr id="4" name="S04-cardtext92"/>
+          <p:cNvPr id="4" name="S04-cardtext91"/>
           <p:cNvSpPr txBox="1"/>
           <p:nvPr/>
         </p:nvSpPr>
@@ -15746,7 +15700,7 @@
       </p:sp>
       <p:sp>
         <p:nvSpPr>
-          <p:cNvPr id="5" name="S04-card93"/>
+          <p:cNvPr id="5" name="S04-card92"/>
           <p:cNvSpPr/>
           <p:nvPr/>
         </p:nvSpPr>
@@ -15773,7 +15727,7 @@
       </p:sp>
       <p:sp>
         <p:nvSpPr>
-          <p:cNvPr id="6" name="S04-cardtext94"/>
+          <p:cNvPr id="6" name="S04-cardtext93"/>
           <p:cNvSpPr txBox="1"/>
           <p:nvPr/>
         </p:nvSpPr>
@@ -15835,7 +15789,7 @@
       </p:sp>
       <p:sp>
         <p:nvSpPr>
-          <p:cNvPr id="7" name="S04-mark95"/>
+          <p:cNvPr id="7" name="S04-mark94"/>
           <p:cNvSpPr/>
           <p:nvPr/>
         </p:nvSpPr>
@@ -15882,7 +15836,7 @@
       </p:sp>
       <p:sp>
         <p:nvSpPr>
-          <p:cNvPr id="8" name="S04-mark96"/>
+          <p:cNvPr id="8" name="S04-mark95"/>
           <p:cNvSpPr/>
           <p:nvPr/>
         </p:nvSpPr>
@@ -15929,7 +15883,7 @@
       </p:sp>
       <p:sp>
         <p:nvSpPr>
-          <p:cNvPr id="9" name="S04-mark97"/>
+          <p:cNvPr id="9" name="S04-mark96"/>
           <p:cNvSpPr/>
           <p:nvPr/>
         </p:nvSpPr>
@@ -15952,7 +15906,7 @@
       </p:sp>
       <p:sp>
         <p:nvSpPr>
-          <p:cNvPr id="10" name="S04-mark98"/>
+          <p:cNvPr id="10" name="S04-mark97"/>
           <p:cNvSpPr/>
           <p:nvPr/>
         </p:nvSpPr>
@@ -15975,7 +15929,7 @@
       </p:sp>
       <p:sp>
         <p:nvSpPr>
-          <p:cNvPr id="11" name="S04-mark99"/>
+          <p:cNvPr id="11" name="S04-mark98"/>
           <p:cNvSpPr/>
           <p:nvPr/>
         </p:nvSpPr>
@@ -15998,7 +15952,7 @@
       </p:sp>
       <p:sp>
         <p:nvSpPr>
-          <p:cNvPr id="12" name="S04-mark100"/>
+          <p:cNvPr id="12" name="S04-mark99"/>
           <p:cNvSpPr/>
           <p:nvPr/>
         </p:nvSpPr>
@@ -16021,7 +15975,7 @@
       </p:sp>
       <p:sp>
         <p:nvSpPr>
-          <p:cNvPr id="13" name="S04-mark101"/>
+          <p:cNvPr id="13" name="S04-mark100"/>
           <p:cNvSpPr/>
           <p:nvPr/>
         </p:nvSpPr>
@@ -16044,7 +15998,7 @@
       </p:sp>
       <p:sp>
         <p:nvSpPr>
-          <p:cNvPr id="14" name="S04-mark102"/>
+          <p:cNvPr id="14" name="S04-mark101"/>
           <p:cNvSpPr/>
           <p:nvPr/>
         </p:nvSpPr>
@@ -16067,7 +16021,7 @@
       </p:sp>
       <p:sp>
         <p:nvSpPr>
-          <p:cNvPr id="15" name="S04-mark103"/>
+          <p:cNvPr id="15" name="S04-mark102"/>
           <p:cNvSpPr/>
           <p:nvPr/>
         </p:nvSpPr>
@@ -16090,7 +16044,7 @@
       </p:sp>
       <p:sp>
         <p:nvSpPr>
-          <p:cNvPr id="16" name="S04-mark104"/>
+          <p:cNvPr id="16" name="S04-mark103"/>
           <p:cNvSpPr/>
           <p:nvPr/>
         </p:nvSpPr>
@@ -16113,7 +16067,7 @@
       </p:sp>
       <p:sp>
         <p:nvSpPr>
-          <p:cNvPr id="17" name="S04-mark105"/>
+          <p:cNvPr id="17" name="S04-mark104"/>
           <p:cNvSpPr/>
           <p:nvPr/>
         </p:nvSpPr>
@@ -16136,7 +16090,7 @@
       </p:sp>
       <p:sp>
         <p:nvSpPr>
-          <p:cNvPr id="18" name="S04-mark106"/>
+          <p:cNvPr id="18" name="S04-mark105"/>
           <p:cNvSpPr/>
           <p:nvPr/>
         </p:nvSpPr>
@@ -16159,7 +16113,7 @@
       </p:sp>
       <p:sp>
         <p:nvSpPr>
-          <p:cNvPr id="19" name="S04-mark107"/>
+          <p:cNvPr id="19" name="S04-mark106"/>
           <p:cNvSpPr/>
           <p:nvPr/>
         </p:nvSpPr>
@@ -16182,7 +16136,7 @@
       </p:sp>
       <p:sp>
         <p:nvSpPr>
-          <p:cNvPr id="20" name="S04-mark108"/>
+          <p:cNvPr id="20" name="S04-mark107"/>
           <p:cNvSpPr/>
           <p:nvPr/>
         </p:nvSpPr>
@@ -16205,7 +16159,7 @@
       </p:sp>
       <p:sp>
         <p:nvSpPr>
-          <p:cNvPr id="21" name="S04-mark109"/>
+          <p:cNvPr id="21" name="S04-mark108"/>
           <p:cNvSpPr/>
           <p:nvPr/>
         </p:nvSpPr>
@@ -16228,7 +16182,7 @@
       </p:sp>
       <p:sp>
         <p:nvSpPr>
-          <p:cNvPr id="22" name="S04-mark110"/>
+          <p:cNvPr id="22" name="S04-mark109"/>
           <p:cNvSpPr/>
           <p:nvPr/>
         </p:nvSpPr>
@@ -16251,7 +16205,7 @@
       </p:sp>
       <p:sp>
         <p:nvSpPr>
-          <p:cNvPr id="23" name="S04-mark111"/>
+          <p:cNvPr id="23" name="S04-mark110"/>
           <p:cNvSpPr/>
           <p:nvPr/>
         </p:nvSpPr>
@@ -16274,7 +16228,7 @@
       </p:sp>
       <p:sp>
         <p:nvSpPr>
-          <p:cNvPr id="24" name="S04-mark112"/>
+          <p:cNvPr id="24" name="S04-mark111"/>
           <p:cNvSpPr/>
           <p:nvPr/>
         </p:nvSpPr>
@@ -16297,7 +16251,7 @@
       </p:sp>
       <p:sp>
         <p:nvSpPr>
-          <p:cNvPr id="25" name="S04-mark113"/>
+          <p:cNvPr id="25" name="S04-mark112"/>
           <p:cNvSpPr/>
           <p:nvPr/>
         </p:nvSpPr>
@@ -16320,7 +16274,7 @@
       </p:sp>
       <p:sp>
         <p:nvSpPr>
-          <p:cNvPr id="26" name="S04-mark114"/>
+          <p:cNvPr id="26" name="S04-mark113"/>
           <p:cNvSpPr/>
           <p:nvPr/>
         </p:nvSpPr>
@@ -16343,7 +16297,7 @@
       </p:sp>
       <p:sp>
         <p:nvSpPr>
-          <p:cNvPr id="27" name="S04-mark115"/>
+          <p:cNvPr id="27" name="S04-mark114"/>
           <p:cNvSpPr/>
           <p:nvPr/>
         </p:nvSpPr>
@@ -16366,7 +16320,7 @@
       </p:sp>
       <p:sp>
         <p:nvSpPr>
-          <p:cNvPr id="28" name="S04-figure116" descr="깃발을 세로 점선을 기준으로 오른쪽으로 뒤집음: 깃발이 오른쪽을 향하던 것이 왼쪽을 향함"/>
+          <p:cNvPr id="28" name="S04-figure115" descr="깃발을 세로 점선을 기준으로 오른쪽으로 뒤집음: 깃발이 오른쪽을 향하던 것이 왼쪽을 향함"/>
           <p:cNvSpPr/>
           <p:nvPr/>
         </p:nvSpPr>
@@ -16416,7 +16370,7 @@
       </p:sp>
       <p:sp>
         <p:nvSpPr>
-          <p:cNvPr id="29" name="S04-mark117"/>
+          <p:cNvPr id="29" name="S04-mark116"/>
           <p:cNvSpPr/>
           <p:nvPr/>
         </p:nvSpPr>
@@ -16466,7 +16420,7 @@
       </p:sp>
       <p:sp>
         <p:nvSpPr>
-          <p:cNvPr id="30" name="S04-mark118"/>
+          <p:cNvPr id="30" name="S04-mark117"/>
           <p:cNvSpPr/>
           <p:nvPr/>
         </p:nvSpPr>
@@ -16489,7 +16443,7 @@
       </p:sp>
       <p:sp>
         <p:nvSpPr>
-          <p:cNvPr id="31" name="S04-label119"/>
+          <p:cNvPr id="31" name="S04-label118"/>
           <p:cNvSpPr txBox="1"/>
           <p:nvPr/>
         </p:nvSpPr>
@@ -16528,7 +16482,7 @@
       </p:sp>
       <p:sp>
         <p:nvSpPr>
-          <p:cNvPr id="32" name="S04-mark120"/>
+          <p:cNvPr id="32" name="S04-mark119"/>
           <p:cNvSpPr/>
           <p:nvPr/>
         </p:nvSpPr>
@@ -16575,7 +16529,7 @@
       </p:sp>
       <p:sp>
         <p:nvSpPr>
-          <p:cNvPr id="33" name="S04-mark121"/>
+          <p:cNvPr id="33" name="S04-mark120"/>
           <p:cNvSpPr/>
           <p:nvPr/>
         </p:nvSpPr>
@@ -16622,7 +16576,7 @@
       </p:sp>
       <p:sp>
         <p:nvSpPr>
-          <p:cNvPr id="34" name="S04-mark122"/>
+          <p:cNvPr id="34" name="S04-mark121"/>
           <p:cNvSpPr/>
           <p:nvPr/>
         </p:nvSpPr>
@@ -16645,7 +16599,7 @@
       </p:sp>
       <p:sp>
         <p:nvSpPr>
-          <p:cNvPr id="35" name="S04-mark123"/>
+          <p:cNvPr id="35" name="S04-mark122"/>
           <p:cNvSpPr/>
           <p:nvPr/>
         </p:nvSpPr>
@@ -16668,7 +16622,7 @@
       </p:sp>
       <p:sp>
         <p:nvSpPr>
-          <p:cNvPr id="36" name="S04-mark124"/>
+          <p:cNvPr id="36" name="S04-mark123"/>
           <p:cNvSpPr/>
           <p:nvPr/>
         </p:nvSpPr>
@@ -16691,7 +16645,7 @@
       </p:sp>
       <p:sp>
         <p:nvSpPr>
-          <p:cNvPr id="37" name="S04-mark125"/>
+          <p:cNvPr id="37" name="S04-mark124"/>
           <p:cNvSpPr/>
           <p:nvPr/>
         </p:nvSpPr>
@@ -16714,7 +16668,7 @@
       </p:sp>
       <p:sp>
         <p:nvSpPr>
-          <p:cNvPr id="38" name="S04-mark126"/>
+          <p:cNvPr id="38" name="S04-mark125"/>
           <p:cNvSpPr/>
           <p:nvPr/>
         </p:nvSpPr>
@@ -16737,7 +16691,7 @@
       </p:sp>
       <p:sp>
         <p:nvSpPr>
-          <p:cNvPr id="39" name="S04-mark127"/>
+          <p:cNvPr id="39" name="S04-mark126"/>
           <p:cNvSpPr/>
           <p:nvPr/>
         </p:nvSpPr>
@@ -16760,7 +16714,7 @@
       </p:sp>
       <p:sp>
         <p:nvSpPr>
-          <p:cNvPr id="40" name="S04-mark128"/>
+          <p:cNvPr id="40" name="S04-mark127"/>
           <p:cNvSpPr/>
           <p:nvPr/>
         </p:nvSpPr>
@@ -16783,7 +16737,7 @@
       </p:sp>
       <p:sp>
         <p:nvSpPr>
-          <p:cNvPr id="41" name="S04-mark129"/>
+          <p:cNvPr id="41" name="S04-mark128"/>
           <p:cNvSpPr/>
           <p:nvPr/>
         </p:nvSpPr>
@@ -16806,7 +16760,7 @@
       </p:sp>
       <p:sp>
         <p:nvSpPr>
-          <p:cNvPr id="42" name="S04-mark130"/>
+          <p:cNvPr id="42" name="S04-mark129"/>
           <p:cNvSpPr/>
           <p:nvPr/>
         </p:nvSpPr>
@@ -16829,7 +16783,7 @@
       </p:sp>
       <p:sp>
         <p:nvSpPr>
-          <p:cNvPr id="43" name="S04-mark131"/>
+          <p:cNvPr id="43" name="S04-mark130"/>
           <p:cNvSpPr/>
           <p:nvPr/>
         </p:nvSpPr>
@@ -16852,7 +16806,7 @@
       </p:sp>
       <p:sp>
         <p:nvSpPr>
-          <p:cNvPr id="44" name="S04-mark132"/>
+          <p:cNvPr id="44" name="S04-mark131"/>
           <p:cNvSpPr/>
           <p:nvPr/>
         </p:nvSpPr>
@@ -16875,7 +16829,7 @@
       </p:sp>
       <p:sp>
         <p:nvSpPr>
-          <p:cNvPr id="45" name="S04-mark133"/>
+          <p:cNvPr id="45" name="S04-mark132"/>
           <p:cNvSpPr/>
           <p:nvPr/>
         </p:nvSpPr>
@@ -16898,7 +16852,7 @@
       </p:sp>
       <p:sp>
         <p:nvSpPr>
-          <p:cNvPr id="46" name="S04-mark134"/>
+          <p:cNvPr id="46" name="S04-mark133"/>
           <p:cNvSpPr/>
           <p:nvPr/>
         </p:nvSpPr>
@@ -16921,7 +16875,7 @@
       </p:sp>
       <p:sp>
         <p:nvSpPr>
-          <p:cNvPr id="47" name="S04-mark135"/>
+          <p:cNvPr id="47" name="S04-mark134"/>
           <p:cNvSpPr/>
           <p:nvPr/>
         </p:nvSpPr>
@@ -16944,7 +16898,7 @@
       </p:sp>
       <p:sp>
         <p:nvSpPr>
-          <p:cNvPr id="48" name="S04-mark136"/>
+          <p:cNvPr id="48" name="S04-mark135"/>
           <p:cNvSpPr/>
           <p:nvPr/>
         </p:nvSpPr>
@@ -16967,7 +16921,7 @@
       </p:sp>
       <p:sp>
         <p:nvSpPr>
-          <p:cNvPr id="49" name="S04-mark137"/>
+          <p:cNvPr id="49" name="S04-mark136"/>
           <p:cNvSpPr/>
           <p:nvPr/>
         </p:nvSpPr>
@@ -16990,7 +16944,7 @@
       </p:sp>
       <p:sp>
         <p:nvSpPr>
-          <p:cNvPr id="50" name="S04-mark138"/>
+          <p:cNvPr id="50" name="S04-mark137"/>
           <p:cNvSpPr/>
           <p:nvPr/>
         </p:nvSpPr>
@@ -17013,7 +16967,7 @@
       </p:sp>
       <p:sp>
         <p:nvSpPr>
-          <p:cNvPr id="51" name="S04-mark139"/>
+          <p:cNvPr id="51" name="S04-mark138"/>
           <p:cNvSpPr/>
           <p:nvPr/>
         </p:nvSpPr>
@@ -17036,7 +16990,7 @@
       </p:sp>
       <p:sp>
         <p:nvSpPr>
-          <p:cNvPr id="52" name="S04-mark140"/>
+          <p:cNvPr id="52" name="S04-mark139"/>
           <p:cNvSpPr/>
           <p:nvPr/>
         </p:nvSpPr>
@@ -17059,7 +17013,7 @@
       </p:sp>
       <p:sp>
         <p:nvSpPr>
-          <p:cNvPr id="53" name="S04-figure141" descr="깃발을 가로 점선을 기준으로 아래쪽으로 뒤집음: 깃발이 위쪽에 있던 것이 아래쪽에 있음"/>
+          <p:cNvPr id="53" name="S04-figure140" descr="깃발을 가로 점선을 기준으로 아래쪽으로 뒤집음: 깃발이 위쪽에 있던 것이 아래쪽에 있음"/>
           <p:cNvSpPr/>
           <p:nvPr/>
         </p:nvSpPr>
@@ -17109,7 +17063,7 @@
       </p:sp>
       <p:sp>
         <p:nvSpPr>
-          <p:cNvPr id="54" name="S04-mark142"/>
+          <p:cNvPr id="54" name="S04-mark141"/>
           <p:cNvSpPr/>
           <p:nvPr/>
         </p:nvSpPr>
@@ -17159,7 +17113,7 @@
       </p:sp>
       <p:sp>
         <p:nvSpPr>
-          <p:cNvPr id="55" name="S04-mark143"/>
+          <p:cNvPr id="55" name="S04-mark142"/>
           <p:cNvSpPr/>
           <p:nvPr/>
         </p:nvSpPr>
@@ -17182,7 +17136,7 @@
       </p:sp>
       <p:sp>
         <p:nvSpPr>
-          <p:cNvPr id="56" name="S04-label144"/>
+          <p:cNvPr id="56" name="S04-label143"/>
           <p:cNvSpPr txBox="1"/>
           <p:nvPr/>
         </p:nvSpPr>
@@ -17335,7 +17289,7 @@
       </p:sp>
       <p:sp>
         <p:nvSpPr>
-          <p:cNvPr id="3" name="S05-card145"/>
+          <p:cNvPr id="3" name="S05-card144"/>
           <p:cNvSpPr/>
           <p:nvPr/>
         </p:nvSpPr>
@@ -17362,7 +17316,7 @@
       </p:sp>
       <p:sp>
         <p:nvSpPr>
-          <p:cNvPr id="4" name="S05-cardtext146"/>
+          <p:cNvPr id="4" name="S05-cardtext145"/>
           <p:cNvSpPr txBox="1"/>
           <p:nvPr/>
         </p:nvSpPr>
@@ -17404,7 +17358,7 @@
       </p:sp>
       <p:sp>
         <p:nvSpPr>
-          <p:cNvPr id="5" name="S05-chip147"/>
+          <p:cNvPr id="5" name="S05-chip146"/>
           <p:cNvSpPr txBox="1"/>
           <p:nvPr/>
         </p:nvSpPr>
@@ -17451,7 +17405,7 @@
       </p:sp>
       <p:sp>
         <p:nvSpPr>
-          <p:cNvPr id="6" name="S05-mark148"/>
+          <p:cNvPr id="6" name="S05-mark147"/>
           <p:cNvSpPr/>
           <p:nvPr/>
         </p:nvSpPr>
@@ -17498,7 +17452,7 @@
       </p:sp>
       <p:sp>
         <p:nvSpPr>
-          <p:cNvPr id="7" name="S05-mark149"/>
+          <p:cNvPr id="7" name="S05-mark148"/>
           <p:cNvSpPr/>
           <p:nvPr/>
         </p:nvSpPr>
@@ -17521,7 +17475,7 @@
       </p:sp>
       <p:sp>
         <p:nvSpPr>
-          <p:cNvPr id="8" name="S05-mark150"/>
+          <p:cNvPr id="8" name="S05-mark149"/>
           <p:cNvSpPr/>
           <p:nvPr/>
         </p:nvSpPr>
@@ -17544,7 +17498,7 @@
       </p:sp>
       <p:sp>
         <p:nvSpPr>
-          <p:cNvPr id="9" name="S05-mark151"/>
+          <p:cNvPr id="9" name="S05-mark150"/>
           <p:cNvSpPr/>
           <p:nvPr/>
         </p:nvSpPr>
@@ -17567,7 +17521,7 @@
       </p:sp>
       <p:sp>
         <p:nvSpPr>
-          <p:cNvPr id="10" name="S05-mark152"/>
+          <p:cNvPr id="10" name="S05-mark151"/>
           <p:cNvSpPr/>
           <p:nvPr/>
         </p:nvSpPr>
@@ -17590,7 +17544,7 @@
       </p:sp>
       <p:sp>
         <p:nvSpPr>
-          <p:cNvPr id="11" name="S05-mark153"/>
+          <p:cNvPr id="11" name="S05-mark152"/>
           <p:cNvSpPr/>
           <p:nvPr/>
         </p:nvSpPr>
@@ -17613,7 +17567,7 @@
       </p:sp>
       <p:sp>
         <p:nvSpPr>
-          <p:cNvPr id="12" name="S05-mark154"/>
+          <p:cNvPr id="12" name="S05-mark153"/>
           <p:cNvSpPr/>
           <p:nvPr/>
         </p:nvSpPr>
@@ -17636,7 +17590,7 @@
       </p:sp>
       <p:sp>
         <p:nvSpPr>
-          <p:cNvPr id="13" name="S05-mark155"/>
+          <p:cNvPr id="13" name="S05-mark154"/>
           <p:cNvSpPr/>
           <p:nvPr/>
         </p:nvSpPr>
@@ -17659,7 +17613,7 @@
       </p:sp>
       <p:sp>
         <p:nvSpPr>
-          <p:cNvPr id="14" name="S05-mark156"/>
+          <p:cNvPr id="14" name="S05-mark155"/>
           <p:cNvSpPr/>
           <p:nvPr/>
         </p:nvSpPr>
@@ -17682,7 +17636,7 @@
       </p:sp>
       <p:sp>
         <p:nvSpPr>
-          <p:cNvPr id="15" name="S05-figure157" descr="처음 깃발: 깃대는 위를 향하고 깃발은 위쪽에서 오른쪽을 향함"/>
+          <p:cNvPr id="15" name="S05-figure156" descr="처음 깃발: 깃대는 위를 향하고 깃발은 위쪽에서 오른쪽을 향함"/>
           <p:cNvSpPr/>
           <p:nvPr/>
         </p:nvSpPr>
@@ -17732,7 +17686,7 @@
       </p:sp>
       <p:sp>
         <p:nvSpPr>
-          <p:cNvPr id="16" name="S05-label158"/>
+          <p:cNvPr id="16" name="S05-label157"/>
           <p:cNvSpPr txBox="1"/>
           <p:nvPr/>
         </p:nvSpPr>
@@ -17771,7 +17725,7 @@
       </p:sp>
       <p:sp>
         <p:nvSpPr>
-          <p:cNvPr id="17" name="S05-chip159"/>
+          <p:cNvPr id="17" name="S05-chip158"/>
           <p:cNvSpPr txBox="1"/>
           <p:nvPr/>
         </p:nvSpPr>
@@ -17818,7 +17772,7 @@
       </p:sp>
       <p:sp>
         <p:nvSpPr>
-          <p:cNvPr id="18" name="S05-mark160"/>
+          <p:cNvPr id="18" name="S05-mark159"/>
           <p:cNvSpPr/>
           <p:nvPr/>
         </p:nvSpPr>
@@ -17865,7 +17819,7 @@
       </p:sp>
       <p:sp>
         <p:nvSpPr>
-          <p:cNvPr id="19" name="S05-mark161"/>
+          <p:cNvPr id="19" name="S05-mark160"/>
           <p:cNvSpPr/>
           <p:nvPr/>
         </p:nvSpPr>
@@ -17888,7 +17842,7 @@
       </p:sp>
       <p:sp>
         <p:nvSpPr>
-          <p:cNvPr id="20" name="S05-mark162"/>
+          <p:cNvPr id="20" name="S05-mark161"/>
           <p:cNvSpPr/>
           <p:nvPr/>
         </p:nvSpPr>
@@ -17911,7 +17865,7 @@
       </p:sp>
       <p:sp>
         <p:nvSpPr>
-          <p:cNvPr id="21" name="S05-mark163"/>
+          <p:cNvPr id="21" name="S05-mark162"/>
           <p:cNvSpPr/>
           <p:nvPr/>
         </p:nvSpPr>
@@ -17934,7 +17888,7 @@
       </p:sp>
       <p:sp>
         <p:nvSpPr>
-          <p:cNvPr id="22" name="S05-mark164"/>
+          <p:cNvPr id="22" name="S05-mark163"/>
           <p:cNvSpPr/>
           <p:nvPr/>
         </p:nvSpPr>
@@ -17957,7 +17911,7 @@
       </p:sp>
       <p:sp>
         <p:nvSpPr>
-          <p:cNvPr id="23" name="S05-mark165"/>
+          <p:cNvPr id="23" name="S05-mark164"/>
           <p:cNvSpPr/>
           <p:nvPr/>
         </p:nvSpPr>
@@ -17980,7 +17934,7 @@
       </p:sp>
       <p:sp>
         <p:nvSpPr>
-          <p:cNvPr id="24" name="S05-mark166"/>
+          <p:cNvPr id="24" name="S05-mark165"/>
           <p:cNvSpPr/>
           <p:nvPr/>
         </p:nvSpPr>
@@ -18003,7 +17957,7 @@
       </p:sp>
       <p:sp>
         <p:nvSpPr>
-          <p:cNvPr id="25" name="S05-mark167"/>
+          <p:cNvPr id="25" name="S05-mark166"/>
           <p:cNvSpPr/>
           <p:nvPr/>
         </p:nvSpPr>
@@ -18026,7 +17980,7 @@
       </p:sp>
       <p:sp>
         <p:nvSpPr>
-          <p:cNvPr id="26" name="S05-mark168"/>
+          <p:cNvPr id="26" name="S05-mark167"/>
           <p:cNvSpPr/>
           <p:nvPr/>
         </p:nvSpPr>
@@ -18049,7 +18003,7 @@
       </p:sp>
       <p:sp>
         <p:nvSpPr>
-          <p:cNvPr id="27" name="S05-figure169" descr="가: 깃발이 아래쪽에서 오른쪽을 향함(위·아래가 바뀜)"/>
+          <p:cNvPr id="27" name="S05-figure168" descr="가: 깃발이 아래쪽에서 오른쪽을 향함(위·아래가 바뀜)"/>
           <p:cNvSpPr/>
           <p:nvPr/>
         </p:nvSpPr>
@@ -18099,7 +18053,7 @@
       </p:sp>
       <p:sp>
         <p:nvSpPr>
-          <p:cNvPr id="28" name="S05-label170"/>
+          <p:cNvPr id="28" name="S05-label169"/>
           <p:cNvSpPr txBox="1"/>
           <p:nvPr/>
         </p:nvSpPr>
@@ -18138,7 +18092,7 @@
       </p:sp>
       <p:sp>
         <p:nvSpPr>
-          <p:cNvPr id="29" name="S05-chip171"/>
+          <p:cNvPr id="29" name="S05-chip170"/>
           <p:cNvSpPr txBox="1"/>
           <p:nvPr/>
         </p:nvSpPr>
@@ -18185,7 +18139,7 @@
       </p:sp>
       <p:sp>
         <p:nvSpPr>
-          <p:cNvPr id="30" name="S05-mark172"/>
+          <p:cNvPr id="30" name="S05-mark171"/>
           <p:cNvSpPr/>
           <p:nvPr/>
         </p:nvSpPr>
@@ -18232,7 +18186,7 @@
       </p:sp>
       <p:sp>
         <p:nvSpPr>
-          <p:cNvPr id="31" name="S05-mark173"/>
+          <p:cNvPr id="31" name="S05-mark172"/>
           <p:cNvSpPr/>
           <p:nvPr/>
         </p:nvSpPr>
@@ -18255,7 +18209,7 @@
       </p:sp>
       <p:sp>
         <p:nvSpPr>
-          <p:cNvPr id="32" name="S05-mark174"/>
+          <p:cNvPr id="32" name="S05-mark173"/>
           <p:cNvSpPr/>
           <p:nvPr/>
         </p:nvSpPr>
@@ -18278,7 +18232,7 @@
       </p:sp>
       <p:sp>
         <p:nvSpPr>
-          <p:cNvPr id="33" name="S05-mark175"/>
+          <p:cNvPr id="33" name="S05-mark174"/>
           <p:cNvSpPr/>
           <p:nvPr/>
         </p:nvSpPr>
@@ -18301,7 +18255,7 @@
       </p:sp>
       <p:sp>
         <p:nvSpPr>
-          <p:cNvPr id="34" name="S05-mark176"/>
+          <p:cNvPr id="34" name="S05-mark175"/>
           <p:cNvSpPr/>
           <p:nvPr/>
         </p:nvSpPr>
@@ -18324,7 +18278,7 @@
       </p:sp>
       <p:sp>
         <p:nvSpPr>
-          <p:cNvPr id="35" name="S05-mark177"/>
+          <p:cNvPr id="35" name="S05-mark176"/>
           <p:cNvSpPr/>
           <p:nvPr/>
         </p:nvSpPr>
@@ -18347,7 +18301,7 @@
       </p:sp>
       <p:sp>
         <p:nvSpPr>
-          <p:cNvPr id="36" name="S05-mark178"/>
+          <p:cNvPr id="36" name="S05-mark177"/>
           <p:cNvSpPr/>
           <p:nvPr/>
         </p:nvSpPr>
@@ -18370,7 +18324,7 @@
       </p:sp>
       <p:sp>
         <p:nvSpPr>
-          <p:cNvPr id="37" name="S05-mark179"/>
+          <p:cNvPr id="37" name="S05-mark178"/>
           <p:cNvSpPr/>
           <p:nvPr/>
         </p:nvSpPr>
@@ -18393,7 +18347,7 @@
       </p:sp>
       <p:sp>
         <p:nvSpPr>
-          <p:cNvPr id="38" name="S05-mark180"/>
+          <p:cNvPr id="38" name="S05-mark179"/>
           <p:cNvSpPr/>
           <p:nvPr/>
         </p:nvSpPr>
@@ -18416,7 +18370,7 @@
       </p:sp>
       <p:sp>
         <p:nvSpPr>
-          <p:cNvPr id="39" name="S05-figure181" descr="나: 깃발이 아래쪽에서 왼쪽을 향함(180° 돌림)"/>
+          <p:cNvPr id="39" name="S05-figure180" descr="나: 깃발이 아래쪽에서 왼쪽을 향함(180° 돌림)"/>
           <p:cNvSpPr/>
           <p:nvPr/>
         </p:nvSpPr>
@@ -18466,7 +18420,7 @@
       </p:sp>
       <p:sp>
         <p:nvSpPr>
-          <p:cNvPr id="40" name="S05-label182"/>
+          <p:cNvPr id="40" name="S05-label181"/>
           <p:cNvSpPr txBox="1"/>
           <p:nvPr/>
         </p:nvSpPr>
@@ -18505,7 +18459,7 @@
       </p:sp>
       <p:sp>
         <p:nvSpPr>
-          <p:cNvPr id="41" name="S05-chip183"/>
+          <p:cNvPr id="41" name="S05-chip182"/>
           <p:cNvSpPr txBox="1"/>
           <p:nvPr/>
         </p:nvSpPr>
@@ -18552,7 +18506,7 @@
       </p:sp>
       <p:sp>
         <p:nvSpPr>
-          <p:cNvPr id="42" name="S05-mark184"/>
+          <p:cNvPr id="42" name="S05-mark183"/>
           <p:cNvSpPr/>
           <p:nvPr/>
         </p:nvSpPr>
@@ -18599,7 +18553,7 @@
       </p:sp>
       <p:sp>
         <p:nvSpPr>
-          <p:cNvPr id="43" name="S05-mark185"/>
+          <p:cNvPr id="43" name="S05-mark184"/>
           <p:cNvSpPr/>
           <p:nvPr/>
         </p:nvSpPr>
@@ -18622,7 +18576,7 @@
       </p:sp>
       <p:sp>
         <p:nvSpPr>
-          <p:cNvPr id="44" name="S05-mark186"/>
+          <p:cNvPr id="44" name="S05-mark185"/>
           <p:cNvSpPr/>
           <p:nvPr/>
         </p:nvSpPr>
@@ -18645,7 +18599,7 @@
       </p:sp>
       <p:sp>
         <p:nvSpPr>
-          <p:cNvPr id="45" name="S05-mark187"/>
+          <p:cNvPr id="45" name="S05-mark186"/>
           <p:cNvSpPr/>
           <p:nvPr/>
         </p:nvSpPr>
@@ -18668,7 +18622,7 @@
       </p:sp>
       <p:sp>
         <p:nvSpPr>
-          <p:cNvPr id="46" name="S05-mark188"/>
+          <p:cNvPr id="46" name="S05-mark187"/>
           <p:cNvSpPr/>
           <p:nvPr/>
         </p:nvSpPr>
@@ -18691,7 +18645,7 @@
       </p:sp>
       <p:sp>
         <p:nvSpPr>
-          <p:cNvPr id="47" name="S05-mark189"/>
+          <p:cNvPr id="47" name="S05-mark188"/>
           <p:cNvSpPr/>
           <p:nvPr/>
         </p:nvSpPr>
@@ -18714,7 +18668,7 @@
       </p:sp>
       <p:sp>
         <p:nvSpPr>
-          <p:cNvPr id="48" name="S05-mark190"/>
+          <p:cNvPr id="48" name="S05-mark189"/>
           <p:cNvSpPr/>
           <p:nvPr/>
         </p:nvSpPr>
@@ -18737,7 +18691,7 @@
       </p:sp>
       <p:sp>
         <p:nvSpPr>
-          <p:cNvPr id="49" name="S05-mark191"/>
+          <p:cNvPr id="49" name="S05-mark190"/>
           <p:cNvSpPr/>
           <p:nvPr/>
         </p:nvSpPr>
@@ -18760,7 +18714,7 @@
       </p:sp>
       <p:sp>
         <p:nvSpPr>
-          <p:cNvPr id="50" name="S05-mark192"/>
+          <p:cNvPr id="50" name="S05-mark191"/>
           <p:cNvSpPr/>
           <p:nvPr/>
         </p:nvSpPr>
@@ -18783,7 +18737,7 @@
       </p:sp>
       <p:sp>
         <p:nvSpPr>
-          <p:cNvPr id="51" name="S05-figure193" descr="다: 깃발이 위쪽에서 왼쪽을 향함(왼쪽·오른쪽이 바뀜)"/>
+          <p:cNvPr id="51" name="S05-figure192" descr="다: 깃발이 위쪽에서 왼쪽을 향함(왼쪽·오른쪽이 바뀜)"/>
           <p:cNvSpPr/>
           <p:nvPr/>
         </p:nvSpPr>
@@ -18833,7 +18787,7 @@
       </p:sp>
       <p:sp>
         <p:nvSpPr>
-          <p:cNvPr id="52" name="S05-label194"/>
+          <p:cNvPr id="52" name="S05-label193"/>
           <p:cNvSpPr txBox="1"/>
           <p:nvPr/>
         </p:nvSpPr>
@@ -18986,7 +18940,7 @@
       </p:sp>
       <p:sp>
         <p:nvSpPr>
-          <p:cNvPr id="3" name="S06-card195"/>
+          <p:cNvPr id="3" name="S06-card194"/>
           <p:cNvSpPr/>
           <p:nvPr/>
         </p:nvSpPr>
@@ -19013,7 +18967,7 @@
       </p:sp>
       <p:sp>
         <p:nvSpPr>
-          <p:cNvPr id="4" name="S06-cardtext196"/>
+          <p:cNvPr id="4" name="S06-cardtext195"/>
           <p:cNvSpPr txBox="1"/>
           <p:nvPr/>
         </p:nvSpPr>
@@ -19055,7 +19009,7 @@
       </p:sp>
       <p:sp>
         <p:nvSpPr>
-          <p:cNvPr id="5" name="S06-card197"/>
+          <p:cNvPr id="5" name="S06-card196"/>
           <p:cNvSpPr/>
           <p:nvPr/>
         </p:nvSpPr>
@@ -19082,7 +19036,7 @@
       </p:sp>
       <p:sp>
         <p:nvSpPr>
-          <p:cNvPr id="6" name="S06-cardtext198"/>
+          <p:cNvPr id="6" name="S06-cardtext197"/>
           <p:cNvSpPr txBox="1"/>
           <p:nvPr/>
         </p:nvSpPr>
@@ -19124,7 +19078,7 @@
       </p:sp>
       <p:sp>
         <p:nvSpPr>
-          <p:cNvPr id="7" name="S06-chip199"/>
+          <p:cNvPr id="7" name="S06-chip198"/>
           <p:cNvSpPr txBox="1"/>
           <p:nvPr/>
         </p:nvSpPr>
@@ -19171,7 +19125,7 @@
       </p:sp>
       <p:sp>
         <p:nvSpPr>
-          <p:cNvPr id="8" name="S06-mark200"/>
+          <p:cNvPr id="8" name="S06-mark199"/>
           <p:cNvSpPr/>
           <p:nvPr/>
         </p:nvSpPr>
@@ -19218,7 +19172,7 @@
       </p:sp>
       <p:sp>
         <p:nvSpPr>
-          <p:cNvPr id="9" name="S06-mark201"/>
+          <p:cNvPr id="9" name="S06-mark200"/>
           <p:cNvSpPr/>
           <p:nvPr/>
         </p:nvSpPr>
@@ -19241,7 +19195,7 @@
       </p:sp>
       <p:sp>
         <p:nvSpPr>
-          <p:cNvPr id="10" name="S06-mark202"/>
+          <p:cNvPr id="10" name="S06-mark201"/>
           <p:cNvSpPr/>
           <p:nvPr/>
         </p:nvSpPr>
@@ -19264,7 +19218,7 @@
       </p:sp>
       <p:sp>
         <p:nvSpPr>
-          <p:cNvPr id="11" name="S06-mark203"/>
+          <p:cNvPr id="11" name="S06-mark202"/>
           <p:cNvSpPr/>
           <p:nvPr/>
         </p:nvSpPr>
@@ -19287,7 +19241,7 @@
       </p:sp>
       <p:sp>
         <p:nvSpPr>
-          <p:cNvPr id="12" name="S06-mark204"/>
+          <p:cNvPr id="12" name="S06-mark203"/>
           <p:cNvSpPr/>
           <p:nvPr/>
         </p:nvSpPr>
@@ -19310,7 +19264,7 @@
       </p:sp>
       <p:sp>
         <p:nvSpPr>
-          <p:cNvPr id="13" name="S06-mark205"/>
+          <p:cNvPr id="13" name="S06-mark204"/>
           <p:cNvSpPr/>
           <p:nvPr/>
         </p:nvSpPr>
@@ -19333,7 +19287,7 @@
       </p:sp>
       <p:sp>
         <p:nvSpPr>
-          <p:cNvPr id="14" name="S06-mark206"/>
+          <p:cNvPr id="14" name="S06-mark205"/>
           <p:cNvSpPr/>
           <p:nvPr/>
         </p:nvSpPr>
@@ -19356,7 +19310,7 @@
       </p:sp>
       <p:sp>
         <p:nvSpPr>
-          <p:cNvPr id="15" name="S06-mark207"/>
+          <p:cNvPr id="15" name="S06-mark206"/>
           <p:cNvSpPr/>
           <p:nvPr/>
         </p:nvSpPr>
@@ -19379,7 +19333,7 @@
       </p:sp>
       <p:sp>
         <p:nvSpPr>
-          <p:cNvPr id="16" name="S06-mark208"/>
+          <p:cNvPr id="16" name="S06-mark207"/>
           <p:cNvSpPr/>
           <p:nvPr/>
         </p:nvSpPr>
@@ -19402,7 +19356,7 @@
       </p:sp>
       <p:sp>
         <p:nvSpPr>
-          <p:cNvPr id="17" name="S06-figure209" descr="토끼의 답: 깃발이 위쪽에서 왼쪽을 향함"/>
+          <p:cNvPr id="17" name="S06-figure208" descr="토끼의 답: 깃발이 위쪽에서 왼쪽을 향함"/>
           <p:cNvSpPr/>
           <p:nvPr/>
         </p:nvSpPr>
@@ -19452,7 +19406,7 @@
       </p:sp>
       <p:sp>
         <p:nvSpPr>
-          <p:cNvPr id="18" name="S06-text210"/>
+          <p:cNvPr id="18" name="S06-text209"/>
           <p:cNvSpPr txBox="1"/>
           <p:nvPr/>
         </p:nvSpPr>
@@ -19491,7 +19445,7 @@
       </p:sp>
       <p:sp>
         <p:nvSpPr>
-          <p:cNvPr id="19" name="S06-chip211"/>
+          <p:cNvPr id="19" name="S06-chip210"/>
           <p:cNvSpPr txBox="1"/>
           <p:nvPr/>
         </p:nvSpPr>
@@ -19538,7 +19492,7 @@
       </p:sp>
       <p:sp>
         <p:nvSpPr>
-          <p:cNvPr id="20" name="S06-mark212"/>
+          <p:cNvPr id="20" name="S06-mark211"/>
           <p:cNvSpPr/>
           <p:nvPr/>
         </p:nvSpPr>
@@ -19585,7 +19539,7 @@
       </p:sp>
       <p:sp>
         <p:nvSpPr>
-          <p:cNvPr id="21" name="S06-mark213"/>
+          <p:cNvPr id="21" name="S06-mark212"/>
           <p:cNvSpPr/>
           <p:nvPr/>
         </p:nvSpPr>
@@ -19608,7 +19562,7 @@
       </p:sp>
       <p:sp>
         <p:nvSpPr>
-          <p:cNvPr id="22" name="S06-mark214"/>
+          <p:cNvPr id="22" name="S06-mark213"/>
           <p:cNvSpPr/>
           <p:nvPr/>
         </p:nvSpPr>
@@ -19631,7 +19585,7 @@
       </p:sp>
       <p:sp>
         <p:nvSpPr>
-          <p:cNvPr id="23" name="S06-mark215"/>
+          <p:cNvPr id="23" name="S06-mark214"/>
           <p:cNvSpPr/>
           <p:nvPr/>
         </p:nvSpPr>
@@ -19654,7 +19608,7 @@
       </p:sp>
       <p:sp>
         <p:nvSpPr>
-          <p:cNvPr id="24" name="S06-mark216"/>
+          <p:cNvPr id="24" name="S06-mark215"/>
           <p:cNvSpPr/>
           <p:nvPr/>
         </p:nvSpPr>
@@ -19677,7 +19631,7 @@
       </p:sp>
       <p:sp>
         <p:nvSpPr>
-          <p:cNvPr id="25" name="S06-mark217"/>
+          <p:cNvPr id="25" name="S06-mark216"/>
           <p:cNvSpPr/>
           <p:nvPr/>
         </p:nvSpPr>
@@ -19700,7 +19654,7 @@
       </p:sp>
       <p:sp>
         <p:nvSpPr>
-          <p:cNvPr id="26" name="S06-mark218"/>
+          <p:cNvPr id="26" name="S06-mark217"/>
           <p:cNvSpPr/>
           <p:nvPr/>
         </p:nvSpPr>
@@ -19723,7 +19677,7 @@
       </p:sp>
       <p:sp>
         <p:nvSpPr>
-          <p:cNvPr id="27" name="S06-mark219"/>
+          <p:cNvPr id="27" name="S06-mark218"/>
           <p:cNvSpPr/>
           <p:nvPr/>
         </p:nvSpPr>
@@ -19746,7 +19700,7 @@
       </p:sp>
       <p:sp>
         <p:nvSpPr>
-          <p:cNvPr id="28" name="S06-mark220"/>
+          <p:cNvPr id="28" name="S06-mark219"/>
           <p:cNvSpPr/>
           <p:nvPr/>
         </p:nvSpPr>
@@ -19769,7 +19723,7 @@
       </p:sp>
       <p:sp>
         <p:nvSpPr>
-          <p:cNvPr id="29" name="S06-figure221" descr="곰의 답: 깃발이 아래쪽에서 오른쪽을 향함"/>
+          <p:cNvPr id="29" name="S06-figure220" descr="곰의 답: 깃발이 아래쪽에서 오른쪽을 향함"/>
           <p:cNvSpPr/>
           <p:nvPr/>
         </p:nvSpPr>
@@ -19819,7 +19773,7 @@
       </p:sp>
       <p:sp>
         <p:nvSpPr>
-          <p:cNvPr id="30" name="S06-text222"/>
+          <p:cNvPr id="30" name="S06-text221"/>
           <p:cNvSpPr txBox="1"/>
           <p:nvPr/>
         </p:nvSpPr>
@@ -19972,7 +19926,7 @@
       </p:sp>
       <p:sp>
         <p:nvSpPr>
-          <p:cNvPr id="3" name="S07-text223"/>
+          <p:cNvPr id="3" name="S07-text222"/>
           <p:cNvSpPr txBox="1"/>
           <p:nvPr/>
         </p:nvSpPr>
@@ -20011,14 +19965,14 @@
       </p:sp>
       <p:sp>
         <p:nvSpPr>
-          <p:cNvPr id="4" name="S07-mark224"/>
-          <p:cNvSpPr/>
-          <p:nvPr/>
-        </p:nvSpPr>
-        <p:spPr>
-          <a:xfrm>
-            <a:off x="2535174" y="3072384"/>
-            <a:ext cx="1042416" cy="1042416"/>
+          <p:cNvPr id="4" name="S07-mark223"/>
+          <p:cNvSpPr/>
+          <p:nvPr/>
+        </p:nvSpPr>
+        <p:spPr>
+          <a:xfrm>
+            <a:off x="2578608" y="2811780"/>
+            <a:ext cx="1303020" cy="1303020"/>
           </a:xfrm>
           <a:custGeom>
             <a:avLst/>
@@ -20027,21 +19981,21 @@
             <a:cxnLst/>
             <a:rect l="l" t="t" r="r" b="b"/>
             <a:pathLst>
-              <a:path w="1042416" h="1042416">
+              <a:path w="1303020" h="1303020">
                 <a:moveTo>
-                  <a:pt x="0" y="1042416"/>
+                  <a:pt x="0" y="1303020"/>
                 </a:moveTo>
                 <a:lnTo>
-                  <a:pt x="347472" y="1042416"/>
-                </a:lnTo>
-                <a:lnTo>
-                  <a:pt x="347472" y="694944"/>
-                </a:lnTo>
-                <a:lnTo>
-                  <a:pt x="1042416" y="347472"/>
-                </a:lnTo>
-                <a:lnTo>
-                  <a:pt x="347472" y="0"/>
+                  <a:pt x="434340" y="1303020"/>
+                </a:lnTo>
+                <a:lnTo>
+                  <a:pt x="434340" y="868680"/>
+                </a:lnTo>
+                <a:lnTo>
+                  <a:pt x="1303020" y="434340"/>
+                </a:lnTo>
+                <a:lnTo>
+                  <a:pt x="434340" y="0"/>
                 </a:lnTo>
                 <a:lnTo>
                   <a:pt x="0" y="0"/>
@@ -20058,14 +20012,14 @@
       </p:sp>
       <p:sp>
         <p:nvSpPr>
-          <p:cNvPr id="5" name="S07-mark225"/>
-          <p:cNvSpPr/>
-          <p:nvPr/>
-        </p:nvSpPr>
-        <p:spPr>
-          <a:xfrm>
-            <a:off x="2535174" y="4114800"/>
-            <a:ext cx="1042416" cy="1042416"/>
+          <p:cNvPr id="5" name="S07-mark224"/>
+          <p:cNvSpPr/>
+          <p:nvPr/>
+        </p:nvSpPr>
+        <p:spPr>
+          <a:xfrm>
+            <a:off x="2578608" y="4114800"/>
+            <a:ext cx="1303020" cy="1303020"/>
           </a:xfrm>
           <a:custGeom>
             <a:avLst/>
@@ -20074,24 +20028,24 @@
             <a:cxnLst/>
             <a:rect l="l" t="t" r="r" b="b"/>
             <a:pathLst>
-              <a:path w="1042416" h="1042416">
+              <a:path w="1303020" h="1303020">
                 <a:moveTo>
                   <a:pt x="0" y="0"/>
                 </a:moveTo>
                 <a:lnTo>
-                  <a:pt x="0" y="347472"/>
-                </a:lnTo>
-                <a:lnTo>
-                  <a:pt x="347472" y="347472"/>
-                </a:lnTo>
-                <a:lnTo>
-                  <a:pt x="694944" y="1042416"/>
-                </a:lnTo>
-                <a:lnTo>
-                  <a:pt x="1042416" y="347472"/>
-                </a:lnTo>
-                <a:lnTo>
-                  <a:pt x="1042416" y="0"/>
+                  <a:pt x="0" y="434340"/>
+                </a:lnTo>
+                <a:lnTo>
+                  <a:pt x="434340" y="434340"/>
+                </a:lnTo>
+                <a:lnTo>
+                  <a:pt x="868680" y="1303020"/>
+                </a:lnTo>
+                <a:lnTo>
+                  <a:pt x="1303020" y="434340"/>
+                </a:lnTo>
+                <a:lnTo>
+                  <a:pt x="1303020" y="0"/>
                 </a:lnTo>
                 <a:close/>
               </a:path>
@@ -20105,13 +20059,13 @@
       </p:sp>
       <p:sp>
         <p:nvSpPr>
-          <p:cNvPr id="6" name="S07-mark226"/>
+          <p:cNvPr id="6" name="S07-mark225"/>
           <p:cNvSpPr/>
           <p:nvPr/>
         </p:nvSpPr>
         <p:spPr>
           <a:xfrm flipV="1">
-            <a:off x="2187702" y="2377440"/>
+            <a:off x="2144268" y="2377440"/>
             <a:ext cx="0" cy="3474720"/>
           </a:xfrm>
           <a:prstGeom prst="line">
@@ -20128,13 +20082,13 @@
       </p:sp>
       <p:sp>
         <p:nvSpPr>
-          <p:cNvPr id="7" name="S07-mark227"/>
+          <p:cNvPr id="7" name="S07-mark226"/>
           <p:cNvSpPr/>
           <p:nvPr/>
         </p:nvSpPr>
         <p:spPr>
           <a:xfrm flipV="1">
-            <a:off x="2535174" y="2377440"/>
+            <a:off x="2578608" y="2377440"/>
             <a:ext cx="0" cy="3474720"/>
           </a:xfrm>
           <a:prstGeom prst="line">
@@ -20151,13 +20105,13 @@
       </p:sp>
       <p:sp>
         <p:nvSpPr>
-          <p:cNvPr id="8" name="S07-mark228"/>
+          <p:cNvPr id="8" name="S07-mark227"/>
           <p:cNvSpPr/>
           <p:nvPr/>
         </p:nvSpPr>
         <p:spPr>
           <a:xfrm flipV="1">
-            <a:off x="2882646" y="2377440"/>
+            <a:off x="3012948" y="2377440"/>
             <a:ext cx="0" cy="3474720"/>
           </a:xfrm>
           <a:prstGeom prst="line">
@@ -20174,13 +20128,13 @@
       </p:sp>
       <p:sp>
         <p:nvSpPr>
-          <p:cNvPr id="9" name="S07-mark229"/>
+          <p:cNvPr id="9" name="S07-mark228"/>
           <p:cNvSpPr/>
           <p:nvPr/>
         </p:nvSpPr>
         <p:spPr>
           <a:xfrm flipV="1">
-            <a:off x="3230118" y="2377440"/>
+            <a:off x="3447288" y="2377440"/>
             <a:ext cx="0" cy="3474720"/>
           </a:xfrm>
           <a:prstGeom prst="line">
@@ -20197,13 +20151,13 @@
       </p:sp>
       <p:sp>
         <p:nvSpPr>
-          <p:cNvPr id="10" name="S07-mark230"/>
+          <p:cNvPr id="10" name="S07-mark229"/>
           <p:cNvSpPr/>
           <p:nvPr/>
         </p:nvSpPr>
         <p:spPr>
           <a:xfrm flipV="1">
-            <a:off x="3577590" y="2377440"/>
+            <a:off x="3881628" y="2377440"/>
             <a:ext cx="0" cy="3474720"/>
           </a:xfrm>
           <a:prstGeom prst="line">
@@ -20220,13 +20174,13 @@
       </p:sp>
       <p:sp>
         <p:nvSpPr>
-          <p:cNvPr id="11" name="S07-mark231"/>
+          <p:cNvPr id="11" name="S07-mark230"/>
           <p:cNvSpPr/>
           <p:nvPr/>
         </p:nvSpPr>
         <p:spPr>
           <a:xfrm flipV="1">
-            <a:off x="3925062" y="2377440"/>
+            <a:off x="4315968" y="2377440"/>
             <a:ext cx="0" cy="3474720"/>
           </a:xfrm>
           <a:prstGeom prst="line">
@@ -20243,290 +20197,221 @@
       </p:sp>
       <p:sp>
         <p:nvSpPr>
-          <p:cNvPr id="12" name="S07-mark232"/>
-          <p:cNvSpPr/>
-          <p:nvPr/>
-        </p:nvSpPr>
-        <p:spPr>
-          <a:xfrm flipV="1">
-            <a:off x="4272534" y="2377440"/>
-            <a:ext cx="0" cy="3474720"/>
-          </a:xfrm>
-          <a:prstGeom prst="line">
-            <a:avLst/>
-          </a:prstGeom>
-          <a:noFill/>
-          <a:ln w="9525">
-            <a:solidFill>
-              <a:srgbClr val="B8C2CC"/>
-            </a:solidFill>
-            <a:prstDash val="solid"/>
-          </a:ln>
-        </p:spPr>
-      </p:sp>
-      <p:sp>
-        <p:nvSpPr>
-          <p:cNvPr id="13" name="S07-mark233"/>
-          <p:cNvSpPr/>
-          <p:nvPr/>
-        </p:nvSpPr>
-        <p:spPr>
-          <a:xfrm>
-            <a:off x="2187702" y="5852160"/>
-            <a:ext cx="2084832" cy="0"/>
-          </a:xfrm>
-          <a:prstGeom prst="line">
-            <a:avLst/>
-          </a:prstGeom>
-          <a:noFill/>
-          <a:ln w="9525">
-            <a:solidFill>
-              <a:srgbClr val="B8C2CC"/>
-            </a:solidFill>
-            <a:prstDash val="solid"/>
-          </a:ln>
-        </p:spPr>
-      </p:sp>
-      <p:sp>
-        <p:nvSpPr>
-          <p:cNvPr id="14" name="S07-mark234"/>
-          <p:cNvSpPr/>
-          <p:nvPr/>
-        </p:nvSpPr>
-        <p:spPr>
-          <a:xfrm>
-            <a:off x="2187702" y="5504688"/>
-            <a:ext cx="2084832" cy="0"/>
-          </a:xfrm>
-          <a:prstGeom prst="line">
-            <a:avLst/>
-          </a:prstGeom>
-          <a:noFill/>
-          <a:ln w="9525">
-            <a:solidFill>
-              <a:srgbClr val="B8C2CC"/>
-            </a:solidFill>
-            <a:prstDash val="solid"/>
-          </a:ln>
-        </p:spPr>
-      </p:sp>
-      <p:sp>
-        <p:nvSpPr>
-          <p:cNvPr id="15" name="S07-mark235"/>
-          <p:cNvSpPr/>
-          <p:nvPr/>
-        </p:nvSpPr>
-        <p:spPr>
-          <a:xfrm>
-            <a:off x="2187702" y="5157216"/>
-            <a:ext cx="2084832" cy="0"/>
-          </a:xfrm>
-          <a:prstGeom prst="line">
-            <a:avLst/>
-          </a:prstGeom>
-          <a:noFill/>
-          <a:ln w="9525">
-            <a:solidFill>
-              <a:srgbClr val="B8C2CC"/>
-            </a:solidFill>
-            <a:prstDash val="solid"/>
-          </a:ln>
-        </p:spPr>
-      </p:sp>
-      <p:sp>
-        <p:nvSpPr>
-          <p:cNvPr id="16" name="S07-mark236"/>
-          <p:cNvSpPr/>
-          <p:nvPr/>
-        </p:nvSpPr>
-        <p:spPr>
-          <a:xfrm>
-            <a:off x="2187702" y="4809744"/>
-            <a:ext cx="2084832" cy="0"/>
-          </a:xfrm>
-          <a:prstGeom prst="line">
-            <a:avLst/>
-          </a:prstGeom>
-          <a:noFill/>
-          <a:ln w="9525">
-            <a:solidFill>
-              <a:srgbClr val="B8C2CC"/>
-            </a:solidFill>
-            <a:prstDash val="solid"/>
-          </a:ln>
-        </p:spPr>
-      </p:sp>
-      <p:sp>
-        <p:nvSpPr>
-          <p:cNvPr id="17" name="S07-mark237"/>
-          <p:cNvSpPr/>
-          <p:nvPr/>
-        </p:nvSpPr>
-        <p:spPr>
-          <a:xfrm>
-            <a:off x="2187702" y="4462272"/>
-            <a:ext cx="2084832" cy="0"/>
-          </a:xfrm>
-          <a:prstGeom prst="line">
-            <a:avLst/>
-          </a:prstGeom>
-          <a:noFill/>
-          <a:ln w="9525">
-            <a:solidFill>
-              <a:srgbClr val="B8C2CC"/>
-            </a:solidFill>
-            <a:prstDash val="solid"/>
-          </a:ln>
-        </p:spPr>
-      </p:sp>
-      <p:sp>
-        <p:nvSpPr>
-          <p:cNvPr id="18" name="S07-mark238"/>
-          <p:cNvSpPr/>
-          <p:nvPr/>
-        </p:nvSpPr>
-        <p:spPr>
-          <a:xfrm>
-            <a:off x="2187702" y="4114800"/>
-            <a:ext cx="2084832" cy="0"/>
-          </a:xfrm>
-          <a:prstGeom prst="line">
-            <a:avLst/>
-          </a:prstGeom>
-          <a:noFill/>
-          <a:ln w="9525">
-            <a:solidFill>
-              <a:srgbClr val="B8C2CC"/>
-            </a:solidFill>
-            <a:prstDash val="solid"/>
-          </a:ln>
-        </p:spPr>
-      </p:sp>
-      <p:sp>
-        <p:nvSpPr>
-          <p:cNvPr id="19" name="S07-mark239"/>
-          <p:cNvSpPr/>
-          <p:nvPr/>
-        </p:nvSpPr>
-        <p:spPr>
-          <a:xfrm>
-            <a:off x="2187702" y="3767328"/>
-            <a:ext cx="2084832" cy="0"/>
-          </a:xfrm>
-          <a:prstGeom prst="line">
-            <a:avLst/>
-          </a:prstGeom>
-          <a:noFill/>
-          <a:ln w="9525">
-            <a:solidFill>
-              <a:srgbClr val="B8C2CC"/>
-            </a:solidFill>
-            <a:prstDash val="solid"/>
-          </a:ln>
-        </p:spPr>
-      </p:sp>
-      <p:sp>
-        <p:nvSpPr>
-          <p:cNvPr id="20" name="S07-mark240"/>
-          <p:cNvSpPr/>
-          <p:nvPr/>
-        </p:nvSpPr>
-        <p:spPr>
-          <a:xfrm>
-            <a:off x="2187702" y="3419856"/>
-            <a:ext cx="2084832" cy="0"/>
-          </a:xfrm>
-          <a:prstGeom prst="line">
-            <a:avLst/>
-          </a:prstGeom>
-          <a:noFill/>
-          <a:ln w="9525">
-            <a:solidFill>
-              <a:srgbClr val="B8C2CC"/>
-            </a:solidFill>
-            <a:prstDash val="solid"/>
-          </a:ln>
-        </p:spPr>
-      </p:sp>
-      <p:sp>
-        <p:nvSpPr>
-          <p:cNvPr id="21" name="S07-mark241"/>
-          <p:cNvSpPr/>
-          <p:nvPr/>
-        </p:nvSpPr>
-        <p:spPr>
-          <a:xfrm>
-            <a:off x="2187702" y="3072384"/>
-            <a:ext cx="2084832" cy="0"/>
-          </a:xfrm>
-          <a:prstGeom prst="line">
-            <a:avLst/>
-          </a:prstGeom>
-          <a:noFill/>
-          <a:ln w="9525">
-            <a:solidFill>
-              <a:srgbClr val="B8C2CC"/>
-            </a:solidFill>
-            <a:prstDash val="solid"/>
-          </a:ln>
-        </p:spPr>
-      </p:sp>
-      <p:sp>
-        <p:nvSpPr>
-          <p:cNvPr id="22" name="S07-mark242"/>
-          <p:cNvSpPr/>
-          <p:nvPr/>
-        </p:nvSpPr>
-        <p:spPr>
-          <a:xfrm>
-            <a:off x="2187702" y="2724912"/>
-            <a:ext cx="2084832" cy="0"/>
-          </a:xfrm>
-          <a:prstGeom prst="line">
-            <a:avLst/>
-          </a:prstGeom>
-          <a:noFill/>
-          <a:ln w="9525">
-            <a:solidFill>
-              <a:srgbClr val="B8C2CC"/>
-            </a:solidFill>
-            <a:prstDash val="solid"/>
-          </a:ln>
-        </p:spPr>
-      </p:sp>
-      <p:sp>
-        <p:nvSpPr>
-          <p:cNvPr id="23" name="S07-mark243"/>
-          <p:cNvSpPr/>
-          <p:nvPr/>
-        </p:nvSpPr>
-        <p:spPr>
-          <a:xfrm>
-            <a:off x="2187702" y="2377440"/>
-            <a:ext cx="2084832" cy="0"/>
-          </a:xfrm>
-          <a:prstGeom prst="line">
-            <a:avLst/>
-          </a:prstGeom>
-          <a:noFill/>
-          <a:ln w="9525">
-            <a:solidFill>
-              <a:srgbClr val="B8C2CC"/>
-            </a:solidFill>
-            <a:prstDash val="solid"/>
-          </a:ln>
-        </p:spPr>
-      </p:sp>
-      <p:sp>
-        <p:nvSpPr>
-          <p:cNvPr id="24" name="S07-figure244" descr="점 ㄱ을 중심으로 깃발을 시계 방향으로 90° 돌림: 위쪽을 향하던 깃대가 오른쪽을 향하고, 깃발이 아래쪽을 가리킴"/>
-          <p:cNvSpPr/>
-          <p:nvPr/>
-        </p:nvSpPr>
-        <p:spPr>
-          <a:xfrm>
-            <a:off x="2535174" y="3072384"/>
-            <a:ext cx="1042416" cy="1042416"/>
+          <p:cNvPr id="12" name="S07-mark231"/>
+          <p:cNvSpPr/>
+          <p:nvPr/>
+        </p:nvSpPr>
+        <p:spPr>
+          <a:xfrm>
+            <a:off x="2144268" y="5852160"/>
+            <a:ext cx="2171700" cy="0"/>
+          </a:xfrm>
+          <a:prstGeom prst="line">
+            <a:avLst/>
+          </a:prstGeom>
+          <a:noFill/>
+          <a:ln w="9525">
+            <a:solidFill>
+              <a:srgbClr val="B8C2CC"/>
+            </a:solidFill>
+            <a:prstDash val="solid"/>
+          </a:ln>
+        </p:spPr>
+      </p:sp>
+      <p:sp>
+        <p:nvSpPr>
+          <p:cNvPr id="13" name="S07-mark232"/>
+          <p:cNvSpPr/>
+          <p:nvPr/>
+        </p:nvSpPr>
+        <p:spPr>
+          <a:xfrm>
+            <a:off x="2144268" y="5417820"/>
+            <a:ext cx="2171700" cy="0"/>
+          </a:xfrm>
+          <a:prstGeom prst="line">
+            <a:avLst/>
+          </a:prstGeom>
+          <a:noFill/>
+          <a:ln w="9525">
+            <a:solidFill>
+              <a:srgbClr val="B8C2CC"/>
+            </a:solidFill>
+            <a:prstDash val="solid"/>
+          </a:ln>
+        </p:spPr>
+      </p:sp>
+      <p:sp>
+        <p:nvSpPr>
+          <p:cNvPr id="14" name="S07-mark233"/>
+          <p:cNvSpPr/>
+          <p:nvPr/>
+        </p:nvSpPr>
+        <p:spPr>
+          <a:xfrm>
+            <a:off x="2144268" y="4983480"/>
+            <a:ext cx="2171700" cy="0"/>
+          </a:xfrm>
+          <a:prstGeom prst="line">
+            <a:avLst/>
+          </a:prstGeom>
+          <a:noFill/>
+          <a:ln w="9525">
+            <a:solidFill>
+              <a:srgbClr val="B8C2CC"/>
+            </a:solidFill>
+            <a:prstDash val="solid"/>
+          </a:ln>
+        </p:spPr>
+      </p:sp>
+      <p:sp>
+        <p:nvSpPr>
+          <p:cNvPr id="15" name="S07-mark234"/>
+          <p:cNvSpPr/>
+          <p:nvPr/>
+        </p:nvSpPr>
+        <p:spPr>
+          <a:xfrm>
+            <a:off x="2144268" y="4549140"/>
+            <a:ext cx="2171700" cy="0"/>
+          </a:xfrm>
+          <a:prstGeom prst="line">
+            <a:avLst/>
+          </a:prstGeom>
+          <a:noFill/>
+          <a:ln w="9525">
+            <a:solidFill>
+              <a:srgbClr val="B8C2CC"/>
+            </a:solidFill>
+            <a:prstDash val="solid"/>
+          </a:ln>
+        </p:spPr>
+      </p:sp>
+      <p:sp>
+        <p:nvSpPr>
+          <p:cNvPr id="16" name="S07-mark235"/>
+          <p:cNvSpPr/>
+          <p:nvPr/>
+        </p:nvSpPr>
+        <p:spPr>
+          <a:xfrm>
+            <a:off x="2144268" y="4114800"/>
+            <a:ext cx="2171700" cy="0"/>
+          </a:xfrm>
+          <a:prstGeom prst="line">
+            <a:avLst/>
+          </a:prstGeom>
+          <a:noFill/>
+          <a:ln w="9525">
+            <a:solidFill>
+              <a:srgbClr val="B8C2CC"/>
+            </a:solidFill>
+            <a:prstDash val="solid"/>
+          </a:ln>
+        </p:spPr>
+      </p:sp>
+      <p:sp>
+        <p:nvSpPr>
+          <p:cNvPr id="17" name="S07-mark236"/>
+          <p:cNvSpPr/>
+          <p:nvPr/>
+        </p:nvSpPr>
+        <p:spPr>
+          <a:xfrm>
+            <a:off x="2144268" y="3680460"/>
+            <a:ext cx="2171700" cy="0"/>
+          </a:xfrm>
+          <a:prstGeom prst="line">
+            <a:avLst/>
+          </a:prstGeom>
+          <a:noFill/>
+          <a:ln w="9525">
+            <a:solidFill>
+              <a:srgbClr val="B8C2CC"/>
+            </a:solidFill>
+            <a:prstDash val="solid"/>
+          </a:ln>
+        </p:spPr>
+      </p:sp>
+      <p:sp>
+        <p:nvSpPr>
+          <p:cNvPr id="18" name="S07-mark237"/>
+          <p:cNvSpPr/>
+          <p:nvPr/>
+        </p:nvSpPr>
+        <p:spPr>
+          <a:xfrm>
+            <a:off x="2144268" y="3246120"/>
+            <a:ext cx="2171700" cy="0"/>
+          </a:xfrm>
+          <a:prstGeom prst="line">
+            <a:avLst/>
+          </a:prstGeom>
+          <a:noFill/>
+          <a:ln w="9525">
+            <a:solidFill>
+              <a:srgbClr val="B8C2CC"/>
+            </a:solidFill>
+            <a:prstDash val="solid"/>
+          </a:ln>
+        </p:spPr>
+      </p:sp>
+      <p:sp>
+        <p:nvSpPr>
+          <p:cNvPr id="19" name="S07-mark238"/>
+          <p:cNvSpPr/>
+          <p:nvPr/>
+        </p:nvSpPr>
+        <p:spPr>
+          <a:xfrm>
+            <a:off x="2144268" y="2811780"/>
+            <a:ext cx="2171700" cy="0"/>
+          </a:xfrm>
+          <a:prstGeom prst="line">
+            <a:avLst/>
+          </a:prstGeom>
+          <a:noFill/>
+          <a:ln w="9525">
+            <a:solidFill>
+              <a:srgbClr val="B8C2CC"/>
+            </a:solidFill>
+            <a:prstDash val="solid"/>
+          </a:ln>
+        </p:spPr>
+      </p:sp>
+      <p:sp>
+        <p:nvSpPr>
+          <p:cNvPr id="20" name="S07-mark239"/>
+          <p:cNvSpPr/>
+          <p:nvPr/>
+        </p:nvSpPr>
+        <p:spPr>
+          <a:xfrm>
+            <a:off x="2144268" y="2377440"/>
+            <a:ext cx="2171700" cy="0"/>
+          </a:xfrm>
+          <a:prstGeom prst="line">
+            <a:avLst/>
+          </a:prstGeom>
+          <a:noFill/>
+          <a:ln w="9525">
+            <a:solidFill>
+              <a:srgbClr val="B8C2CC"/>
+            </a:solidFill>
+            <a:prstDash val="solid"/>
+          </a:ln>
+        </p:spPr>
+      </p:sp>
+      <p:sp>
+        <p:nvSpPr>
+          <p:cNvPr id="21" name="S07-figure240" descr="점 ㄱ을 중심으로 깃발을 시계 방향으로 90° 돌림: 위쪽을 향하던 깃대가 오른쪽을 향하고, 깃발이 아래쪽을 가리킴"/>
+          <p:cNvSpPr/>
+          <p:nvPr/>
+        </p:nvSpPr>
+        <p:spPr>
+          <a:xfrm>
+            <a:off x="2578608" y="2811780"/>
+            <a:ext cx="1303020" cy="1303020"/>
           </a:xfrm>
           <a:custGeom>
             <a:avLst/>
@@ -20535,21 +20420,21 @@
             <a:cxnLst/>
             <a:rect l="l" t="t" r="r" b="b"/>
             <a:pathLst>
-              <a:path w="1042416" h="1042416">
+              <a:path w="1303020" h="1303020">
                 <a:moveTo>
-                  <a:pt x="0" y="1042416"/>
+                  <a:pt x="0" y="1303020"/>
                 </a:moveTo>
                 <a:lnTo>
-                  <a:pt x="347472" y="1042416"/>
-                </a:lnTo>
-                <a:lnTo>
-                  <a:pt x="347472" y="694944"/>
-                </a:lnTo>
-                <a:lnTo>
-                  <a:pt x="1042416" y="347472"/>
-                </a:lnTo>
-                <a:lnTo>
-                  <a:pt x="347472" y="0"/>
+                  <a:pt x="434340" y="1303020"/>
+                </a:lnTo>
+                <a:lnTo>
+                  <a:pt x="434340" y="868680"/>
+                </a:lnTo>
+                <a:lnTo>
+                  <a:pt x="1303020" y="434340"/>
+                </a:lnTo>
+                <a:lnTo>
+                  <a:pt x="434340" y="0"/>
                 </a:lnTo>
                 <a:lnTo>
                   <a:pt x="0" y="0"/>
@@ -20569,14 +20454,14 @@
       </p:sp>
       <p:sp>
         <p:nvSpPr>
-          <p:cNvPr id="25" name="S07-mark245"/>
-          <p:cNvSpPr/>
-          <p:nvPr/>
-        </p:nvSpPr>
-        <p:spPr>
-          <a:xfrm>
-            <a:off x="2535174" y="4114800"/>
-            <a:ext cx="1042416" cy="1042416"/>
+          <p:cNvPr id="22" name="S07-mark241"/>
+          <p:cNvSpPr/>
+          <p:nvPr/>
+        </p:nvSpPr>
+        <p:spPr>
+          <a:xfrm>
+            <a:off x="2578608" y="4114800"/>
+            <a:ext cx="1303020" cy="1303020"/>
           </a:xfrm>
           <a:custGeom>
             <a:avLst/>
@@ -20585,24 +20470,24 @@
             <a:cxnLst/>
             <a:rect l="l" t="t" r="r" b="b"/>
             <a:pathLst>
-              <a:path w="1042416" h="1042416">
+              <a:path w="1303020" h="1303020">
                 <a:moveTo>
                   <a:pt x="0" y="0"/>
                 </a:moveTo>
                 <a:lnTo>
-                  <a:pt x="0" y="347472"/>
-                </a:lnTo>
-                <a:lnTo>
-                  <a:pt x="347472" y="347472"/>
-                </a:lnTo>
-                <a:lnTo>
-                  <a:pt x="694944" y="1042416"/>
-                </a:lnTo>
-                <a:lnTo>
-                  <a:pt x="1042416" y="347472"/>
-                </a:lnTo>
-                <a:lnTo>
-                  <a:pt x="1042416" y="0"/>
+                  <a:pt x="0" y="434340"/>
+                </a:lnTo>
+                <a:lnTo>
+                  <a:pt x="434340" y="434340"/>
+                </a:lnTo>
+                <a:lnTo>
+                  <a:pt x="868680" y="1303020"/>
+                </a:lnTo>
+                <a:lnTo>
+                  <a:pt x="1303020" y="434340"/>
+                </a:lnTo>
+                <a:lnTo>
+                  <a:pt x="1303020" y="0"/>
                 </a:lnTo>
                 <a:close/>
               </a:path>
@@ -20619,14 +20504,14 @@
       </p:sp>
       <p:sp>
         <p:nvSpPr>
-          <p:cNvPr id="26" name="S07-mark246"/>
-          <p:cNvSpPr/>
-          <p:nvPr/>
-        </p:nvSpPr>
-        <p:spPr>
-          <a:xfrm>
-            <a:off x="2535174" y="3836822"/>
-            <a:ext cx="277978" cy="277978"/>
+          <p:cNvPr id="23" name="S07-mark242"/>
+          <p:cNvSpPr/>
+          <p:nvPr/>
+        </p:nvSpPr>
+        <p:spPr>
+          <a:xfrm>
+            <a:off x="2578608" y="3767328"/>
+            <a:ext cx="347472" cy="347472"/>
           </a:xfrm>
           <a:custGeom>
             <a:avLst/>
@@ -20635,81 +20520,81 @@
             <a:cxnLst/>
             <a:rect l="l" t="t" r="r" b="b"/>
             <a:pathLst>
-              <a:path w="277978" h="277978">
+              <a:path w="347472" h="347472">
                 <a:moveTo>
-                  <a:pt x="0" y="277978"/>
+                  <a:pt x="0" y="347472"/>
                 </a:moveTo>
                 <a:lnTo>
-                  <a:pt x="277978" y="277978"/>
-                </a:lnTo>
-                <a:lnTo>
-                  <a:pt x="277382" y="259797"/>
-                </a:lnTo>
-                <a:lnTo>
-                  <a:pt x="275599" y="241694"/>
-                </a:lnTo>
-                <a:lnTo>
-                  <a:pt x="272636" y="223747"/>
-                </a:lnTo>
-                <a:lnTo>
-                  <a:pt x="268506" y="206032"/>
-                </a:lnTo>
-                <a:lnTo>
-                  <a:pt x="263225" y="188625"/>
-                </a:lnTo>
-                <a:lnTo>
-                  <a:pt x="256818" y="171600"/>
-                </a:lnTo>
-                <a:lnTo>
-                  <a:pt x="249311" y="155031"/>
-                </a:lnTo>
-                <a:lnTo>
-                  <a:pt x="240736" y="138989"/>
-                </a:lnTo>
-                <a:lnTo>
-                  <a:pt x="231130" y="123542"/>
-                </a:lnTo>
-                <a:lnTo>
-                  <a:pt x="220534" y="108756"/>
-                </a:lnTo>
-                <a:lnTo>
-                  <a:pt x="208995" y="94694"/>
-                </a:lnTo>
-                <a:lnTo>
-                  <a:pt x="196560" y="81418"/>
-                </a:lnTo>
-                <a:lnTo>
-                  <a:pt x="183283" y="68983"/>
-                </a:lnTo>
-                <a:lnTo>
-                  <a:pt x="169222" y="57443"/>
-                </a:lnTo>
-                <a:lnTo>
-                  <a:pt x="154436" y="46848"/>
-                </a:lnTo>
-                <a:lnTo>
-                  <a:pt x="138989" y="37242"/>
-                </a:lnTo>
-                <a:lnTo>
-                  <a:pt x="122946" y="28667"/>
-                </a:lnTo>
-                <a:lnTo>
-                  <a:pt x="106377" y="21160"/>
-                </a:lnTo>
-                <a:lnTo>
-                  <a:pt x="89353" y="14752"/>
-                </a:lnTo>
-                <a:lnTo>
-                  <a:pt x="71946" y="9472"/>
-                </a:lnTo>
-                <a:lnTo>
-                  <a:pt x="54231" y="5341"/>
-                </a:lnTo>
-                <a:lnTo>
-                  <a:pt x="36283" y="2378"/>
-                </a:lnTo>
-                <a:lnTo>
-                  <a:pt x="18181" y="595"/>
+                  <a:pt x="347472" y="347472"/>
+                </a:lnTo>
+                <a:lnTo>
+                  <a:pt x="346728" y="324746"/>
+                </a:lnTo>
+                <a:lnTo>
+                  <a:pt x="344499" y="302118"/>
+                </a:lnTo>
+                <a:lnTo>
+                  <a:pt x="340795" y="279684"/>
+                </a:lnTo>
+                <a:lnTo>
+                  <a:pt x="335632" y="257540"/>
+                </a:lnTo>
+                <a:lnTo>
+                  <a:pt x="329032" y="235781"/>
+                </a:lnTo>
+                <a:lnTo>
+                  <a:pt x="321022" y="214500"/>
+                </a:lnTo>
+                <a:lnTo>
+                  <a:pt x="311638" y="193789"/>
+                </a:lnTo>
+                <a:lnTo>
+                  <a:pt x="300920" y="173736"/>
+                </a:lnTo>
+                <a:lnTo>
+                  <a:pt x="288912" y="154427"/>
+                </a:lnTo>
+                <a:lnTo>
+                  <a:pt x="275668" y="135944"/>
+                </a:lnTo>
+                <a:lnTo>
+                  <a:pt x="261243" y="118368"/>
+                </a:lnTo>
+                <a:lnTo>
+                  <a:pt x="245700" y="101772"/>
+                </a:lnTo>
+                <a:lnTo>
+                  <a:pt x="229104" y="86229"/>
+                </a:lnTo>
+                <a:lnTo>
+                  <a:pt x="211528" y="71804"/>
+                </a:lnTo>
+                <a:lnTo>
+                  <a:pt x="193045" y="58560"/>
+                </a:lnTo>
+                <a:lnTo>
+                  <a:pt x="173736" y="46552"/>
+                </a:lnTo>
+                <a:lnTo>
+                  <a:pt x="153683" y="35834"/>
+                </a:lnTo>
+                <a:lnTo>
+                  <a:pt x="132972" y="26450"/>
+                </a:lnTo>
+                <a:lnTo>
+                  <a:pt x="111691" y="18440"/>
+                </a:lnTo>
+                <a:lnTo>
+                  <a:pt x="89932" y="11840"/>
+                </a:lnTo>
+                <a:lnTo>
+                  <a:pt x="67788" y="6677"/>
+                </a:lnTo>
+                <a:lnTo>
+                  <a:pt x="45354" y="2973"/>
+                </a:lnTo>
+                <a:lnTo>
+                  <a:pt x="22726" y="744"/>
                 </a:lnTo>
                 <a:lnTo>
                   <a:pt x="0" y="0"/>
@@ -20726,13 +20611,13 @@
       </p:sp>
       <p:sp>
         <p:nvSpPr>
-          <p:cNvPr id="27" name="S07-mark247"/>
-          <p:cNvSpPr/>
-          <p:nvPr/>
-        </p:nvSpPr>
-        <p:spPr>
-          <a:xfrm>
-            <a:off x="2475738" y="4055364"/>
+          <p:cNvPr id="24" name="S07-mark243"/>
+          <p:cNvSpPr/>
+          <p:nvPr/>
+        </p:nvSpPr>
+        <p:spPr>
+          <a:xfrm>
+            <a:off x="2519172" y="4055364"/>
             <a:ext cx="118872" cy="118872"/>
           </a:xfrm>
           <a:prstGeom prst="ellipse">
@@ -20751,13 +20636,13 @@
       </p:sp>
       <p:sp>
         <p:nvSpPr>
-          <p:cNvPr id="28" name="S07-label249"/>
+          <p:cNvPr id="25" name="S07-label245"/>
           <p:cNvSpPr txBox="1"/>
           <p:nvPr/>
         </p:nvSpPr>
         <p:spPr>
           <a:xfrm>
-            <a:off x="2108753" y="4033221"/>
+            <a:off x="2152187" y="4033221"/>
             <a:ext cx="508000" cy="508000"/>
           </a:xfrm>
           <a:prstGeom prst="rect">
@@ -20790,13 +20675,13 @@
       </p:sp>
       <p:sp>
         <p:nvSpPr>
-          <p:cNvPr id="29" name="S07-label251"/>
+          <p:cNvPr id="26" name="S07-label247"/>
           <p:cNvSpPr txBox="1"/>
           <p:nvPr/>
         </p:nvSpPr>
         <p:spPr>
           <a:xfrm>
-            <a:off x="2737561" y="2638654"/>
+            <a:off x="2919984" y="2317242"/>
             <a:ext cx="707136" cy="381000"/>
           </a:xfrm>
           <a:prstGeom prst="rect">
@@ -20829,13 +20714,13 @@
       </p:sp>
       <p:sp>
         <p:nvSpPr>
-          <p:cNvPr id="30" name="S07-label253"/>
+          <p:cNvPr id="27" name="S07-label249"/>
           <p:cNvSpPr txBox="1"/>
           <p:nvPr/>
         </p:nvSpPr>
         <p:spPr>
           <a:xfrm>
-            <a:off x="3133192" y="5209946"/>
+            <a:off x="3463290" y="5531358"/>
             <a:ext cx="1097280" cy="381000"/>
           </a:xfrm>
           <a:prstGeom prst="rect">
@@ -20868,7 +20753,7 @@
       </p:sp>
       <p:sp>
         <p:nvSpPr>
-          <p:cNvPr id="31" name="S07-card254"/>
+          <p:cNvPr id="28" name="S07-card250"/>
           <p:cNvSpPr/>
           <p:nvPr/>
         </p:nvSpPr>
@@ -20895,7 +20780,7 @@
       </p:sp>
       <p:sp>
         <p:nvSpPr>
-          <p:cNvPr id="32" name="S07-cardtext255"/>
+          <p:cNvPr id="29" name="S07-cardtext251"/>
           <p:cNvSpPr txBox="1"/>
           <p:nvPr/>
         </p:nvSpPr>
@@ -20957,7 +20842,7 @@
       </p:sp>
       <p:sp>
         <p:nvSpPr>
-          <p:cNvPr id="33" name="S07-card256"/>
+          <p:cNvPr id="30" name="S07-card252"/>
           <p:cNvSpPr/>
           <p:nvPr/>
         </p:nvSpPr>
@@ -20984,7 +20869,7 @@
       </p:sp>
       <p:sp>
         <p:nvSpPr>
-          <p:cNvPr id="34" name="S07-cardtext257"/>
+          <p:cNvPr id="31" name="S07-cardtext253"/>
           <p:cNvSpPr txBox="1"/>
           <p:nvPr/>
         </p:nvSpPr>
@@ -21160,7 +21045,7 @@
       </p:sp>
       <p:sp>
         <p:nvSpPr>
-          <p:cNvPr id="3" name="S08-card258"/>
+          <p:cNvPr id="3" name="S08-card254"/>
           <p:cNvSpPr/>
           <p:nvPr/>
         </p:nvSpPr>
@@ -21187,7 +21072,7 @@
       </p:sp>
       <p:sp>
         <p:nvSpPr>
-          <p:cNvPr id="4" name="S08-cardtext259"/>
+          <p:cNvPr id="4" name="S08-cardtext255"/>
           <p:cNvSpPr txBox="1"/>
           <p:nvPr/>
         </p:nvSpPr>
@@ -21249,7 +21134,7 @@
       </p:sp>
       <p:sp>
         <p:nvSpPr>
-          <p:cNvPr id="5" name="S08-card260"/>
+          <p:cNvPr id="5" name="S08-card256"/>
           <p:cNvSpPr/>
           <p:nvPr/>
         </p:nvSpPr>
@@ -21276,7 +21161,7 @@
       </p:sp>
       <p:sp>
         <p:nvSpPr>
-          <p:cNvPr id="6" name="S08-cardtext261"/>
+          <p:cNvPr id="6" name="S08-cardtext257"/>
           <p:cNvSpPr txBox="1"/>
           <p:nvPr/>
         </p:nvSpPr>
@@ -21338,7 +21223,7 @@
       </p:sp>
       <p:sp>
         <p:nvSpPr>
-          <p:cNvPr id="7" name="S08-mark262"/>
+          <p:cNvPr id="7" name="S08-mark258"/>
           <p:cNvSpPr/>
           <p:nvPr/>
         </p:nvSpPr>
@@ -21385,7 +21270,7 @@
       </p:sp>
       <p:sp>
         <p:nvSpPr>
-          <p:cNvPr id="8" name="S08-mark263"/>
+          <p:cNvPr id="8" name="S08-mark259"/>
           <p:cNvSpPr/>
           <p:nvPr/>
         </p:nvSpPr>
@@ -21432,7 +21317,7 @@
       </p:sp>
       <p:sp>
         <p:nvSpPr>
-          <p:cNvPr id="9" name="S08-mark264"/>
+          <p:cNvPr id="9" name="S08-mark260"/>
           <p:cNvSpPr/>
           <p:nvPr/>
         </p:nvSpPr>
@@ -21455,7 +21340,7 @@
       </p:sp>
       <p:sp>
         <p:nvSpPr>
-          <p:cNvPr id="10" name="S08-mark265"/>
+          <p:cNvPr id="10" name="S08-mark261"/>
           <p:cNvSpPr/>
           <p:nvPr/>
         </p:nvSpPr>
@@ -21478,7 +21363,7 @@
       </p:sp>
       <p:sp>
         <p:nvSpPr>
-          <p:cNvPr id="11" name="S08-mark266"/>
+          <p:cNvPr id="11" name="S08-mark262"/>
           <p:cNvSpPr/>
           <p:nvPr/>
         </p:nvSpPr>
@@ -21501,7 +21386,7 @@
       </p:sp>
       <p:sp>
         <p:nvSpPr>
-          <p:cNvPr id="12" name="S08-mark267"/>
+          <p:cNvPr id="12" name="S08-mark263"/>
           <p:cNvSpPr/>
           <p:nvPr/>
         </p:nvSpPr>
@@ -21524,7 +21409,7 @@
       </p:sp>
       <p:sp>
         <p:nvSpPr>
-          <p:cNvPr id="13" name="S08-mark268"/>
+          <p:cNvPr id="13" name="S08-mark264"/>
           <p:cNvSpPr/>
           <p:nvPr/>
         </p:nvSpPr>
@@ -21547,7 +21432,7 @@
       </p:sp>
       <p:sp>
         <p:nvSpPr>
-          <p:cNvPr id="14" name="S08-mark269"/>
+          <p:cNvPr id="14" name="S08-mark265"/>
           <p:cNvSpPr/>
           <p:nvPr/>
         </p:nvSpPr>
@@ -21570,7 +21455,7 @@
       </p:sp>
       <p:sp>
         <p:nvSpPr>
-          <p:cNvPr id="15" name="S08-mark270"/>
+          <p:cNvPr id="15" name="S08-mark266"/>
           <p:cNvSpPr/>
           <p:nvPr/>
         </p:nvSpPr>
@@ -21593,7 +21478,7 @@
       </p:sp>
       <p:sp>
         <p:nvSpPr>
-          <p:cNvPr id="16" name="S08-mark271"/>
+          <p:cNvPr id="16" name="S08-mark267"/>
           <p:cNvSpPr/>
           <p:nvPr/>
         </p:nvSpPr>
@@ -21616,7 +21501,7 @@
       </p:sp>
       <p:sp>
         <p:nvSpPr>
-          <p:cNvPr id="17" name="S08-mark272"/>
+          <p:cNvPr id="17" name="S08-mark268"/>
           <p:cNvSpPr/>
           <p:nvPr/>
         </p:nvSpPr>
@@ -21639,7 +21524,7 @@
       </p:sp>
       <p:sp>
         <p:nvSpPr>
-          <p:cNvPr id="18" name="S08-mark273"/>
+          <p:cNvPr id="18" name="S08-mark269"/>
           <p:cNvSpPr/>
           <p:nvPr/>
         </p:nvSpPr>
@@ -21662,7 +21547,7 @@
       </p:sp>
       <p:sp>
         <p:nvSpPr>
-          <p:cNvPr id="19" name="S08-mark274"/>
+          <p:cNvPr id="19" name="S08-mark270"/>
           <p:cNvSpPr/>
           <p:nvPr/>
         </p:nvSpPr>
@@ -21685,7 +21570,7 @@
       </p:sp>
       <p:sp>
         <p:nvSpPr>
-          <p:cNvPr id="20" name="S08-mark275"/>
+          <p:cNvPr id="20" name="S08-mark271"/>
           <p:cNvSpPr/>
           <p:nvPr/>
         </p:nvSpPr>
@@ -21708,7 +21593,7 @@
       </p:sp>
       <p:sp>
         <p:nvSpPr>
-          <p:cNvPr id="21" name="S08-mark276"/>
+          <p:cNvPr id="21" name="S08-mark272"/>
           <p:cNvSpPr/>
           <p:nvPr/>
         </p:nvSpPr>
@@ -21731,7 +21616,7 @@
       </p:sp>
       <p:sp>
         <p:nvSpPr>
-          <p:cNvPr id="22" name="S08-mark277"/>
+          <p:cNvPr id="22" name="S08-mark273"/>
           <p:cNvSpPr/>
           <p:nvPr/>
         </p:nvSpPr>
@@ -21754,7 +21639,7 @@
       </p:sp>
       <p:sp>
         <p:nvSpPr>
-          <p:cNvPr id="23" name="S08-mark278"/>
+          <p:cNvPr id="23" name="S08-mark274"/>
           <p:cNvSpPr/>
           <p:nvPr/>
         </p:nvSpPr>
@@ -21777,7 +21662,7 @@
       </p:sp>
       <p:sp>
         <p:nvSpPr>
-          <p:cNvPr id="24" name="S08-mark279"/>
+          <p:cNvPr id="24" name="S08-mark275"/>
           <p:cNvSpPr/>
           <p:nvPr/>
         </p:nvSpPr>
@@ -21800,7 +21685,7 @@
       </p:sp>
       <p:sp>
         <p:nvSpPr>
-          <p:cNvPr id="25" name="S08-mark280"/>
+          <p:cNvPr id="25" name="S08-mark276"/>
           <p:cNvSpPr/>
           <p:nvPr/>
         </p:nvSpPr>
@@ -21823,7 +21708,7 @@
       </p:sp>
       <p:sp>
         <p:nvSpPr>
-          <p:cNvPr id="26" name="S08-mark281"/>
+          <p:cNvPr id="26" name="S08-mark277"/>
           <p:cNvSpPr/>
           <p:nvPr/>
         </p:nvSpPr>
@@ -21846,7 +21731,7 @@
       </p:sp>
       <p:sp>
         <p:nvSpPr>
-          <p:cNvPr id="27" name="S08-figure282" descr="점 ㄱ을 중심으로 깃발을 시계 방향으로 180° 돌림: 깃대가 아래를 향하고 깃발이 왼쪽을 가리킴"/>
+          <p:cNvPr id="27" name="S08-figure278" descr="점 ㄱ을 중심으로 깃발을 시계 방향으로 180° 돌림: 깃대가 아래를 향하고 깃발이 왼쪽을 가리킴"/>
           <p:cNvSpPr/>
           <p:nvPr/>
         </p:nvSpPr>
@@ -21896,7 +21781,7 @@
       </p:sp>
       <p:sp>
         <p:nvSpPr>
-          <p:cNvPr id="28" name="S08-mark283"/>
+          <p:cNvPr id="28" name="S08-mark279"/>
           <p:cNvSpPr/>
           <p:nvPr/>
         </p:nvSpPr>
@@ -21946,7 +21831,7 @@
       </p:sp>
       <p:sp>
         <p:nvSpPr>
-          <p:cNvPr id="29" name="S08-mark284"/>
+          <p:cNvPr id="29" name="S08-mark280"/>
           <p:cNvSpPr/>
           <p:nvPr/>
         </p:nvSpPr>
@@ -21971,7 +21856,7 @@
       </p:sp>
       <p:sp>
         <p:nvSpPr>
-          <p:cNvPr id="30" name="S08-label286"/>
+          <p:cNvPr id="30" name="S08-label282"/>
           <p:cNvSpPr txBox="1"/>
           <p:nvPr/>
         </p:nvSpPr>
@@ -22010,7 +21895,7 @@
       </p:sp>
       <p:sp>
         <p:nvSpPr>
-          <p:cNvPr id="31" name="S08-label287"/>
+          <p:cNvPr id="31" name="S08-label283"/>
           <p:cNvSpPr txBox="1"/>
           <p:nvPr/>
         </p:nvSpPr>
@@ -22049,7 +21934,7 @@
       </p:sp>
       <p:sp>
         <p:nvSpPr>
-          <p:cNvPr id="32" name="S08-mark288"/>
+          <p:cNvPr id="32" name="S08-mark284"/>
           <p:cNvSpPr/>
           <p:nvPr/>
         </p:nvSpPr>
@@ -22096,7 +21981,7 @@
       </p:sp>
       <p:sp>
         <p:nvSpPr>
-          <p:cNvPr id="33" name="S08-mark289"/>
+          <p:cNvPr id="33" name="S08-mark285"/>
           <p:cNvSpPr/>
           <p:nvPr/>
         </p:nvSpPr>
@@ -22143,7 +22028,7 @@
       </p:sp>
       <p:sp>
         <p:nvSpPr>
-          <p:cNvPr id="34" name="S08-mark290"/>
+          <p:cNvPr id="34" name="S08-mark286"/>
           <p:cNvSpPr/>
           <p:nvPr/>
         </p:nvSpPr>
@@ -22166,7 +22051,7 @@
       </p:sp>
       <p:sp>
         <p:nvSpPr>
-          <p:cNvPr id="35" name="S08-mark291"/>
+          <p:cNvPr id="35" name="S08-mark287"/>
           <p:cNvSpPr/>
           <p:nvPr/>
         </p:nvSpPr>
@@ -22189,7 +22074,7 @@
       </p:sp>
       <p:sp>
         <p:nvSpPr>
-          <p:cNvPr id="36" name="S08-mark292"/>
+          <p:cNvPr id="36" name="S08-mark288"/>
           <p:cNvSpPr/>
           <p:nvPr/>
         </p:nvSpPr>
@@ -22212,7 +22097,7 @@
       </p:sp>
       <p:sp>
         <p:nvSpPr>
-          <p:cNvPr id="37" name="S08-mark293"/>
+          <p:cNvPr id="37" name="S08-mark289"/>
           <p:cNvSpPr/>
           <p:nvPr/>
         </p:nvSpPr>
@@ -22235,7 +22120,7 @@
       </p:sp>
       <p:sp>
         <p:nvSpPr>
-          <p:cNvPr id="38" name="S08-mark294"/>
+          <p:cNvPr id="38" name="S08-mark290"/>
           <p:cNvSpPr/>
           <p:nvPr/>
         </p:nvSpPr>
@@ -22258,7 +22143,7 @@
       </p:sp>
       <p:sp>
         <p:nvSpPr>
-          <p:cNvPr id="39" name="S08-mark295"/>
+          <p:cNvPr id="39" name="S08-mark291"/>
           <p:cNvSpPr/>
           <p:nvPr/>
         </p:nvSpPr>
@@ -22281,7 +22166,7 @@
       </p:sp>
       <p:sp>
         <p:nvSpPr>
-          <p:cNvPr id="40" name="S08-mark296"/>
+          <p:cNvPr id="40" name="S08-mark292"/>
           <p:cNvSpPr/>
           <p:nvPr/>
         </p:nvSpPr>
@@ -22304,7 +22189,7 @@
       </p:sp>
       <p:sp>
         <p:nvSpPr>
-          <p:cNvPr id="41" name="S08-mark297"/>
+          <p:cNvPr id="41" name="S08-mark293"/>
           <p:cNvSpPr/>
           <p:nvPr/>
         </p:nvSpPr>
@@ -22327,7 +22212,7 @@
       </p:sp>
       <p:sp>
         <p:nvSpPr>
-          <p:cNvPr id="42" name="S08-mark298"/>
+          <p:cNvPr id="42" name="S08-mark294"/>
           <p:cNvSpPr/>
           <p:nvPr/>
         </p:nvSpPr>
@@ -22350,7 +22235,7 @@
       </p:sp>
       <p:sp>
         <p:nvSpPr>
-          <p:cNvPr id="43" name="S08-mark299"/>
+          <p:cNvPr id="43" name="S08-mark295"/>
           <p:cNvSpPr/>
           <p:nvPr/>
         </p:nvSpPr>
@@ -22373,7 +22258,7 @@
       </p:sp>
       <p:sp>
         <p:nvSpPr>
-          <p:cNvPr id="44" name="S08-mark300"/>
+          <p:cNvPr id="44" name="S08-mark296"/>
           <p:cNvSpPr/>
           <p:nvPr/>
         </p:nvSpPr>
@@ -22396,7 +22281,7 @@
       </p:sp>
       <p:sp>
         <p:nvSpPr>
-          <p:cNvPr id="45" name="S08-mark301"/>
+          <p:cNvPr id="45" name="S08-mark297"/>
           <p:cNvSpPr/>
           <p:nvPr/>
         </p:nvSpPr>
@@ -22419,7 +22304,7 @@
       </p:sp>
       <p:sp>
         <p:nvSpPr>
-          <p:cNvPr id="46" name="S08-mark302"/>
+          <p:cNvPr id="46" name="S08-mark298"/>
           <p:cNvSpPr/>
           <p:nvPr/>
         </p:nvSpPr>
@@ -22442,7 +22327,7 @@
       </p:sp>
       <p:sp>
         <p:nvSpPr>
-          <p:cNvPr id="47" name="S08-mark303"/>
+          <p:cNvPr id="47" name="S08-mark299"/>
           <p:cNvSpPr/>
           <p:nvPr/>
         </p:nvSpPr>
@@ -22465,7 +22350,7 @@
       </p:sp>
       <p:sp>
         <p:nvSpPr>
-          <p:cNvPr id="48" name="S08-mark304"/>
+          <p:cNvPr id="48" name="S08-mark300"/>
           <p:cNvSpPr/>
           <p:nvPr/>
         </p:nvSpPr>
@@ -22488,7 +22373,7 @@
       </p:sp>
       <p:sp>
         <p:nvSpPr>
-          <p:cNvPr id="49" name="S08-figure305" descr="점 ㄱ을 중심으로 깃발을 시계 반대 방향으로 90° 돌림: 깃대가 왼쪽을 향하고 깃발이 위쪽을 가리킴"/>
+          <p:cNvPr id="49" name="S08-figure301" descr="점 ㄱ을 중심으로 깃발을 시계 반대 방향으로 90° 돌림: 깃대가 왼쪽을 향하고 깃발이 위쪽을 가리킴"/>
           <p:cNvSpPr/>
           <p:nvPr/>
         </p:nvSpPr>
@@ -22538,7 +22423,7 @@
       </p:sp>
       <p:sp>
         <p:nvSpPr>
-          <p:cNvPr id="50" name="S08-mark306"/>
+          <p:cNvPr id="50" name="S08-mark302"/>
           <p:cNvSpPr/>
           <p:nvPr/>
         </p:nvSpPr>
@@ -22588,7 +22473,7 @@
       </p:sp>
       <p:sp>
         <p:nvSpPr>
-          <p:cNvPr id="51" name="S08-mark307"/>
+          <p:cNvPr id="51" name="S08-mark303"/>
           <p:cNvSpPr/>
           <p:nvPr/>
         </p:nvSpPr>
@@ -22613,7 +22498,7 @@
       </p:sp>
       <p:sp>
         <p:nvSpPr>
-          <p:cNvPr id="52" name="S08-label309"/>
+          <p:cNvPr id="52" name="S08-label305"/>
           <p:cNvSpPr txBox="1"/>
           <p:nvPr/>
         </p:nvSpPr>
@@ -22652,7 +22537,7 @@
       </p:sp>
       <p:sp>
         <p:nvSpPr>
-          <p:cNvPr id="53" name="S08-label310"/>
+          <p:cNvPr id="53" name="S08-label306"/>
           <p:cNvSpPr txBox="1"/>
           <p:nvPr/>
         </p:nvSpPr>
@@ -22805,7 +22690,7 @@
       </p:sp>
       <p:sp>
         <p:nvSpPr>
-          <p:cNvPr id="3" name="S09-card311"/>
+          <p:cNvPr id="3" name="S09-card307"/>
           <p:cNvSpPr/>
           <p:nvPr/>
         </p:nvSpPr>
@@ -22832,7 +22717,7 @@
       </p:sp>
       <p:sp>
         <p:nvSpPr>
-          <p:cNvPr id="4" name="S09-cardtext312"/>
+          <p:cNvPr id="4" name="S09-cardtext308"/>
           <p:cNvSpPr txBox="1"/>
           <p:nvPr/>
         </p:nvSpPr>
@@ -22874,7 +22759,7 @@
       </p:sp>
       <p:sp>
         <p:nvSpPr>
-          <p:cNvPr id="5" name="S09-card313"/>
+          <p:cNvPr id="5" name="S09-card309"/>
           <p:cNvSpPr/>
           <p:nvPr/>
         </p:nvSpPr>
@@ -22901,7 +22786,7 @@
       </p:sp>
       <p:sp>
         <p:nvSpPr>
-          <p:cNvPr id="6" name="S09-cardtext314"/>
+          <p:cNvPr id="6" name="S09-cardtext310"/>
           <p:cNvSpPr txBox="1"/>
           <p:nvPr/>
         </p:nvSpPr>
@@ -22943,7 +22828,7 @@
       </p:sp>
       <p:sp>
         <p:nvSpPr>
-          <p:cNvPr id="7" name="S09-chip315"/>
+          <p:cNvPr id="7" name="S09-chip311"/>
           <p:cNvSpPr txBox="1"/>
           <p:nvPr/>
         </p:nvSpPr>
@@ -22990,7 +22875,7 @@
       </p:sp>
       <p:sp>
         <p:nvSpPr>
-          <p:cNvPr id="8" name="S09-mark316"/>
+          <p:cNvPr id="8" name="S09-mark312"/>
           <p:cNvSpPr/>
           <p:nvPr/>
         </p:nvSpPr>
@@ -23037,7 +22922,7 @@
       </p:sp>
       <p:sp>
         <p:nvSpPr>
-          <p:cNvPr id="9" name="S09-mark317"/>
+          <p:cNvPr id="9" name="S09-mark313"/>
           <p:cNvSpPr/>
           <p:nvPr/>
         </p:nvSpPr>
@@ -23060,7 +22945,7 @@
       </p:sp>
       <p:sp>
         <p:nvSpPr>
-          <p:cNvPr id="10" name="S09-mark318"/>
+          <p:cNvPr id="10" name="S09-mark314"/>
           <p:cNvSpPr/>
           <p:nvPr/>
         </p:nvSpPr>
@@ -23083,7 +22968,7 @@
       </p:sp>
       <p:sp>
         <p:nvSpPr>
-          <p:cNvPr id="11" name="S09-mark319"/>
+          <p:cNvPr id="11" name="S09-mark315"/>
           <p:cNvSpPr/>
           <p:nvPr/>
         </p:nvSpPr>
@@ -23106,7 +22991,7 @@
       </p:sp>
       <p:sp>
         <p:nvSpPr>
-          <p:cNvPr id="12" name="S09-mark320"/>
+          <p:cNvPr id="12" name="S09-mark316"/>
           <p:cNvSpPr/>
           <p:nvPr/>
         </p:nvSpPr>
@@ -23129,7 +23014,7 @@
       </p:sp>
       <p:sp>
         <p:nvSpPr>
-          <p:cNvPr id="13" name="S09-mark321"/>
+          <p:cNvPr id="13" name="S09-mark317"/>
           <p:cNvSpPr/>
           <p:nvPr/>
         </p:nvSpPr>
@@ -23152,7 +23037,7 @@
       </p:sp>
       <p:sp>
         <p:nvSpPr>
-          <p:cNvPr id="14" name="S09-mark322"/>
+          <p:cNvPr id="14" name="S09-mark318"/>
           <p:cNvSpPr/>
           <p:nvPr/>
         </p:nvSpPr>
@@ -23175,7 +23060,7 @@
       </p:sp>
       <p:sp>
         <p:nvSpPr>
-          <p:cNvPr id="15" name="S09-mark323"/>
+          <p:cNvPr id="15" name="S09-mark319"/>
           <p:cNvSpPr/>
           <p:nvPr/>
         </p:nvSpPr>
@@ -23198,7 +23083,7 @@
       </p:sp>
       <p:sp>
         <p:nvSpPr>
-          <p:cNvPr id="16" name="S09-mark324"/>
+          <p:cNvPr id="16" name="S09-mark320"/>
           <p:cNvSpPr/>
           <p:nvPr/>
         </p:nvSpPr>
@@ -23221,7 +23106,7 @@
       </p:sp>
       <p:sp>
         <p:nvSpPr>
-          <p:cNvPr id="17" name="S09-figure325" descr="아래쪽으로 뒤집은 깃발: 깃발이 아래쪽에서 오른쪽을 향함"/>
+          <p:cNvPr id="17" name="S09-figure321" descr="아래쪽으로 뒤집은 깃발: 깃발이 아래쪽에서 오른쪽을 향함"/>
           <p:cNvSpPr/>
           <p:nvPr/>
         </p:nvSpPr>
@@ -23271,7 +23156,7 @@
       </p:sp>
       <p:sp>
         <p:nvSpPr>
-          <p:cNvPr id="18" name="S09-text326"/>
+          <p:cNvPr id="18" name="S09-text322"/>
           <p:cNvSpPr txBox="1"/>
           <p:nvPr/>
         </p:nvSpPr>
@@ -23310,7 +23195,7 @@
       </p:sp>
       <p:sp>
         <p:nvSpPr>
-          <p:cNvPr id="19" name="S09-chip327"/>
+          <p:cNvPr id="19" name="S09-chip323"/>
           <p:cNvSpPr txBox="1"/>
           <p:nvPr/>
         </p:nvSpPr>
@@ -23357,7 +23242,7 @@
       </p:sp>
       <p:sp>
         <p:nvSpPr>
-          <p:cNvPr id="20" name="S09-mark328"/>
+          <p:cNvPr id="20" name="S09-mark324"/>
           <p:cNvSpPr/>
           <p:nvPr/>
         </p:nvSpPr>
@@ -23404,7 +23289,7 @@
       </p:sp>
       <p:sp>
         <p:nvSpPr>
-          <p:cNvPr id="21" name="S09-mark329"/>
+          <p:cNvPr id="21" name="S09-mark325"/>
           <p:cNvSpPr/>
           <p:nvPr/>
         </p:nvSpPr>
@@ -23427,7 +23312,7 @@
       </p:sp>
       <p:sp>
         <p:nvSpPr>
-          <p:cNvPr id="22" name="S09-mark330"/>
+          <p:cNvPr id="22" name="S09-mark326"/>
           <p:cNvSpPr/>
           <p:nvPr/>
         </p:nvSpPr>
@@ -23450,7 +23335,7 @@
       </p:sp>
       <p:sp>
         <p:nvSpPr>
-          <p:cNvPr id="23" name="S09-mark331"/>
+          <p:cNvPr id="23" name="S09-mark327"/>
           <p:cNvSpPr/>
           <p:nvPr/>
         </p:nvSpPr>
@@ -23473,7 +23358,7 @@
       </p:sp>
       <p:sp>
         <p:nvSpPr>
-          <p:cNvPr id="24" name="S09-mark332"/>
+          <p:cNvPr id="24" name="S09-mark328"/>
           <p:cNvSpPr/>
           <p:nvPr/>
         </p:nvSpPr>
@@ -23496,7 +23381,7 @@
       </p:sp>
       <p:sp>
         <p:nvSpPr>
-          <p:cNvPr id="25" name="S09-mark333"/>
+          <p:cNvPr id="25" name="S09-mark329"/>
           <p:cNvSpPr/>
           <p:nvPr/>
         </p:nvSpPr>
@@ -23519,7 +23404,7 @@
       </p:sp>
       <p:sp>
         <p:nvSpPr>
-          <p:cNvPr id="26" name="S09-mark334"/>
+          <p:cNvPr id="26" name="S09-mark330"/>
           <p:cNvSpPr/>
           <p:nvPr/>
         </p:nvSpPr>
@@ -23542,7 +23427,7 @@
       </p:sp>
       <p:sp>
         <p:nvSpPr>
-          <p:cNvPr id="27" name="S09-mark335"/>
+          <p:cNvPr id="27" name="S09-mark331"/>
           <p:cNvSpPr/>
           <p:nvPr/>
         </p:nvSpPr>
@@ -23565,7 +23450,7 @@
       </p:sp>
       <p:sp>
         <p:nvSpPr>
-          <p:cNvPr id="28" name="S09-mark336"/>
+          <p:cNvPr id="28" name="S09-mark332"/>
           <p:cNvSpPr/>
           <p:nvPr/>
         </p:nvSpPr>
@@ -23588,7 +23473,7 @@
       </p:sp>
       <p:sp>
         <p:nvSpPr>
-          <p:cNvPr id="29" name="S09-figure337" descr="180° 돌린 깃발: 깃발이 아래쪽에서 왼쪽을 향함"/>
+          <p:cNvPr id="29" name="S09-figure333" descr="180° 돌린 깃발: 깃발이 아래쪽에서 왼쪽을 향함"/>
           <p:cNvSpPr/>
           <p:nvPr/>
         </p:nvSpPr>
@@ -23638,7 +23523,7 @@
       </p:sp>
       <p:sp>
         <p:nvSpPr>
-          <p:cNvPr id="30" name="S09-text338"/>
+          <p:cNvPr id="30" name="S09-text334"/>
           <p:cNvSpPr txBox="1"/>
           <p:nvPr/>
         </p:nvSpPr>
